--- a/docs/Allen_DATA_606_Capstone_Progress_Update.pptx
+++ b/docs/Allen_DATA_606_Capstone_Progress_Update.pptx
@@ -252,7 +252,7 @@
 (medium.en-FT)</c:v>
                   </c:pt>
                   <c:pt idx="2">
-                    <c:v>Our Fine-Tune
+                    <c:v>Our Fine-Tune†
 (small.en)</c:v>
                   </c:pt>
                 </c:lvl>
@@ -590,7 +590,7 @@
 (medium.en-FT)</c:v>
                   </c:pt>
                   <c:pt idx="2">
-                    <c:v>Our Fine-Tune
+                    <c:v>Our Fine-Tune†
 (small.en)</c:v>
                   </c:pt>
                 </c:lvl>
@@ -2687,7 +2687,7 @@
                 <a:ea typeface="Arial" pitchFamily="34" charset="-122"/>
                 <a:cs typeface="Arial" pitchFamily="34" charset="-120"/>
               </a:rPr>
-              <a:t>PROGRESS UPDATE  —  EDA COMPLETE  ·  MACHINE LEARNING IN PROGRESS</a:t>
+              <a:t>PROGRESS UPDATE  ·  EDA COMPLETE  ·  MACHINE LEARNING IN PROGRESS</a:t>
             </a:r>
             <a:endParaRPr lang="en-US" sz="1250" dirty="0"/>
           </a:p>
@@ -3026,7 +3026,7 @@
                 <a:ea typeface="Arial" pitchFamily="34" charset="-122"/>
                 <a:cs typeface="Arial" pitchFamily="34" charset="-120"/>
               </a:rPr>
-              <a:t>Promote the notebook’s training + evaluation loop into a reusable script — same pattern as the data-ingest CLI.</a:t>
+              <a:t>Promote the notebook’s training + evaluation loop into a reusable script, following the same pattern as the data-ingest CLI.</a:t>
             </a:r>
             <a:endParaRPr lang="en-US" sz="1000" dirty="0"/>
           </a:p>
@@ -4922,7 +4922,7 @@
                 <a:ea typeface="Arial" pitchFamily="34" charset="-122"/>
                 <a:cs typeface="Arial" pitchFamily="34" charset="-120"/>
               </a:rPr>
-              <a:t>Complete — key findings &amp; data readiness</a:t>
+              <a:t>Complete: key findings &amp; data readiness</a:t>
             </a:r>
             <a:endParaRPr lang="en-US" sz="1000" dirty="0"/>
           </a:p>
@@ -5774,7 +5774,7 @@
                 <a:ea typeface="Arial" pitchFamily="34" charset="-122"/>
                 <a:cs typeface="Arial" pitchFamily="34" charset="-120"/>
               </a:rPr>
-              <a:t>Goal: a prototype tool (Streamlit app) that transcribes real ATC audio and extracts structured operational information — for pilots and controllers, not just a transcript.</a:t>
+              <a:t>Goal: a prototype tool (Streamlit app) that transcribes real ATC audio and extracts structured operational information for pilots and controllers, not just a transcript.</a:t>
             </a:r>
             <a:endParaRPr lang="en-US" sz="1300" dirty="0"/>
           </a:p>
@@ -6635,7 +6635,7 @@
                 <a:ea typeface="Arial" pitchFamily="34" charset="-122"/>
                 <a:cs typeface="Arial" pitchFamily="34" charset="-120"/>
               </a:rPr>
-              <a:t>02.  EDA Results — Complete</a:t>
+              <a:t>02.  EDA Results: Complete</a:t>
             </a:r>
             <a:endParaRPr lang="en-US" sz="2800" dirty="0"/>
           </a:p>
@@ -7346,7 +7346,7 @@
                 <a:ea typeface="Arial" pitchFamily="34" charset="-122"/>
                 <a:cs typeface="Arial" pitchFamily="34" charset="-120"/>
               </a:rPr>
-              <a:t>Full ingestion → cleaning → feature-derivation pipeline is reusable (src/preprocessing/) and already exposed as a standalone CLI script — see slide 07.</a:t>
+              <a:t>Full ingestion → cleaning → feature-derivation pipeline is reusable (src/preprocessing/) and already exposed as a standalone CLI script (see slide 07).</a:t>
             </a:r>
             <a:endParaRPr lang="en-US" sz="1150" dirty="0"/>
           </a:p>
@@ -7495,7 +7495,7 @@
                 <a:ea typeface="Arial" pitchFamily="34" charset="-122"/>
                 <a:cs typeface="Arial" pitchFamily="34" charset="-120"/>
               </a:rPr>
-              <a:t>02.  Key Finding — The Acoustic Domain Gap</a:t>
+              <a:t>02.  Key Finding: The Acoustic Domain Gap</a:t>
             </a:r>
             <a:endParaRPr lang="en-US" sz="2800" dirty="0"/>
           </a:p>
@@ -7558,7 +7558,7 @@
                 <a:ea typeface="Arial" pitchFamily="34" charset="-122"/>
                 <a:cs typeface="Arial" pitchFamily="34" charset="-120"/>
               </a:rPr>
-              <a:t>Real ATC audio is measurably narrower-band than simulated audio — the acoustic fingerprint of a VHF radio channel, and a domain gap any model must account for.</a:t>
+              <a:t>Real ATC audio is measurably narrower-band than simulated audio, the acoustic fingerprint of a VHF radio channel and a domain gap any model must account for.</a:t>
             </a:r>
             <a:endParaRPr lang="en-US" sz="1150" dirty="0"/>
           </a:p>
@@ -7707,7 +7707,7 @@
                 <a:ea typeface="Arial" pitchFamily="34" charset="-122"/>
                 <a:cs typeface="Arial" pitchFamily="34" charset="-120"/>
               </a:rPr>
-              <a:t>02.  Key Finding — Vocabulary &amp; Phraseology</a:t>
+              <a:t>02.  Key Finding: Vocabulary &amp; Phraseology</a:t>
             </a:r>
             <a:endParaRPr lang="en-US" sz="2800" dirty="0"/>
           </a:p>
@@ -7919,7 +7919,7 @@
                 <a:ea typeface="Arial" pitchFamily="34" charset="-122"/>
                 <a:cs typeface="Arial" pitchFamily="34" charset="-120"/>
               </a:rPr>
-              <a:t>03.  ML Progress — Pipeline Tooling</a:t>
+              <a:t>03.  ML Progress: Pipeline Tooling</a:t>
             </a:r>
             <a:endParaRPr lang="en-US" sz="2800" dirty="0"/>
           </a:p>
@@ -8109,7 +8109,7 @@
                 <a:ea typeface="Arial" pitchFamily="34" charset="-122"/>
                 <a:cs typeface="Arial" pitchFamily="34" charset="-120"/>
               </a:rPr>
-              <a:t>Standalone CLI for data curation/ingest — no notebook memory overhead</a:t>
+              <a:t>Standalone CLI for data curation/ingest, with no notebook memory overhead</a:t>
             </a:r>
             <a:endParaRPr lang="en-US" sz="1050" dirty="0"/>
           </a:p>
@@ -8796,7 +8796,7 @@
         </p:nvGraphicFramePr>
         <p:xfrm>
           <a:off x="457200" y="1508760"/>
-          <a:ext cx="3931920" cy="2834640"/>
+          <a:ext cx="3931920" cy="2651760"/>
         </p:xfrm>
         <a:graphic xmlns:a="http://schemas.openxmlformats.org/drawingml/2006/main">
           <a:graphicData uri="http://schemas.openxmlformats.org/drawingml/2006/chart">
@@ -8812,7 +8812,7 @@
         </p:nvGraphicFramePr>
         <p:xfrm>
           <a:off x="4663440" y="1508760"/>
-          <a:ext cx="3931920" cy="2834640"/>
+          <a:ext cx="3931920" cy="2651760"/>
         </p:xfrm>
         <a:graphic xmlns:a="http://schemas.openxmlformats.org/drawingml/2006/main">
           <a:graphicData uri="http://schemas.openxmlformats.org/drawingml/2006/chart">
@@ -8828,8 +8828,8 @@
         </p:nvSpPr>
         <p:spPr>
           <a:xfrm>
-            <a:off x="457200" y="4434840"/>
-            <a:ext cx="8229600" cy="274320"/>
+            <a:off x="457200" y="4251960"/>
+            <a:ext cx="8229600" cy="384048"/>
           </a:xfrm>
           <a:prstGeom prst="rect">
             <a:avLst/>
@@ -8853,7 +8853,24 @@
                 <a:ea typeface="Arial" pitchFamily="34" charset="-122"/>
                 <a:cs typeface="Arial" pitchFamily="34" charset="-120"/>
               </a:rPr>
-              <a:t>*Baseline’s real-audio WER is dominated by two runaway-generation (hallucination) outliers — see next slide.</a:t>
+              <a:t>*Baseline’s real-audio WER is dominated by two runaway-generation (hallucination) outliers (see next slide).</a:t>
+            </a:r>
+            <a:endParaRPr lang="en-US" sz="1000" dirty="0"/>
+          </a:p>
+          <a:p>
+            <a:pPr algn="l" indent="0" marL="0">
+              <a:buNone/>
+            </a:pPr>
+            <a:r>
+              <a:rPr lang="en-US" sz="1000" i="1" dirty="0">
+                <a:solidFill>
+                  <a:srgbClr val="6B7A86"/>
+                </a:solidFill>
+                <a:latin typeface="Arial" pitchFamily="34" charset="0"/>
+                <a:ea typeface="Arial" pitchFamily="34" charset="-122"/>
+                <a:cs typeface="Arial" pitchFamily="34" charset="-120"/>
+              </a:rPr>
+              <a:t>†Our Fine-Tune’s figures are approximate: exact WER shifts by a few tenths of a point each time it’s retrained (GPU non-determinism).</a:t>
             </a:r>
             <a:endParaRPr lang="en-US" sz="1000" dirty="0"/>
           </a:p>
@@ -9002,7 +9019,7 @@
                 <a:ea typeface="Arial" pitchFamily="34" charset="-122"/>
                 <a:cs typeface="Arial" pitchFamily="34" charset="-120"/>
               </a:rPr>
-              <a:t>04.  ASR Prototype — Key Takeaways</a:t>
+              <a:t>04.  ASR Prototype: Key Takeaways</a:t>
             </a:r>
             <a:endParaRPr lang="en-US" sz="2800" dirty="0"/>
           </a:p>
@@ -9246,7 +9263,7 @@
                 <a:ea typeface="Arial" pitchFamily="34" charset="-122"/>
                 <a:cs typeface="Arial" pitchFamily="34" charset="-120"/>
               </a:rPr>
-              <a:t>The generic baseline repeats itself into a 150-word loop on some real-audio clips — a documented Whisper hallucination pattern, not a bug in our code.</a:t>
+              <a:t>The generic baseline repeats itself into a 150-word loop on some real-audio clips, a documented Whisper hallucination pattern, not a bug in our code.</a:t>
             </a:r>
             <a:endParaRPr lang="en-US" sz="1050" dirty="0"/>
           </a:p>
@@ -9490,7 +9507,7 @@
                 <a:ea typeface="Arial" pitchFamily="34" charset="-122"/>
                 <a:cs typeface="Arial" pitchFamily="34" charset="-120"/>
               </a:rPr>
-              <a:t>jacktol’s real-audio numbers carry an unverified train/test-overlap risk — flagged explicitly rather than presented as a clean win.</a:t>
+              <a:t>jacktol’s real-audio numbers carry an unverified train/test-overlap risk, flagged explicitly rather than presented as a clean win.</a:t>
             </a:r>
             <a:endParaRPr lang="en-US" sz="1050" dirty="0"/>
           </a:p>

--- a/docs/Allen_DATA_606_Capstone_Progress_Update.pptx
+++ b/docs/Allen_DATA_606_Capstone_Progress_Update.pptx
@@ -4,6 +4,9 @@
   <p:sldMasterIdLst>
     <p:sldMasterId id="2147483648" r:id="rId1"/>
   </p:sldMasterIdLst>
+  <p:notesMasterIdLst>
+    <p:notesMasterId r:id="rId14"/>
+  </p:notesMasterIdLst>
   <p:sldIdLst>
     <p:sldId id="256" r:id="rId2"/>
     <p:sldId id="257" r:id="rId3"/>
@@ -18,10 +21,7 @@
     <p:sldId id="266" r:id="rId12"/>
     <p:sldId id="267" r:id="rId13"/>
   </p:sldIdLst>
-  <p:notesMasterIdLst>
-    <p:notesMasterId r:id="rId14"/>
-  </p:notesMasterIdLst>
-  <p:sldSz cx="9144000" cy="5143500"/>
+  <p:sldSz cx="9144000" cy="5143500" type="screen16x9"/>
   <p:notesSz cx="5143500" cy="9144000"/>
   <p:defaultTextStyle>
     <a:lvl1pPr marL="0" algn="l" defTabSz="914400" rtl="0" eaLnBrk="1" latinLnBrk="0" hangingPunct="1">
@@ -115,13 +115,20 @@
       </a:defRPr>
     </a:lvl9pPr>
   </p:defaultTextStyle>
+  <p:extLst>
+    <p:ext uri="{EFAFB233-063F-42B5-8137-9DF3F51BA10A}">
+      <p15:sldGuideLst xmlns:p15="http://schemas.microsoft.com/office/powerpoint/2012/main"/>
+    </p:ext>
+  </p:extLst>
 </p:presentation>
 </file>
 
 <file path=ppt/charts/chart1.xml><?xml version="1.0" encoding="utf-8"?>
-<c:chartSpace xmlns:c="http://schemas.openxmlformats.org/drawingml/2006/chart" xmlns:a="http://schemas.openxmlformats.org/drawingml/2006/main" xmlns:r="http://schemas.openxmlformats.org/officeDocument/2006/relationships">
+<c:chartSpace xmlns:c="http://schemas.openxmlformats.org/drawingml/2006/chart" xmlns:a="http://schemas.openxmlformats.org/drawingml/2006/main" xmlns:r="http://schemas.openxmlformats.org/officeDocument/2006/relationships" xmlns:c16r2="http://schemas.microsoft.com/office/drawing/2015/06/chart">
   <c:date1904 val="0"/>
+  <c:lang val="en-US"/>
   <c:roundedCorners val="1"/>
+  <c:style val="2"/>
   <c:chart>
     <c:title>
       <c:tx>
@@ -138,7 +145,7 @@
               </a:defRPr>
             </a:pPr>
             <a:r>
-              <a:rPr sz="1200" b="0" i="0" u="none" strike="noStrike">
+              <a:rPr lang="en-US" sz="1200" b="0" i="0" u="none" strike="noStrike">
                 <a:solidFill>
                   <a:srgbClr val="384957"/>
                 </a:solidFill>
@@ -149,7 +156,6 @@
           </a:p>
         </c:rich>
       </c:tx>
-      <c:layout/>
       <c:overlay val="0"/>
     </c:title>
     <c:autoTitleDeleted val="0"/>
@@ -180,30 +186,6 @@
             <a:effectLst/>
           </c:spPr>
           <c:invertIfNegative val="0"/>
-          <c:dLbls>
-            <c:numFmt formatCode="0.0&quot;%&quot;" sourceLinked="0"/>
-            <c:txPr>
-              <a:bodyPr/>
-              <a:lstStyle/>
-              <a:p>
-                <a:pPr>
-                  <a:defRPr b="0" i="0" strike="noStrike" sz="1000" u="none">
-                    <a:solidFill>
-                      <a:srgbClr val="384957"/>
-                    </a:solidFill>
-                    <a:latin typeface="Arial"/>
-                  </a:defRPr>
-                </a:pPr>
-              </a:p>
-            </c:txPr>
-            <c:showLegendKey val="0"/>
-            <c:showVal val="1"/>
-            <c:showCatName val="0"/>
-            <c:showSerName val="0"/>
-            <c:showPercent val="0"/>
-            <c:showBubbleSize val="0"/>
-            <c:showLeaderLines val="0"/>
-          </c:dLbls>
           <c:dPt>
             <c:idx val="0"/>
             <c:invertIfNegative val="0"/>
@@ -214,6 +196,11 @@
               </a:solidFill>
               <a:effectLst/>
             </c:spPr>
+            <c:extLst>
+              <c:ext xmlns:c16="http://schemas.microsoft.com/office/drawing/2014/chart" uri="{C3380CC4-5D6E-409C-BE32-E72D297353CC}">
+                <c16:uniqueId val="{00000001-A371-4944-9646-8142059E67E1}"/>
+              </c:ext>
+            </c:extLst>
           </c:dPt>
           <c:dPt>
             <c:idx val="1"/>
@@ -225,6 +212,11 @@
               </a:solidFill>
               <a:effectLst/>
             </c:spPr>
+            <c:extLst>
+              <c:ext xmlns:c16="http://schemas.microsoft.com/office/drawing/2014/chart" uri="{C3380CC4-5D6E-409C-BE32-E72D297353CC}">
+                <c16:uniqueId val="{00000003-A371-4944-9646-8142059E67E1}"/>
+              </c:ext>
+            </c:extLst>
           </c:dPt>
           <c:dPt>
             <c:idx val="2"/>
@@ -236,28 +228,68 @@
               </a:solidFill>
               <a:effectLst/>
             </c:spPr>
+            <c:extLst>
+              <c:ext xmlns:c16="http://schemas.microsoft.com/office/drawing/2014/chart" uri="{C3380CC4-5D6E-409C-BE32-E72D297353CC}">
+                <c16:uniqueId val="{00000005-A371-4944-9646-8142059E67E1}"/>
+              </c:ext>
+            </c:extLst>
           </c:dPt>
+          <c:dLbls>
+            <c:numFmt formatCode="0.0&quot;%&quot;" sourceLinked="0"/>
+            <c:spPr>
+              <a:noFill/>
+              <a:ln>
+                <a:noFill/>
+              </a:ln>
+              <a:effectLst/>
+            </c:spPr>
+            <c:txPr>
+              <a:bodyPr/>
+              <a:lstStyle/>
+              <a:p>
+                <a:pPr>
+                  <a:defRPr sz="1000" b="0" i="0" u="none" strike="noStrike">
+                    <a:solidFill>
+                      <a:srgbClr val="384957"/>
+                    </a:solidFill>
+                    <a:latin typeface="Arial"/>
+                  </a:defRPr>
+                </a:pPr>
+                <a:endParaRPr lang="en-US"/>
+              </a:p>
+            </c:txPr>
+            <c:showLegendKey val="0"/>
+            <c:showVal val="1"/>
+            <c:showCatName val="0"/>
+            <c:showSerName val="0"/>
+            <c:showPercent val="0"/>
+            <c:showBubbleSize val="0"/>
+            <c:showLeaderLines val="0"/>
+            <c:extLst>
+              <c:ext xmlns:c15="http://schemas.microsoft.com/office/drawing/2012/chart" uri="{CE6537A1-D6FC-4f65-9D91-7224C49458BB}">
+                <c15:showLeaderLines val="0"/>
+              </c:ext>
+            </c:extLst>
+          </c:dLbls>
           <c:cat>
-            <c:multiLvlStrRef>
+            <c:strRef>
               <c:f>Sheet1!$A$2:$A$4</c:f>
-              <c:multiLvlStrCache>
+              <c:strCache>
                 <c:ptCount val="3"/>
-                <c:lvl>
-                  <c:pt idx="0">
-                    <c:v>Baseline
+                <c:pt idx="0">
+                  <c:v>Baseline
 (medium.en)</c:v>
-                  </c:pt>
-                  <c:pt idx="1">
-                    <c:v>jacktol
+                </c:pt>
+                <c:pt idx="1">
+                  <c:v>jacktol
 (medium.en-FT)</c:v>
-                  </c:pt>
-                  <c:pt idx="2">
-                    <c:v>Our Fine-Tune†
+                </c:pt>
+                <c:pt idx="2">
+                  <c:v>Our Fine-Tune†
 (small.en)</c:v>
-                  </c:pt>
-                </c:lvl>
-              </c:multiLvlStrCache>
-            </c:multiLvlStrRef>
+                </c:pt>
+              </c:strCache>
+            </c:strRef>
           </c:cat>
           <c:val>
             <c:numRef>
@@ -269,7 +301,7 @@
                   <c:v>161.9</c:v>
                 </c:pt>
                 <c:pt idx="1">
-                  <c:v>9.2</c:v>
+                  <c:v>9.1999999999999993</c:v>
                 </c:pt>
                 <c:pt idx="2">
                   <c:v>82.9</c:v>
@@ -277,36 +309,23 @@
               </c:numCache>
             </c:numRef>
           </c:val>
+          <c:extLst>
+            <c:ext xmlns:c16="http://schemas.microsoft.com/office/drawing/2014/chart" uri="{C3380CC4-5D6E-409C-BE32-E72D297353CC}">
+              <c16:uniqueId val="{00000006-A371-4944-9646-8142059E67E1}"/>
+            </c:ext>
+          </c:extLst>
         </c:ser>
         <c:dLbls>
-          <c:numFmt formatCode="0.0&quot;%&quot;" sourceLinked="0"/>
-          <c:txPr>
-            <a:bodyPr/>
-            <a:lstStyle/>
-            <a:p>
-              <a:pPr>
-                <a:defRPr b="0" i="0" strike="noStrike" sz="1000" u="none">
-                  <a:solidFill>
-                    <a:srgbClr val="384957"/>
-                  </a:solidFill>
-                  <a:latin typeface="Arial"/>
-                </a:defRPr>
-              </a:pPr>
-            </a:p>
-          </c:txPr>
           <c:showLegendKey val="0"/>
           <c:showVal val="1"/>
           <c:showCatName val="0"/>
           <c:showSerName val="0"/>
           <c:showPercent val="0"/>
           <c:showBubbleSize val="0"/>
-          <c:showLeaderLines val="0"/>
         </c:dLbls>
         <c:gapWidth val="150"/>
-        <c:overlap val="0"/>
         <c:axId val="2094734554"/>
         <c:axId val="2094734552"/>
-        <c:axId val="2094734556"/>
       </c:barChart>
       <c:catAx>
         <c:axId val="2094734554"/>
@@ -347,6 +366,7 @@
         <c:crosses val="autoZero"/>
         <c:auto val="1"/>
         <c:lblAlgn val="ctr"/>
+        <c:lblOffset val="100"/>
         <c:noMultiLvlLbl val="1"/>
       </c:catAx>
       <c:valAx>
@@ -382,7 +402,7 @@
                   </a:defRPr>
                 </a:pPr>
                 <a:r>
-                  <a:rPr sz="900" b="0" i="0" u="none" strike="noStrike">
+                  <a:rPr lang="en-US" sz="900" b="0" i="0" u="none" strike="noStrike">
                     <a:solidFill>
                       <a:srgbClr val="6B7A86"/>
                     </a:solidFill>
@@ -393,7 +413,6 @@
               </a:p>
             </c:rich>
           </c:tx>
-          <c:layout/>
           <c:overlay val="0"/>
         </c:title>
         <c:numFmt formatCode="General" sourceLinked="0"/>
@@ -440,6 +459,7 @@
     </c:plotArea>
     <c:plotVisOnly val="1"/>
     <c:dispBlanksAs val="span"/>
+    <c:showDLblsOverMax val="1"/>
   </c:chart>
   <c:spPr>
     <a:solidFill>
@@ -457,9 +477,11 @@
 </file>
 
 <file path=ppt/charts/chart2.xml><?xml version="1.0" encoding="utf-8"?>
-<c:chartSpace xmlns:c="http://schemas.openxmlformats.org/drawingml/2006/chart" xmlns:a="http://schemas.openxmlformats.org/drawingml/2006/main" xmlns:r="http://schemas.openxmlformats.org/officeDocument/2006/relationships">
+<c:chartSpace xmlns:c="http://schemas.openxmlformats.org/drawingml/2006/chart" xmlns:a="http://schemas.openxmlformats.org/drawingml/2006/main" xmlns:r="http://schemas.openxmlformats.org/officeDocument/2006/relationships" xmlns:c16r2="http://schemas.microsoft.com/office/drawing/2015/06/chart">
   <c:date1904 val="0"/>
+  <c:lang val="en-US"/>
   <c:roundedCorners val="1"/>
+  <c:style val="2"/>
   <c:chart>
     <c:title>
       <c:tx>
@@ -476,7 +498,7 @@
               </a:defRPr>
             </a:pPr>
             <a:r>
-              <a:rPr sz="1200" b="0" i="0" u="none" strike="noStrike">
+              <a:rPr lang="en-US" sz="1200" b="0" i="0" u="none" strike="noStrike">
                 <a:solidFill>
                   <a:srgbClr val="384957"/>
                 </a:solidFill>
@@ -487,7 +509,6 @@
           </a:p>
         </c:rich>
       </c:tx>
-      <c:layout/>
       <c:overlay val="0"/>
     </c:title>
     <c:autoTitleDeleted val="0"/>
@@ -518,30 +539,6 @@
             <a:effectLst/>
           </c:spPr>
           <c:invertIfNegative val="0"/>
-          <c:dLbls>
-            <c:numFmt formatCode="0.0&quot;%&quot;" sourceLinked="0"/>
-            <c:txPr>
-              <a:bodyPr/>
-              <a:lstStyle/>
-              <a:p>
-                <a:pPr>
-                  <a:defRPr b="0" i="0" strike="noStrike" sz="1000" u="none">
-                    <a:solidFill>
-                      <a:srgbClr val="384957"/>
-                    </a:solidFill>
-                    <a:latin typeface="Arial"/>
-                  </a:defRPr>
-                </a:pPr>
-              </a:p>
-            </c:txPr>
-            <c:showLegendKey val="0"/>
-            <c:showVal val="1"/>
-            <c:showCatName val="0"/>
-            <c:showSerName val="0"/>
-            <c:showPercent val="0"/>
-            <c:showBubbleSize val="0"/>
-            <c:showLeaderLines val="0"/>
-          </c:dLbls>
           <c:dPt>
             <c:idx val="0"/>
             <c:invertIfNegative val="0"/>
@@ -552,6 +549,11 @@
               </a:solidFill>
               <a:effectLst/>
             </c:spPr>
+            <c:extLst>
+              <c:ext xmlns:c16="http://schemas.microsoft.com/office/drawing/2014/chart" uri="{C3380CC4-5D6E-409C-BE32-E72D297353CC}">
+                <c16:uniqueId val="{00000001-A80B-48A2-B1CD-BF9790B4B1CA}"/>
+              </c:ext>
+            </c:extLst>
           </c:dPt>
           <c:dPt>
             <c:idx val="1"/>
@@ -563,6 +565,11 @@
               </a:solidFill>
               <a:effectLst/>
             </c:spPr>
+            <c:extLst>
+              <c:ext xmlns:c16="http://schemas.microsoft.com/office/drawing/2014/chart" uri="{C3380CC4-5D6E-409C-BE32-E72D297353CC}">
+                <c16:uniqueId val="{00000003-A80B-48A2-B1CD-BF9790B4B1CA}"/>
+              </c:ext>
+            </c:extLst>
           </c:dPt>
           <c:dPt>
             <c:idx val="2"/>
@@ -574,28 +581,68 @@
               </a:solidFill>
               <a:effectLst/>
             </c:spPr>
+            <c:extLst>
+              <c:ext xmlns:c16="http://schemas.microsoft.com/office/drawing/2014/chart" uri="{C3380CC4-5D6E-409C-BE32-E72D297353CC}">
+                <c16:uniqueId val="{00000005-A80B-48A2-B1CD-BF9790B4B1CA}"/>
+              </c:ext>
+            </c:extLst>
           </c:dPt>
+          <c:dLbls>
+            <c:numFmt formatCode="0.0&quot;%&quot;" sourceLinked="0"/>
+            <c:spPr>
+              <a:noFill/>
+              <a:ln>
+                <a:noFill/>
+              </a:ln>
+              <a:effectLst/>
+            </c:spPr>
+            <c:txPr>
+              <a:bodyPr/>
+              <a:lstStyle/>
+              <a:p>
+                <a:pPr>
+                  <a:defRPr sz="1000" b="0" i="0" u="none" strike="noStrike">
+                    <a:solidFill>
+                      <a:srgbClr val="384957"/>
+                    </a:solidFill>
+                    <a:latin typeface="Arial"/>
+                  </a:defRPr>
+                </a:pPr>
+                <a:endParaRPr lang="en-US"/>
+              </a:p>
+            </c:txPr>
+            <c:showLegendKey val="0"/>
+            <c:showVal val="1"/>
+            <c:showCatName val="0"/>
+            <c:showSerName val="0"/>
+            <c:showPercent val="0"/>
+            <c:showBubbleSize val="0"/>
+            <c:showLeaderLines val="0"/>
+            <c:extLst>
+              <c:ext xmlns:c15="http://schemas.microsoft.com/office/drawing/2012/chart" uri="{CE6537A1-D6FC-4f65-9D91-7224C49458BB}">
+                <c15:showLeaderLines val="0"/>
+              </c:ext>
+            </c:extLst>
+          </c:dLbls>
           <c:cat>
-            <c:multiLvlStrRef>
+            <c:strRef>
               <c:f>Sheet1!$A$2:$A$4</c:f>
-              <c:multiLvlStrCache>
+              <c:strCache>
                 <c:ptCount val="3"/>
-                <c:lvl>
-                  <c:pt idx="0">
-                    <c:v>Baseline
+                <c:pt idx="0">
+                  <c:v>Baseline
 (medium.en)</c:v>
-                  </c:pt>
-                  <c:pt idx="1">
-                    <c:v>jacktol
+                </c:pt>
+                <c:pt idx="1">
+                  <c:v>jacktol
 (medium.en-FT)</c:v>
-                  </c:pt>
-                  <c:pt idx="2">
-                    <c:v>Our Fine-Tune†
+                </c:pt>
+                <c:pt idx="2">
+                  <c:v>Our Fine-Tune†
 (small.en)</c:v>
-                  </c:pt>
-                </c:lvl>
-              </c:multiLvlStrCache>
-            </c:multiLvlStrRef>
+                </c:pt>
+              </c:strCache>
+            </c:strRef>
           </c:cat>
           <c:val>
             <c:numRef>
@@ -615,36 +662,23 @@
               </c:numCache>
             </c:numRef>
           </c:val>
+          <c:extLst>
+            <c:ext xmlns:c16="http://schemas.microsoft.com/office/drawing/2014/chart" uri="{C3380CC4-5D6E-409C-BE32-E72D297353CC}">
+              <c16:uniqueId val="{00000006-A80B-48A2-B1CD-BF9790B4B1CA}"/>
+            </c:ext>
+          </c:extLst>
         </c:ser>
         <c:dLbls>
-          <c:numFmt formatCode="0.0&quot;%&quot;" sourceLinked="0"/>
-          <c:txPr>
-            <a:bodyPr/>
-            <a:lstStyle/>
-            <a:p>
-              <a:pPr>
-                <a:defRPr b="0" i="0" strike="noStrike" sz="1000" u="none">
-                  <a:solidFill>
-                    <a:srgbClr val="384957"/>
-                  </a:solidFill>
-                  <a:latin typeface="Arial"/>
-                </a:defRPr>
-              </a:pPr>
-            </a:p>
-          </c:txPr>
           <c:showLegendKey val="0"/>
           <c:showVal val="1"/>
           <c:showCatName val="0"/>
           <c:showSerName val="0"/>
           <c:showPercent val="0"/>
           <c:showBubbleSize val="0"/>
-          <c:showLeaderLines val="0"/>
         </c:dLbls>
         <c:gapWidth val="150"/>
-        <c:overlap val="0"/>
         <c:axId val="2094734554"/>
         <c:axId val="2094734552"/>
-        <c:axId val="2094734556"/>
       </c:barChart>
       <c:catAx>
         <c:axId val="2094734554"/>
@@ -685,6 +719,7 @@
         <c:crosses val="autoZero"/>
         <c:auto val="1"/>
         <c:lblAlgn val="ctr"/>
+        <c:lblOffset val="100"/>
         <c:noMultiLvlLbl val="1"/>
       </c:catAx>
       <c:valAx>
@@ -720,7 +755,7 @@
                   </a:defRPr>
                 </a:pPr>
                 <a:r>
-                  <a:rPr sz="900" b="0" i="0" u="none" strike="noStrike">
+                  <a:rPr lang="en-US" sz="900" b="0" i="0" u="none" strike="noStrike">
                     <a:solidFill>
                       <a:srgbClr val="6B7A86"/>
                     </a:solidFill>
@@ -731,7 +766,6 @@
               </a:p>
             </c:rich>
           </c:tx>
-          <c:layout/>
           <c:overlay val="0"/>
         </c:title>
         <c:numFmt formatCode="General" sourceLinked="0"/>
@@ -778,6 +812,7 @@
     </c:plotArea>
     <c:plotVisOnly val="1"/>
     <c:dispBlanksAs val="span"/>
+    <c:showDLblsOverMax val="1"/>
   </c:chart>
   <c:spPr>
     <a:solidFill>
@@ -816,234 +851,10 @@
           <a:chExt cx="0" cy="0"/>
         </a:xfrm>
       </p:grpSpPr>
-      <p:sp>
-        <p:nvSpPr>
-          <p:cNvPr id="2" name="Header Placeholder 1"/>
-          <p:cNvSpPr>
-            <a:spLocks noGrp="1"/>
-          </p:cNvSpPr>
-          <p:nvPr>
-            <p:ph type="hdr" sz="quarter"/>
-          </p:nvPr>
-        </p:nvSpPr>
-        <p:spPr>
-          <a:xfrm>
-            <a:off x="0" y="0"/>
-            <a:ext cx="2971800" cy="458788"/>
-          </a:xfrm>
-          <a:prstGeom prst="rect">
-            <a:avLst/>
-          </a:prstGeom>
-        </p:spPr>
-        <p:txBody>
-          <a:bodyPr vert="horz" lIns="91440" tIns="45720" rIns="91440" bIns="45720" rtlCol="0"/>
-          <a:lstStyle>
-            <a:lvl1pPr algn="l">
-              <a:defRPr sz="1200"/>
-            </a:lvl1pPr>
-          </a:lstStyle>
-          <a:p>
-            <a:endParaRPr lang="en-US"/>
-          </a:p>
-        </p:txBody>
-      </p:sp>
-      <p:sp>
-        <p:nvSpPr>
-          <p:cNvPr id="3" name="Date Placeholder 2"/>
-          <p:cNvSpPr>
-            <a:spLocks noGrp="1"/>
-          </p:cNvSpPr>
-          <p:nvPr>
-            <p:ph type="dt" idx="1"/>
-          </p:nvPr>
-        </p:nvSpPr>
-        <p:spPr>
-          <a:xfrm>
-            <a:off x="3884613" y="0"/>
-            <a:ext cx="2971800" cy="458788"/>
-          </a:xfrm>
-          <a:prstGeom prst="rect">
-            <a:avLst/>
-          </a:prstGeom>
-        </p:spPr>
-        <p:txBody>
-          <a:bodyPr vert="horz" lIns="91440" tIns="45720" rIns="91440" bIns="45720" rtlCol="0"/>
-          <a:lstStyle>
-            <a:lvl1pPr algn="r">
-              <a:defRPr sz="1200"/>
-            </a:lvl1pPr>
-          </a:lstStyle>
-          <a:p>
-            <a:fld id="{5282F153-3F37-0F45-9E97-73ACFA13230C}" type="datetimeFigureOut">
-              <a:rPr lang="en-US"/>
-              <a:t>7/23/19</a:t>
-            </a:fld>
-            <a:endParaRPr lang="en-US"/>
-          </a:p>
-        </p:txBody>
-      </p:sp>
-      <p:sp>
-        <p:nvSpPr>
-          <p:cNvPr id="4" name="Slide Image Placeholder 3"/>
-          <p:cNvSpPr>
-            <a:spLocks noGrp="1" noRot="1" noChangeAspect="1"/>
-          </p:cNvSpPr>
-          <p:nvPr>
-            <p:ph type="sldImg" idx="2"/>
-          </p:nvPr>
-        </p:nvSpPr>
-        <p:spPr>
-          <a:xfrm>
-            <a:off x="685800" y="1143000"/>
-            <a:ext cx="5486400" cy="3086100"/>
-          </a:xfrm>
-          <a:prstGeom prst="rect">
-            <a:avLst/>
-          </a:prstGeom>
-          <a:noFill/>
-          <a:ln w="12700">
-            <a:solidFill>
-              <a:prstClr val="black"/>
-            </a:solidFill>
-          </a:ln>
-        </p:spPr>
-        <p:txBody>
-          <a:bodyPr vert="horz" lIns="91440" tIns="45720" rIns="91440" bIns="45720" rtlCol="0" anchor="ctr"/>
-          <a:lstStyle/>
-          <a:p>
-            <a:endParaRPr lang="en-US"/>
-          </a:p>
-        </p:txBody>
-      </p:sp>
-      <p:sp>
-        <p:nvSpPr>
-          <p:cNvPr id="5" name="Notes Placeholder 4"/>
-          <p:cNvSpPr>
-            <a:spLocks noGrp="1"/>
-          </p:cNvSpPr>
-          <p:nvPr>
-            <p:ph type="body" sz="quarter" idx="3"/>
-          </p:nvPr>
-        </p:nvSpPr>
-        <p:spPr>
-          <a:xfrm>
-            <a:off x="685800" y="4400550"/>
-            <a:ext cx="5486400" cy="3600450"/>
-          </a:xfrm>
-          <a:prstGeom prst="rect">
-            <a:avLst/>
-          </a:prstGeom>
-        </p:spPr>
-        <p:txBody>
-          <a:bodyPr vert="horz" lIns="91440" tIns="45720" rIns="91440" bIns="45720" rtlCol="0"/>
-          <a:lstStyle/>
-          <a:p>
-            <a:pPr lvl="0"/>
-            <a:r>
-              <a:rPr lang="en-US"/>
-              <a:t>Click to edit Master text styles</a:t>
-            </a:r>
-          </a:p>
-          <a:p>
-            <a:pPr lvl="1"/>
-            <a:r>
-              <a:rPr lang="en-US"/>
-              <a:t>Second level</a:t>
-            </a:r>
-          </a:p>
-          <a:p>
-            <a:pPr lvl="2"/>
-            <a:r>
-              <a:rPr lang="en-US"/>
-              <a:t>Third level</a:t>
-            </a:r>
-          </a:p>
-          <a:p>
-            <a:pPr lvl="3"/>
-            <a:r>
-              <a:rPr lang="en-US"/>
-              <a:t>Fourth level</a:t>
-            </a:r>
-          </a:p>
-          <a:p>
-            <a:pPr lvl="4"/>
-            <a:r>
-              <a:rPr lang="en-US"/>
-              <a:t>Fifth level</a:t>
-            </a:r>
-          </a:p>
-        </p:txBody>
-      </p:sp>
-      <p:sp>
-        <p:nvSpPr>
-          <p:cNvPr id="6" name="Footer Placeholder 5"/>
-          <p:cNvSpPr>
-            <a:spLocks noGrp="1"/>
-          </p:cNvSpPr>
-          <p:nvPr>
-            <p:ph type="ftr" sz="quarter" idx="4"/>
-          </p:nvPr>
-        </p:nvSpPr>
-        <p:spPr>
-          <a:xfrm>
-            <a:off x="0" y="8685213"/>
-            <a:ext cx="2971800" cy="458787"/>
-          </a:xfrm>
-          <a:prstGeom prst="rect">
-            <a:avLst/>
-          </a:prstGeom>
-        </p:spPr>
-        <p:txBody>
-          <a:bodyPr vert="horz" lIns="91440" tIns="45720" rIns="91440" bIns="45720" rtlCol="0" anchor="b"/>
-          <a:lstStyle>
-            <a:lvl1pPr algn="l">
-              <a:defRPr sz="1200"/>
-            </a:lvl1pPr>
-          </a:lstStyle>
-          <a:p>
-            <a:endParaRPr lang="en-US"/>
-          </a:p>
-        </p:txBody>
-      </p:sp>
-      <p:sp>
-        <p:nvSpPr>
-          <p:cNvPr id="7" name="Slide Number Placeholder 6"/>
-          <p:cNvSpPr>
-            <a:spLocks noGrp="1"/>
-          </p:cNvSpPr>
-          <p:nvPr>
-            <p:ph type="sldNum" sz="quarter" idx="5"/>
-          </p:nvPr>
-        </p:nvSpPr>
-        <p:spPr>
-          <a:xfrm>
-            <a:off x="3884613" y="8685213"/>
-            <a:ext cx="2971800" cy="458787"/>
-          </a:xfrm>
-          <a:prstGeom prst="rect">
-            <a:avLst/>
-          </a:prstGeom>
-        </p:spPr>
-        <p:txBody>
-          <a:bodyPr vert="horz" lIns="91440" tIns="45720" rIns="91440" bIns="45720" rtlCol="0" anchor="b"/>
-          <a:lstStyle>
-            <a:lvl1pPr algn="r">
-              <a:defRPr sz="1200"/>
-            </a:lvl1pPr>
-          </a:lstStyle>
-          <a:p>
-            <a:fld id="{CE5E9CC1-C706-0F49-92D6-E571CC5EEA8F}" type="slidenum">
-              <a:rPr lang="en-US"/>
-              <a:t>‹#›</a:t>
-            </a:fld>
-            <a:endParaRPr lang="en-US"/>
-          </a:p>
-        </p:txBody>
-      </p:sp>
     </p:spTree>
     <p:extLst>
       <p:ext uri="{BB962C8B-B14F-4D97-AF65-F5344CB8AC3E}">
-        <p14:creationId xmlns:p14="http://schemas.microsoft.com/office/powerpoint/2010/main" val="1024086991"/>
+        <p14:creationId xmlns:p14="http://schemas.microsoft.com/office/powerpoint/2010/main" val="1033058044"/>
       </p:ext>
     </p:extLst>
   </p:cSld>
@@ -1187,10 +998,6 @@
           <a:bodyPr/>
           <a:lstStyle/>
           <a:p>
-            <a:r>
-              <a:rPr lang="en-US" dirty="0"/>
-              <a:t/>
-            </a:r>
             <a:endParaRPr lang="en-US" dirty="0"/>
           </a:p>
         </p:txBody>
@@ -1275,10 +1082,6 @@
           <a:bodyPr/>
           <a:lstStyle/>
           <a:p>
-            <a:r>
-              <a:rPr lang="en-US" dirty="0"/>
-              <a:t/>
-            </a:r>
             <a:endParaRPr lang="en-US" dirty="0"/>
           </a:p>
         </p:txBody>
@@ -1363,10 +1166,6 @@
           <a:bodyPr/>
           <a:lstStyle/>
           <a:p>
-            <a:r>
-              <a:rPr lang="en-US" dirty="0"/>
-              <a:t/>
-            </a:r>
             <a:endParaRPr lang="en-US" dirty="0"/>
           </a:p>
         </p:txBody>
@@ -1451,10 +1250,6 @@
           <a:bodyPr/>
           <a:lstStyle/>
           <a:p>
-            <a:r>
-              <a:rPr lang="en-US" dirty="0"/>
-              <a:t/>
-            </a:r>
             <a:endParaRPr lang="en-US" dirty="0"/>
           </a:p>
         </p:txBody>
@@ -1539,10 +1334,6 @@
           <a:bodyPr/>
           <a:lstStyle/>
           <a:p>
-            <a:r>
-              <a:rPr lang="en-US" dirty="0"/>
-              <a:t/>
-            </a:r>
             <a:endParaRPr lang="en-US" dirty="0"/>
           </a:p>
         </p:txBody>
@@ -1627,10 +1418,6 @@
           <a:bodyPr/>
           <a:lstStyle/>
           <a:p>
-            <a:r>
-              <a:rPr lang="en-US" dirty="0"/>
-              <a:t/>
-            </a:r>
             <a:endParaRPr lang="en-US" dirty="0"/>
           </a:p>
         </p:txBody>
@@ -1715,10 +1502,6 @@
           <a:bodyPr/>
           <a:lstStyle/>
           <a:p>
-            <a:r>
-              <a:rPr lang="en-US" dirty="0"/>
-              <a:t/>
-            </a:r>
             <a:endParaRPr lang="en-US" dirty="0"/>
           </a:p>
         </p:txBody>
@@ -1803,10 +1586,6 @@
           <a:bodyPr/>
           <a:lstStyle/>
           <a:p>
-            <a:r>
-              <a:rPr lang="en-US" dirty="0"/>
-              <a:t/>
-            </a:r>
             <a:endParaRPr lang="en-US" dirty="0"/>
           </a:p>
         </p:txBody>
@@ -1891,10 +1670,6 @@
           <a:bodyPr/>
           <a:lstStyle/>
           <a:p>
-            <a:r>
-              <a:rPr lang="en-US" dirty="0"/>
-              <a:t/>
-            </a:r>
             <a:endParaRPr lang="en-US" dirty="0"/>
           </a:p>
         </p:txBody>
@@ -1979,10 +1754,6 @@
           <a:bodyPr/>
           <a:lstStyle/>
           <a:p>
-            <a:r>
-              <a:rPr lang="en-US" dirty="0"/>
-              <a:t/>
-            </a:r>
             <a:endParaRPr lang="en-US" dirty="0"/>
           </a:p>
         </p:txBody>
@@ -2067,10 +1838,6 @@
           <a:bodyPr/>
           <a:lstStyle/>
           <a:p>
-            <a:r>
-              <a:rPr lang="en-US" dirty="0"/>
-              <a:t/>
-            </a:r>
             <a:endParaRPr lang="en-US" dirty="0"/>
           </a:p>
         </p:txBody>
@@ -2155,10 +1922,6 @@
           <a:bodyPr/>
           <a:lstStyle/>
           <a:p>
-            <a:r>
-              <a:rPr lang="en-US" dirty="0"/>
-              <a:t/>
-            </a:r>
             <a:endParaRPr lang="en-US" dirty="0"/>
           </a:p>
         </p:txBody>
@@ -2232,6 +1995,11 @@
 <file path=ppt/slideMasters/slideMaster1.xml><?xml version="1.0" encoding="utf-8"?>
 <p:sldMaster xmlns:a="http://schemas.openxmlformats.org/drawingml/2006/main" xmlns:r="http://schemas.openxmlformats.org/officeDocument/2006/relationships" xmlns:p="http://schemas.openxmlformats.org/presentationml/2006/main">
   <p:cSld>
+    <p:bg>
+      <p:bgRef idx="1001">
+        <a:schemeClr val="bg1"/>
+      </p:bgRef>
+    </p:bg>
     <p:spTree>
       <p:nvGrpSpPr>
         <p:cNvPr id="1" name=""/>
@@ -2514,6 +2282,7 @@
         <a:solidFill>
           <a:srgbClr val="27333D"/>
         </a:solidFill>
+        <a:effectLst/>
       </p:bgPr>
     </p:bg>
     <p:spTree>
@@ -2532,14 +2301,14 @@
       </p:grpSpPr>
       <p:pic>
         <p:nvPicPr>
-          <p:cNvPr id="2" name="Image 0" descr="/tmp/claude-1000/-home-ballen-GitHub/10f2e268-ec1d-4d6f-8dc8-6cf2617b3162/scratchpad/pptx_work/bg/title-bg.png">    </p:cNvPr>
+          <p:cNvPr id="2" name="Image 0" descr="/tmp/claude-1000/-home-ballen-GitHub/10f2e268-ec1d-4d6f-8dc8-6cf2617b3162/scratchpad/pptx_work/bg/title-bg.png"/>
           <p:cNvPicPr>
             <a:picLocks noChangeAspect="1"/>
           </p:cNvPicPr>
           <p:nvPr/>
         </p:nvPicPr>
         <p:blipFill>
-          <a:blip r:embed="rId1"/>
+          <a:blip r:embed="rId3"/>
           <a:stretch>
             <a:fillRect/>
           </a:stretch>
@@ -2575,6 +2344,13 @@
           </a:solidFill>
           <a:ln/>
         </p:spPr>
+        <p:txBody>
+          <a:bodyPr/>
+          <a:lstStyle/>
+          <a:p>
+            <a:endParaRPr lang="en-US"/>
+          </a:p>
+        </p:txBody>
       </p:sp>
       <p:sp>
         <p:nvSpPr>
@@ -2597,7 +2373,7 @@
           <a:bodyPr wrap="square" lIns="0" tIns="0" rIns="0" bIns="0" rtlCol="0" anchor="ctr"/>
           <a:lstStyle/>
           <a:p>
-            <a:pPr algn="l" indent="0" marL="0">
+            <a:pPr marL="0" indent="0" algn="l">
               <a:buNone/>
             </a:pPr>
             <a:r>
@@ -2636,7 +2412,7 @@
           <a:bodyPr wrap="square" lIns="0" tIns="0" rIns="0" bIns="0" rtlCol="0" anchor="ctr"/>
           <a:lstStyle/>
           <a:p>
-            <a:pPr algn="l" indent="0" marL="0">
+            <a:pPr marL="0" indent="0" algn="l">
               <a:buNone/>
             </a:pPr>
             <a:r>
@@ -2675,11 +2451,11 @@
           <a:bodyPr wrap="square" lIns="0" tIns="0" rIns="0" bIns="0" rtlCol="0" anchor="ctr"/>
           <a:lstStyle/>
           <a:p>
-            <a:pPr algn="l" indent="0" marL="0">
-              <a:buNone/>
-            </a:pPr>
-            <a:r>
-              <a:rPr lang="en-US" sz="1250" b="1" spc="50" kern="0" dirty="0">
+            <a:pPr marL="0" indent="0" algn="l">
+              <a:buNone/>
+            </a:pPr>
+            <a:r>
+              <a:rPr lang="en-US" sz="1250" b="1" kern="0" spc="50" dirty="0">
                 <a:solidFill>
                   <a:srgbClr val="5FD4E3"/>
                 </a:solidFill>
@@ -2714,7 +2490,7 @@
           <a:bodyPr wrap="square" lIns="0" tIns="0" rIns="0" bIns="0" rtlCol="0" anchor="ctr"/>
           <a:lstStyle/>
           <a:p>
-            <a:pPr algn="l" indent="0" marL="0">
+            <a:pPr marL="0" indent="0" algn="l">
               <a:buNone/>
             </a:pPr>
             <a:r>
@@ -2753,7 +2529,7 @@
           <a:bodyPr wrap="square" lIns="0" tIns="0" rIns="0" bIns="0" rtlCol="0" anchor="ctr"/>
           <a:lstStyle/>
           <a:p>
-            <a:pPr algn="l" indent="0" marL="0">
+            <a:pPr marL="0" indent="0" algn="l">
               <a:buNone/>
             </a:pPr>
             <a:r>
@@ -2787,6 +2563,7 @@
         <a:solidFill>
           <a:srgbClr val="FFFFFF"/>
         </a:solidFill>
+        <a:effectLst/>
       </p:bgPr>
     </p:bg>
     <p:spTree>
@@ -2824,7 +2601,7 @@
           <a:bodyPr wrap="square" lIns="0" tIns="0" rIns="0" bIns="0" rtlCol="0" anchor="ctr"/>
           <a:lstStyle/>
           <a:p>
-            <a:pPr algn="l" indent="0" marL="0">
+            <a:pPr marL="0" indent="0" algn="l">
               <a:buNone/>
             </a:pPr>
             <a:r>
@@ -2863,13 +2640,20 @@
           </a:solidFill>
           <a:ln/>
           <a:effectLst>
-            <a:outerShdw sx="100000" sy="100000" kx="0" ky="0" algn="bl" rotWithShape="0" blurRad="76200" dist="25400" dir="5400000">
+            <a:outerShdw blurRad="76200" dist="25400" dir="5400000" algn="bl" rotWithShape="0">
               <a:srgbClr val="1B2733">
                 <a:alpha val="12000"/>
               </a:srgbClr>
             </a:outerShdw>
           </a:effectLst>
         </p:spPr>
+        <p:txBody>
+          <a:bodyPr/>
+          <a:lstStyle/>
+          <a:p>
+            <a:endParaRPr lang="en-US"/>
+          </a:p>
+        </p:txBody>
       </p:sp>
       <p:sp>
         <p:nvSpPr>
@@ -2890,6 +2674,13 @@
           </a:solidFill>
           <a:ln/>
         </p:spPr>
+        <p:txBody>
+          <a:bodyPr/>
+          <a:lstStyle/>
+          <a:p>
+            <a:endParaRPr lang="en-US"/>
+          </a:p>
+        </p:txBody>
       </p:sp>
       <p:sp>
         <p:nvSpPr>
@@ -2912,7 +2703,7 @@
           <a:bodyPr wrap="square" lIns="0" tIns="0" rIns="0" bIns="0" rtlCol="0" anchor="ctr"/>
           <a:lstStyle/>
           <a:p>
-            <a:pPr algn="ctr" indent="0" marL="0">
+            <a:pPr marL="0" indent="0" algn="ctr">
               <a:buNone/>
             </a:pPr>
             <a:r>
@@ -2932,387 +2723,7 @@
       </p:sp>
       <p:pic>
         <p:nvPicPr>
-          <p:cNvPr id="6" name="Image 0" descr="/tmp/claude-1000/-home-ballen-GitHub/10f2e268-ec1d-4d6f-8dc8-6cf2617b3162/scratchpad/pptx_work/icons/route-white.png">    </p:cNvPr>
-          <p:cNvPicPr>
-            <a:picLocks noChangeAspect="1"/>
-          </p:cNvPicPr>
-          <p:nvPr/>
-        </p:nvPicPr>
-        <p:blipFill>
-          <a:blip r:embed="rId1"/>
-          <a:stretch>
-            <a:fillRect/>
-          </a:stretch>
-        </p:blipFill>
-        <p:spPr>
-          <a:xfrm>
-            <a:off x="1559052" y="1673352"/>
-            <a:ext cx="402336" cy="402336"/>
-          </a:xfrm>
-          <a:prstGeom prst="rect">
-            <a:avLst/>
-          </a:prstGeom>
-        </p:spPr>
-      </p:pic>
-      <p:sp>
-        <p:nvSpPr>
-          <p:cNvPr id="7" name="Text 4"/>
-          <p:cNvSpPr txBox="1"/>
-          <p:nvPr/>
-        </p:nvSpPr>
-        <p:spPr>
-          <a:xfrm>
-            <a:off x="594360" y="2423160"/>
-            <a:ext cx="2331720" cy="594360"/>
-          </a:xfrm>
-          <a:prstGeom prst="rect">
-            <a:avLst/>
-          </a:prstGeom>
-          <a:noFill/>
-          <a:ln/>
-        </p:spPr>
-        <p:txBody>
-          <a:bodyPr wrap="square" lIns="0" tIns="0" rIns="0" bIns="0" rtlCol="0" anchor="ctr"/>
-          <a:lstStyle/>
-          <a:p>
-            <a:pPr algn="ctr" indent="0" marL="0">
-              <a:buNone/>
-            </a:pPr>
-            <a:r>
-              <a:rPr lang="en-US" sz="1350" b="1" dirty="0">
-                <a:solidFill>
-                  <a:srgbClr val="384957"/>
-                </a:solidFill>
-                <a:latin typeface="Arial" pitchFamily="34" charset="0"/>
-                <a:ea typeface="Arial" pitchFamily="34" charset="-122"/>
-                <a:cs typeface="Arial" pitchFamily="34" charset="-120"/>
-              </a:rPr>
-              <a:t>ASR Standalone Pipeline</a:t>
-            </a:r>
-            <a:endParaRPr lang="en-US" sz="1350" dirty="0"/>
-          </a:p>
-        </p:txBody>
-      </p:sp>
-      <p:sp>
-        <p:nvSpPr>
-          <p:cNvPr id="8" name="Text 5"/>
-          <p:cNvSpPr txBox="1"/>
-          <p:nvPr/>
-        </p:nvSpPr>
-        <p:spPr>
-          <a:xfrm>
-            <a:off x="640080" y="3017520"/>
-            <a:ext cx="2240280" cy="960120"/>
-          </a:xfrm>
-          <a:prstGeom prst="rect">
-            <a:avLst/>
-          </a:prstGeom>
-          <a:noFill/>
-          <a:ln/>
-        </p:spPr>
-        <p:txBody>
-          <a:bodyPr wrap="square" lIns="0" tIns="0" rIns="0" bIns="0" rtlCol="0" anchor="ctr"/>
-          <a:lstStyle/>
-          <a:p>
-            <a:pPr algn="ctr" indent="0" marL="0">
-              <a:buNone/>
-            </a:pPr>
-            <a:r>
-              <a:rPr lang="en-US" sz="1000" dirty="0">
-                <a:solidFill>
-                  <a:srgbClr val="6B7A86"/>
-                </a:solidFill>
-                <a:latin typeface="Arial" pitchFamily="34" charset="0"/>
-                <a:ea typeface="Arial" pitchFamily="34" charset="-122"/>
-                <a:cs typeface="Arial" pitchFamily="34" charset="-120"/>
-              </a:rPr>
-              <a:t>Promote the notebook’s training + evaluation loop into a reusable script, following the same pattern as the data-ingest CLI.</a:t>
-            </a:r>
-            <a:endParaRPr lang="en-US" sz="1000" dirty="0"/>
-          </a:p>
-        </p:txBody>
-      </p:sp>
-      <p:sp>
-        <p:nvSpPr>
-          <p:cNvPr id="9" name="Shape 6"/>
-          <p:cNvSpPr/>
-          <p:nvPr/>
-        </p:nvSpPr>
-        <p:spPr>
-          <a:xfrm>
-            <a:off x="3268980" y="1234440"/>
-            <a:ext cx="2606040" cy="2834640"/>
-          </a:xfrm>
-          <a:prstGeom prst="roundRect">
-            <a:avLst>
-              <a:gd name="adj" fmla="val 3509"/>
-            </a:avLst>
-          </a:prstGeom>
-          <a:solidFill>
-            <a:srgbClr val="F3F8FC"/>
-          </a:solidFill>
-          <a:ln/>
-          <a:effectLst>
-            <a:outerShdw sx="100000" sy="100000" kx="0" ky="0" algn="bl" rotWithShape="0" blurRad="76200" dist="25400" dir="5400000">
-              <a:srgbClr val="1B2733">
-                <a:alpha val="12000"/>
-              </a:srgbClr>
-            </a:outerShdw>
-          </a:effectLst>
-        </p:spPr>
-      </p:sp>
-      <p:sp>
-        <p:nvSpPr>
-          <p:cNvPr id="10" name="Shape 7"/>
-          <p:cNvSpPr/>
-          <p:nvPr/>
-        </p:nvSpPr>
-        <p:spPr>
-          <a:xfrm>
-            <a:off x="4206240" y="1508760"/>
-            <a:ext cx="731520" cy="731520"/>
-          </a:xfrm>
-          <a:prstGeom prst="ellipse">
-            <a:avLst/>
-          </a:prstGeom>
-          <a:solidFill>
-            <a:srgbClr val="384957"/>
-          </a:solidFill>
-          <a:ln/>
-        </p:spPr>
-      </p:sp>
-      <p:sp>
-        <p:nvSpPr>
-          <p:cNvPr id="11" name="Text 8"/>
-          <p:cNvSpPr txBox="1"/>
-          <p:nvPr/>
-        </p:nvSpPr>
-        <p:spPr>
-          <a:xfrm>
-            <a:off x="5372100" y="1307592"/>
-            <a:ext cx="411480" cy="411480"/>
-          </a:xfrm>
-          <a:prstGeom prst="rect">
-            <a:avLst/>
-          </a:prstGeom>
-          <a:noFill/>
-          <a:ln/>
-        </p:spPr>
-        <p:txBody>
-          <a:bodyPr wrap="square" lIns="0" tIns="0" rIns="0" bIns="0" rtlCol="0" anchor="ctr"/>
-          <a:lstStyle/>
-          <a:p>
-            <a:pPr algn="ctr" indent="0" marL="0">
-              <a:buNone/>
-            </a:pPr>
-            <a:r>
-              <a:rPr lang="en-US" sz="1800" b="1" dirty="0">
-                <a:solidFill>
-                  <a:srgbClr val="0097A7"/>
-                </a:solidFill>
-                <a:latin typeface="Arial" pitchFamily="34" charset="0"/>
-                <a:ea typeface="Arial" pitchFamily="34" charset="-122"/>
-                <a:cs typeface="Arial" pitchFamily="34" charset="-120"/>
-              </a:rPr>
-              <a:t>2</a:t>
-            </a:r>
-            <a:endParaRPr lang="en-US" sz="1800" dirty="0"/>
-          </a:p>
-        </p:txBody>
-      </p:sp>
-      <p:pic>
-        <p:nvPicPr>
-          <p:cNvPr id="12" name="Image 1" descr="/tmp/claude-1000/-home-ballen-GitHub/10f2e268-ec1d-4d6f-8dc8-6cf2617b3162/scratchpad/pptx_work/icons/tags-white.png">    </p:cNvPr>
-          <p:cNvPicPr>
-            <a:picLocks noChangeAspect="1"/>
-          </p:cNvPicPr>
-          <p:nvPr/>
-        </p:nvPicPr>
-        <p:blipFill>
-          <a:blip r:embed="rId2"/>
-          <a:stretch>
-            <a:fillRect/>
-          </a:stretch>
-        </p:blipFill>
-        <p:spPr>
-          <a:xfrm>
-            <a:off x="4370832" y="1673352"/>
-            <a:ext cx="402336" cy="402336"/>
-          </a:xfrm>
-          <a:prstGeom prst="rect">
-            <a:avLst/>
-          </a:prstGeom>
-        </p:spPr>
-      </p:pic>
-      <p:sp>
-        <p:nvSpPr>
-          <p:cNvPr id="13" name="Text 9"/>
-          <p:cNvSpPr txBox="1"/>
-          <p:nvPr/>
-        </p:nvSpPr>
-        <p:spPr>
-          <a:xfrm>
-            <a:off x="3406140" y="2423160"/>
-            <a:ext cx="2331720" cy="594360"/>
-          </a:xfrm>
-          <a:prstGeom prst="rect">
-            <a:avLst/>
-          </a:prstGeom>
-          <a:noFill/>
-          <a:ln/>
-        </p:spPr>
-        <p:txBody>
-          <a:bodyPr wrap="square" lIns="0" tIns="0" rIns="0" bIns="0" rtlCol="0" anchor="ctr"/>
-          <a:lstStyle/>
-          <a:p>
-            <a:pPr algn="ctr" indent="0" marL="0">
-              <a:buNone/>
-            </a:pPr>
-            <a:r>
-              <a:rPr lang="en-US" sz="1350" b="1" dirty="0">
-                <a:solidFill>
-                  <a:srgbClr val="384957"/>
-                </a:solidFill>
-                <a:latin typeface="Arial" pitchFamily="34" charset="0"/>
-                <a:ea typeface="Arial" pitchFamily="34" charset="-122"/>
-                <a:cs typeface="Arial" pitchFamily="34" charset="-120"/>
-              </a:rPr>
-              <a:t>Aviation Information Extraction</a:t>
-            </a:r>
-            <a:endParaRPr lang="en-US" sz="1350" dirty="0"/>
-          </a:p>
-        </p:txBody>
-      </p:sp>
-      <p:sp>
-        <p:nvSpPr>
-          <p:cNvPr id="14" name="Text 10"/>
-          <p:cNvSpPr txBox="1"/>
-          <p:nvPr/>
-        </p:nvSpPr>
-        <p:spPr>
-          <a:xfrm>
-            <a:off x="3451860" y="3017520"/>
-            <a:ext cx="2240280" cy="960120"/>
-          </a:xfrm>
-          <a:prstGeom prst="rect">
-            <a:avLst/>
-          </a:prstGeom>
-          <a:noFill/>
-          <a:ln/>
-        </p:spPr>
-        <p:txBody>
-          <a:bodyPr wrap="square" lIns="0" tIns="0" rIns="0" bIns="0" rtlCol="0" anchor="ctr"/>
-          <a:lstStyle/>
-          <a:p>
-            <a:pPr algn="ctr" indent="0" marL="0">
-              <a:buNone/>
-            </a:pPr>
-            <a:r>
-              <a:rPr lang="en-US" sz="1000" dirty="0">
-                <a:solidFill>
-                  <a:srgbClr val="6B7A86"/>
-                </a:solidFill>
-                <a:latin typeface="Arial" pitchFamily="34" charset="0"/>
-                <a:ea typeface="Arial" pitchFamily="34" charset="-122"/>
-                <a:cs typeface="Arial" pitchFamily="34" charset="-120"/>
-              </a:rPr>
-              <a:t>Use an LLM to help curate aviation entity labels (callsigns, commands, altitudes, headings, frequencies), then train a NER model on them.</a:t>
-            </a:r>
-            <a:endParaRPr lang="en-US" sz="1000" dirty="0"/>
-          </a:p>
-        </p:txBody>
-      </p:sp>
-      <p:sp>
-        <p:nvSpPr>
-          <p:cNvPr id="15" name="Shape 11"/>
-          <p:cNvSpPr/>
-          <p:nvPr/>
-        </p:nvSpPr>
-        <p:spPr>
-          <a:xfrm>
-            <a:off x="6080760" y="1234440"/>
-            <a:ext cx="2606040" cy="2834640"/>
-          </a:xfrm>
-          <a:prstGeom prst="roundRect">
-            <a:avLst>
-              <a:gd name="adj" fmla="val 3509"/>
-            </a:avLst>
-          </a:prstGeom>
-          <a:solidFill>
-            <a:srgbClr val="F3F8FC"/>
-          </a:solidFill>
-          <a:ln/>
-          <a:effectLst>
-            <a:outerShdw sx="100000" sy="100000" kx="0" ky="0" algn="bl" rotWithShape="0" blurRad="76200" dist="25400" dir="5400000">
-              <a:srgbClr val="1B2733">
-                <a:alpha val="12000"/>
-              </a:srgbClr>
-            </a:outerShdw>
-          </a:effectLst>
-        </p:spPr>
-      </p:sp>
-      <p:sp>
-        <p:nvSpPr>
-          <p:cNvPr id="16" name="Shape 12"/>
-          <p:cNvSpPr/>
-          <p:nvPr/>
-        </p:nvSpPr>
-        <p:spPr>
-          <a:xfrm>
-            <a:off x="7018020" y="1508760"/>
-            <a:ext cx="731520" cy="731520"/>
-          </a:xfrm>
-          <a:prstGeom prst="ellipse">
-            <a:avLst/>
-          </a:prstGeom>
-          <a:solidFill>
-            <a:srgbClr val="384957"/>
-          </a:solidFill>
-          <a:ln/>
-        </p:spPr>
-      </p:sp>
-      <p:sp>
-        <p:nvSpPr>
-          <p:cNvPr id="17" name="Text 13"/>
-          <p:cNvSpPr txBox="1"/>
-          <p:nvPr/>
-        </p:nvSpPr>
-        <p:spPr>
-          <a:xfrm>
-            <a:off x="8183880" y="1307592"/>
-            <a:ext cx="411480" cy="411480"/>
-          </a:xfrm>
-          <a:prstGeom prst="rect">
-            <a:avLst/>
-          </a:prstGeom>
-          <a:noFill/>
-          <a:ln/>
-        </p:spPr>
-        <p:txBody>
-          <a:bodyPr wrap="square" lIns="0" tIns="0" rIns="0" bIns="0" rtlCol="0" anchor="ctr"/>
-          <a:lstStyle/>
-          <a:p>
-            <a:pPr algn="ctr" indent="0" marL="0">
-              <a:buNone/>
-            </a:pPr>
-            <a:r>
-              <a:rPr lang="en-US" sz="1800" b="1" dirty="0">
-                <a:solidFill>
-                  <a:srgbClr val="0097A7"/>
-                </a:solidFill>
-                <a:latin typeface="Arial" pitchFamily="34" charset="0"/>
-                <a:ea typeface="Arial" pitchFamily="34" charset="-122"/>
-                <a:cs typeface="Arial" pitchFamily="34" charset="-120"/>
-              </a:rPr>
-              <a:t>3</a:t>
-            </a:r>
-            <a:endParaRPr lang="en-US" sz="1800" dirty="0"/>
-          </a:p>
-        </p:txBody>
-      </p:sp>
-      <p:pic>
-        <p:nvPicPr>
-          <p:cNvPr id="18" name="Image 2" descr="/tmp/claude-1000/-home-ballen-GitHub/10f2e268-ec1d-4d6f-8dc8-6cf2617b3162/scratchpad/pptx_work/icons/gears-white.png">    </p:cNvPr>
+          <p:cNvPr id="6" name="Image 0" descr="/tmp/claude-1000/-home-ballen-GitHub/10f2e268-ec1d-4d6f-8dc8-6cf2617b3162/scratchpad/pptx_work/icons/route-white.png"/>
           <p:cNvPicPr>
             <a:picLocks noChangeAspect="1"/>
           </p:cNvPicPr>
@@ -3326,6 +2737,414 @@
         </p:blipFill>
         <p:spPr>
           <a:xfrm>
+            <a:off x="1559052" y="1673352"/>
+            <a:ext cx="402336" cy="402336"/>
+          </a:xfrm>
+          <a:prstGeom prst="rect">
+            <a:avLst/>
+          </a:prstGeom>
+        </p:spPr>
+      </p:pic>
+      <p:sp>
+        <p:nvSpPr>
+          <p:cNvPr id="7" name="Text 4"/>
+          <p:cNvSpPr txBox="1"/>
+          <p:nvPr/>
+        </p:nvSpPr>
+        <p:spPr>
+          <a:xfrm>
+            <a:off x="594360" y="2423160"/>
+            <a:ext cx="2331720" cy="594360"/>
+          </a:xfrm>
+          <a:prstGeom prst="rect">
+            <a:avLst/>
+          </a:prstGeom>
+          <a:noFill/>
+          <a:ln/>
+        </p:spPr>
+        <p:txBody>
+          <a:bodyPr wrap="square" lIns="0" tIns="0" rIns="0" bIns="0" rtlCol="0" anchor="ctr"/>
+          <a:lstStyle/>
+          <a:p>
+            <a:pPr marL="0" indent="0" algn="ctr">
+              <a:buNone/>
+            </a:pPr>
+            <a:r>
+              <a:rPr lang="en-US" sz="1350" b="1" dirty="0">
+                <a:solidFill>
+                  <a:srgbClr val="384957"/>
+                </a:solidFill>
+                <a:latin typeface="Arial" pitchFamily="34" charset="0"/>
+                <a:ea typeface="Arial" pitchFamily="34" charset="-122"/>
+                <a:cs typeface="Arial" pitchFamily="34" charset="-120"/>
+              </a:rPr>
+              <a:t>ASR Standalone Pipeline</a:t>
+            </a:r>
+            <a:endParaRPr lang="en-US" sz="1350" dirty="0"/>
+          </a:p>
+        </p:txBody>
+      </p:sp>
+      <p:sp>
+        <p:nvSpPr>
+          <p:cNvPr id="8" name="Text 5"/>
+          <p:cNvSpPr txBox="1"/>
+          <p:nvPr/>
+        </p:nvSpPr>
+        <p:spPr>
+          <a:xfrm>
+            <a:off x="640080" y="3017520"/>
+            <a:ext cx="2240280" cy="960120"/>
+          </a:xfrm>
+          <a:prstGeom prst="rect">
+            <a:avLst/>
+          </a:prstGeom>
+          <a:noFill/>
+          <a:ln/>
+        </p:spPr>
+        <p:txBody>
+          <a:bodyPr wrap="square" lIns="0" tIns="0" rIns="0" bIns="0" rtlCol="0" anchor="ctr"/>
+          <a:lstStyle/>
+          <a:p>
+            <a:pPr marL="0" indent="0" algn="ctr">
+              <a:buNone/>
+            </a:pPr>
+            <a:r>
+              <a:rPr lang="en-US" sz="1000" dirty="0">
+                <a:solidFill>
+                  <a:srgbClr val="6B7A86"/>
+                </a:solidFill>
+                <a:latin typeface="Arial" pitchFamily="34" charset="0"/>
+                <a:ea typeface="Arial" pitchFamily="34" charset="-122"/>
+                <a:cs typeface="Arial" pitchFamily="34" charset="-120"/>
+              </a:rPr>
+              <a:t>Promote the notebook’s training + evaluation loop into a reusable script, following the same pattern as the data-ingest process.</a:t>
+            </a:r>
+            <a:endParaRPr lang="en-US" sz="1000" dirty="0"/>
+          </a:p>
+        </p:txBody>
+      </p:sp>
+      <p:sp>
+        <p:nvSpPr>
+          <p:cNvPr id="9" name="Shape 6"/>
+          <p:cNvSpPr/>
+          <p:nvPr/>
+        </p:nvSpPr>
+        <p:spPr>
+          <a:xfrm>
+            <a:off x="3268980" y="1234440"/>
+            <a:ext cx="2606040" cy="2834640"/>
+          </a:xfrm>
+          <a:prstGeom prst="roundRect">
+            <a:avLst>
+              <a:gd name="adj" fmla="val 3509"/>
+            </a:avLst>
+          </a:prstGeom>
+          <a:solidFill>
+            <a:srgbClr val="F3F8FC"/>
+          </a:solidFill>
+          <a:ln/>
+          <a:effectLst>
+            <a:outerShdw blurRad="76200" dist="25400" dir="5400000" algn="bl" rotWithShape="0">
+              <a:srgbClr val="1B2733">
+                <a:alpha val="12000"/>
+              </a:srgbClr>
+            </a:outerShdw>
+          </a:effectLst>
+        </p:spPr>
+        <p:txBody>
+          <a:bodyPr/>
+          <a:lstStyle/>
+          <a:p>
+            <a:endParaRPr lang="en-US"/>
+          </a:p>
+        </p:txBody>
+      </p:sp>
+      <p:sp>
+        <p:nvSpPr>
+          <p:cNvPr id="10" name="Shape 7"/>
+          <p:cNvSpPr/>
+          <p:nvPr/>
+        </p:nvSpPr>
+        <p:spPr>
+          <a:xfrm>
+            <a:off x="4206240" y="1508760"/>
+            <a:ext cx="731520" cy="731520"/>
+          </a:xfrm>
+          <a:prstGeom prst="ellipse">
+            <a:avLst/>
+          </a:prstGeom>
+          <a:solidFill>
+            <a:srgbClr val="384957"/>
+          </a:solidFill>
+          <a:ln/>
+        </p:spPr>
+        <p:txBody>
+          <a:bodyPr/>
+          <a:lstStyle/>
+          <a:p>
+            <a:endParaRPr lang="en-US"/>
+          </a:p>
+        </p:txBody>
+      </p:sp>
+      <p:sp>
+        <p:nvSpPr>
+          <p:cNvPr id="11" name="Text 8"/>
+          <p:cNvSpPr txBox="1"/>
+          <p:nvPr/>
+        </p:nvSpPr>
+        <p:spPr>
+          <a:xfrm>
+            <a:off x="5372100" y="1307592"/>
+            <a:ext cx="411480" cy="411480"/>
+          </a:xfrm>
+          <a:prstGeom prst="rect">
+            <a:avLst/>
+          </a:prstGeom>
+          <a:noFill/>
+          <a:ln/>
+        </p:spPr>
+        <p:txBody>
+          <a:bodyPr wrap="square" lIns="0" tIns="0" rIns="0" bIns="0" rtlCol="0" anchor="ctr"/>
+          <a:lstStyle/>
+          <a:p>
+            <a:pPr marL="0" indent="0" algn="ctr">
+              <a:buNone/>
+            </a:pPr>
+            <a:r>
+              <a:rPr lang="en-US" sz="1800" b="1" dirty="0">
+                <a:solidFill>
+                  <a:srgbClr val="0097A7"/>
+                </a:solidFill>
+                <a:latin typeface="Arial" pitchFamily="34" charset="0"/>
+                <a:ea typeface="Arial" pitchFamily="34" charset="-122"/>
+                <a:cs typeface="Arial" pitchFamily="34" charset="-120"/>
+              </a:rPr>
+              <a:t>2</a:t>
+            </a:r>
+            <a:endParaRPr lang="en-US" sz="1800" dirty="0"/>
+          </a:p>
+        </p:txBody>
+      </p:sp>
+      <p:pic>
+        <p:nvPicPr>
+          <p:cNvPr id="12" name="Image 1" descr="/tmp/claude-1000/-home-ballen-GitHub/10f2e268-ec1d-4d6f-8dc8-6cf2617b3162/scratchpad/pptx_work/icons/tags-white.png"/>
+          <p:cNvPicPr>
+            <a:picLocks noChangeAspect="1"/>
+          </p:cNvPicPr>
+          <p:nvPr/>
+        </p:nvPicPr>
+        <p:blipFill>
+          <a:blip r:embed="rId4"/>
+          <a:stretch>
+            <a:fillRect/>
+          </a:stretch>
+        </p:blipFill>
+        <p:spPr>
+          <a:xfrm>
+            <a:off x="4370832" y="1673352"/>
+            <a:ext cx="402336" cy="402336"/>
+          </a:xfrm>
+          <a:prstGeom prst="rect">
+            <a:avLst/>
+          </a:prstGeom>
+        </p:spPr>
+      </p:pic>
+      <p:sp>
+        <p:nvSpPr>
+          <p:cNvPr id="13" name="Text 9"/>
+          <p:cNvSpPr txBox="1"/>
+          <p:nvPr/>
+        </p:nvSpPr>
+        <p:spPr>
+          <a:xfrm>
+            <a:off x="3406140" y="2423160"/>
+            <a:ext cx="2331720" cy="594360"/>
+          </a:xfrm>
+          <a:prstGeom prst="rect">
+            <a:avLst/>
+          </a:prstGeom>
+          <a:noFill/>
+          <a:ln/>
+        </p:spPr>
+        <p:txBody>
+          <a:bodyPr wrap="square" lIns="0" tIns="0" rIns="0" bIns="0" rtlCol="0" anchor="ctr"/>
+          <a:lstStyle/>
+          <a:p>
+            <a:pPr marL="0" indent="0" algn="ctr">
+              <a:buNone/>
+            </a:pPr>
+            <a:r>
+              <a:rPr lang="en-US" sz="1350" b="1" dirty="0">
+                <a:solidFill>
+                  <a:srgbClr val="384957"/>
+                </a:solidFill>
+                <a:latin typeface="Arial" pitchFamily="34" charset="0"/>
+                <a:ea typeface="Arial" pitchFamily="34" charset="-122"/>
+                <a:cs typeface="Arial" pitchFamily="34" charset="-120"/>
+              </a:rPr>
+              <a:t>Aviation Information Extraction</a:t>
+            </a:r>
+            <a:endParaRPr lang="en-US" sz="1350" dirty="0"/>
+          </a:p>
+        </p:txBody>
+      </p:sp>
+      <p:sp>
+        <p:nvSpPr>
+          <p:cNvPr id="14" name="Text 10"/>
+          <p:cNvSpPr txBox="1"/>
+          <p:nvPr/>
+        </p:nvSpPr>
+        <p:spPr>
+          <a:xfrm>
+            <a:off x="3451860" y="3017520"/>
+            <a:ext cx="2240280" cy="960120"/>
+          </a:xfrm>
+          <a:prstGeom prst="rect">
+            <a:avLst/>
+          </a:prstGeom>
+          <a:noFill/>
+          <a:ln/>
+        </p:spPr>
+        <p:txBody>
+          <a:bodyPr wrap="square" lIns="0" tIns="0" rIns="0" bIns="0" rtlCol="0" anchor="ctr"/>
+          <a:lstStyle/>
+          <a:p>
+            <a:pPr marL="0" indent="0" algn="ctr">
+              <a:buNone/>
+            </a:pPr>
+            <a:r>
+              <a:rPr lang="en-US" sz="1000" dirty="0">
+                <a:solidFill>
+                  <a:srgbClr val="6B7A86"/>
+                </a:solidFill>
+                <a:latin typeface="Arial" pitchFamily="34" charset="0"/>
+                <a:ea typeface="Arial" pitchFamily="34" charset="-122"/>
+                <a:cs typeface="Arial" pitchFamily="34" charset="-120"/>
+              </a:rPr>
+              <a:t>Use an LLM to help curate aviation entity labels (e.g., callsigns, commands, altitudes, headings, frequencies), then train a NER model on them.</a:t>
+            </a:r>
+            <a:endParaRPr lang="en-US" sz="1000" dirty="0"/>
+          </a:p>
+        </p:txBody>
+      </p:sp>
+      <p:sp>
+        <p:nvSpPr>
+          <p:cNvPr id="15" name="Shape 11"/>
+          <p:cNvSpPr/>
+          <p:nvPr/>
+        </p:nvSpPr>
+        <p:spPr>
+          <a:xfrm>
+            <a:off x="6080760" y="1234440"/>
+            <a:ext cx="2606040" cy="2834640"/>
+          </a:xfrm>
+          <a:prstGeom prst="roundRect">
+            <a:avLst>
+              <a:gd name="adj" fmla="val 3509"/>
+            </a:avLst>
+          </a:prstGeom>
+          <a:solidFill>
+            <a:srgbClr val="F3F8FC"/>
+          </a:solidFill>
+          <a:ln/>
+          <a:effectLst>
+            <a:outerShdw blurRad="76200" dist="25400" dir="5400000" algn="bl" rotWithShape="0">
+              <a:srgbClr val="1B2733">
+                <a:alpha val="12000"/>
+              </a:srgbClr>
+            </a:outerShdw>
+          </a:effectLst>
+        </p:spPr>
+        <p:txBody>
+          <a:bodyPr/>
+          <a:lstStyle/>
+          <a:p>
+            <a:endParaRPr lang="en-US"/>
+          </a:p>
+        </p:txBody>
+      </p:sp>
+      <p:sp>
+        <p:nvSpPr>
+          <p:cNvPr id="16" name="Shape 12"/>
+          <p:cNvSpPr/>
+          <p:nvPr/>
+        </p:nvSpPr>
+        <p:spPr>
+          <a:xfrm>
+            <a:off x="7018020" y="1508760"/>
+            <a:ext cx="731520" cy="731520"/>
+          </a:xfrm>
+          <a:prstGeom prst="ellipse">
+            <a:avLst/>
+          </a:prstGeom>
+          <a:solidFill>
+            <a:srgbClr val="384957"/>
+          </a:solidFill>
+          <a:ln/>
+        </p:spPr>
+        <p:txBody>
+          <a:bodyPr/>
+          <a:lstStyle/>
+          <a:p>
+            <a:endParaRPr lang="en-US"/>
+          </a:p>
+        </p:txBody>
+      </p:sp>
+      <p:sp>
+        <p:nvSpPr>
+          <p:cNvPr id="17" name="Text 13"/>
+          <p:cNvSpPr txBox="1"/>
+          <p:nvPr/>
+        </p:nvSpPr>
+        <p:spPr>
+          <a:xfrm>
+            <a:off x="8183880" y="1307592"/>
+            <a:ext cx="411480" cy="411480"/>
+          </a:xfrm>
+          <a:prstGeom prst="rect">
+            <a:avLst/>
+          </a:prstGeom>
+          <a:noFill/>
+          <a:ln/>
+        </p:spPr>
+        <p:txBody>
+          <a:bodyPr wrap="square" lIns="0" tIns="0" rIns="0" bIns="0" rtlCol="0" anchor="ctr"/>
+          <a:lstStyle/>
+          <a:p>
+            <a:pPr marL="0" indent="0" algn="ctr">
+              <a:buNone/>
+            </a:pPr>
+            <a:r>
+              <a:rPr lang="en-US" sz="1800" b="1" dirty="0">
+                <a:solidFill>
+                  <a:srgbClr val="0097A7"/>
+                </a:solidFill>
+                <a:latin typeface="Arial" pitchFamily="34" charset="0"/>
+                <a:ea typeface="Arial" pitchFamily="34" charset="-122"/>
+                <a:cs typeface="Arial" pitchFamily="34" charset="-120"/>
+              </a:rPr>
+              <a:t>3</a:t>
+            </a:r>
+            <a:endParaRPr lang="en-US" sz="1800" dirty="0"/>
+          </a:p>
+        </p:txBody>
+      </p:sp>
+      <p:pic>
+        <p:nvPicPr>
+          <p:cNvPr id="18" name="Image 2" descr="/tmp/claude-1000/-home-ballen-GitHub/10f2e268-ec1d-4d6f-8dc8-6cf2617b3162/scratchpad/pptx_work/icons/gears-white.png"/>
+          <p:cNvPicPr>
+            <a:picLocks noChangeAspect="1"/>
+          </p:cNvPicPr>
+          <p:nvPr/>
+        </p:nvPicPr>
+        <p:blipFill>
+          <a:blip r:embed="rId5"/>
+          <a:stretch>
+            <a:fillRect/>
+          </a:stretch>
+        </p:blipFill>
+        <p:spPr>
+          <a:xfrm>
             <a:off x="7182612" y="1673352"/>
             <a:ext cx="402336" cy="402336"/>
           </a:xfrm>
@@ -3355,7 +3174,7 @@
           <a:bodyPr wrap="square" lIns="0" tIns="0" rIns="0" bIns="0" rtlCol="0" anchor="ctr"/>
           <a:lstStyle/>
           <a:p>
-            <a:pPr algn="ctr" indent="0" marL="0">
+            <a:pPr marL="0" indent="0" algn="ctr">
               <a:buNone/>
             </a:pPr>
             <a:r>
@@ -3394,7 +3213,7 @@
           <a:bodyPr wrap="square" lIns="0" tIns="0" rIns="0" bIns="0" rtlCol="0" anchor="ctr"/>
           <a:lstStyle/>
           <a:p>
-            <a:pPr algn="ctr" indent="0" marL="0">
+            <a:pPr marL="0" indent="0" algn="ctr">
               <a:buNone/>
             </a:pPr>
             <a:r>
@@ -3433,7 +3252,7 @@
           <a:bodyPr wrap="square" lIns="0" tIns="0" rIns="0" bIns="0" rtlCol="0" anchor="ctr"/>
           <a:lstStyle/>
           <a:p>
-            <a:pPr algn="l" indent="0" marL="0">
+            <a:pPr marL="0" indent="0" algn="l">
               <a:buNone/>
             </a:pPr>
             <a:r>
@@ -3472,7 +3291,7 @@
           <a:bodyPr wrap="square" lIns="0" tIns="0" rIns="0" bIns="0" rtlCol="0" anchor="ctr"/>
           <a:lstStyle/>
           <a:p>
-            <a:pPr algn="r" indent="0" marL="0">
+            <a:pPr marL="0" indent="0" algn="r">
               <a:buNone/>
             </a:pPr>
             <a:r>
@@ -3506,6 +3325,7 @@
         <a:solidFill>
           <a:srgbClr val="FFFFFF"/>
         </a:solidFill>
+        <a:effectLst/>
       </p:bgPr>
     </p:bg>
     <p:spTree>
@@ -3543,7 +3363,7 @@
           <a:bodyPr wrap="square" lIns="0" tIns="0" rIns="0" bIns="0" rtlCol="0" anchor="ctr"/>
           <a:lstStyle/>
           <a:p>
-            <a:pPr algn="l" indent="0" marL="0">
+            <a:pPr marL="0" indent="0" algn="l">
               <a:buNone/>
             </a:pPr>
             <a:r>
@@ -3582,7 +3402,7 @@
           <a:bodyPr wrap="square" lIns="0" tIns="0" rIns="0" bIns="0" rtlCol="0" anchor="ctr"/>
           <a:lstStyle/>
           <a:p>
-            <a:pPr algn="l" indent="0" marL="0">
+            <a:pPr marL="0" indent="0" algn="l">
               <a:buNone/>
             </a:pPr>
             <a:r>
@@ -3619,222 +3439,17 @@
           </a:solidFill>
           <a:ln/>
         </p:spPr>
+        <p:txBody>
+          <a:bodyPr/>
+          <a:lstStyle/>
+          <a:p>
+            <a:endParaRPr lang="en-US"/>
+          </a:p>
+        </p:txBody>
       </p:sp>
       <p:pic>
         <p:nvPicPr>
-          <p:cNvPr id="5" name="Image 0" descr="/tmp/claude-1000/-home-ballen-GitHub/10f2e268-ec1d-4d6f-8dc8-6cf2617b3162/scratchpad/pptx_work/icons/check-circle-white.png">    </p:cNvPr>
-          <p:cNvPicPr>
-            <a:picLocks noChangeAspect="1"/>
-          </p:cNvPicPr>
-          <p:nvPr/>
-        </p:nvPicPr>
-        <p:blipFill>
-          <a:blip r:embed="rId1"/>
-          <a:stretch>
-            <a:fillRect/>
-          </a:stretch>
-        </p:blipFill>
-        <p:spPr>
-          <a:xfrm>
-            <a:off x="850392" y="2267712"/>
-            <a:ext cx="402336" cy="402336"/>
-          </a:xfrm>
-          <a:prstGeom prst="rect">
-            <a:avLst/>
-          </a:prstGeom>
-        </p:spPr>
-      </p:pic>
-      <p:sp>
-        <p:nvSpPr>
-          <p:cNvPr id="6" name="Text 3"/>
-          <p:cNvSpPr txBox="1"/>
-          <p:nvPr/>
-        </p:nvSpPr>
-        <p:spPr>
-          <a:xfrm>
-            <a:off x="320040" y="2926080"/>
-            <a:ext cx="1463040" cy="548640"/>
-          </a:xfrm>
-          <a:prstGeom prst="rect">
-            <a:avLst/>
-          </a:prstGeom>
-          <a:noFill/>
-          <a:ln/>
-        </p:spPr>
-        <p:txBody>
-          <a:bodyPr wrap="square" lIns="0" tIns="0" rIns="0" bIns="0" rtlCol="0" anchor="ctr"/>
-          <a:lstStyle/>
-          <a:p>
-            <a:pPr algn="ctr" indent="0" marL="0">
-              <a:buNone/>
-            </a:pPr>
-            <a:r>
-              <a:rPr lang="en-US" sz="1050" b="1" dirty="0">
-                <a:solidFill>
-                  <a:srgbClr val="384957"/>
-                </a:solidFill>
-                <a:latin typeface="Arial" pitchFamily="34" charset="0"/>
-                <a:ea typeface="Arial" pitchFamily="34" charset="-122"/>
-                <a:cs typeface="Arial" pitchFamily="34" charset="-120"/>
-              </a:rPr>
-              <a:t>EDA</a:t>
-            </a:r>
-            <a:endParaRPr lang="en-US" sz="1050" dirty="0"/>
-          </a:p>
-        </p:txBody>
-      </p:sp>
-      <p:sp>
-        <p:nvSpPr>
-          <p:cNvPr id="7" name="Shape 4"/>
-          <p:cNvSpPr/>
-          <p:nvPr/>
-        </p:nvSpPr>
-        <p:spPr>
-          <a:xfrm>
-            <a:off x="1645920" y="2468880"/>
-            <a:ext cx="219456" cy="0"/>
-          </a:xfrm>
-          <a:prstGeom prst="line">
-            <a:avLst/>
-          </a:prstGeom>
-          <a:noFill/>
-          <a:ln w="25400">
-            <a:solidFill>
-              <a:srgbClr val="C7D4DB"/>
-            </a:solidFill>
-            <a:prstDash val="solid"/>
-          </a:ln>
-        </p:spPr>
-      </p:sp>
-      <p:sp>
-        <p:nvSpPr>
-          <p:cNvPr id="8" name="Shape 5"/>
-          <p:cNvSpPr/>
-          <p:nvPr/>
-        </p:nvSpPr>
-        <p:spPr>
-          <a:xfrm>
-            <a:off x="2093976" y="2103120"/>
-            <a:ext cx="731520" cy="731520"/>
-          </a:xfrm>
-          <a:prstGeom prst="ellipse">
-            <a:avLst/>
-          </a:prstGeom>
-          <a:solidFill>
-            <a:srgbClr val="0097A7"/>
-          </a:solidFill>
-          <a:ln/>
-        </p:spPr>
-      </p:sp>
-      <p:pic>
-        <p:nvPicPr>
-          <p:cNvPr id="9" name="Image 1" descr="/tmp/claude-1000/-home-ballen-GitHub/10f2e268-ec1d-4d6f-8dc8-6cf2617b3162/scratchpad/pptx_work/icons/check-circle-white.png">    </p:cNvPr>
-          <p:cNvPicPr>
-            <a:picLocks noChangeAspect="1"/>
-          </p:cNvPicPr>
-          <p:nvPr/>
-        </p:nvPicPr>
-        <p:blipFill>
-          <a:blip r:embed="rId2"/>
-          <a:stretch>
-            <a:fillRect/>
-          </a:stretch>
-        </p:blipFill>
-        <p:spPr>
-          <a:xfrm>
-            <a:off x="2258568" y="2267712"/>
-            <a:ext cx="402336" cy="402336"/>
-          </a:xfrm>
-          <a:prstGeom prst="rect">
-            <a:avLst/>
-          </a:prstGeom>
-        </p:spPr>
-      </p:pic>
-      <p:sp>
-        <p:nvSpPr>
-          <p:cNvPr id="10" name="Text 6"/>
-          <p:cNvSpPr txBox="1"/>
-          <p:nvPr/>
-        </p:nvSpPr>
-        <p:spPr>
-          <a:xfrm>
-            <a:off x="1728216" y="2926080"/>
-            <a:ext cx="1463040" cy="548640"/>
-          </a:xfrm>
-          <a:prstGeom prst="rect">
-            <a:avLst/>
-          </a:prstGeom>
-          <a:noFill/>
-          <a:ln/>
-        </p:spPr>
-        <p:txBody>
-          <a:bodyPr wrap="square" lIns="0" tIns="0" rIns="0" bIns="0" rtlCol="0" anchor="ctr"/>
-          <a:lstStyle/>
-          <a:p>
-            <a:pPr algn="ctr" indent="0" marL="0">
-              <a:buNone/>
-            </a:pPr>
-            <a:r>
-              <a:rPr lang="en-US" sz="1050" b="1" dirty="0">
-                <a:solidFill>
-                  <a:srgbClr val="384957"/>
-                </a:solidFill>
-                <a:latin typeface="Arial" pitchFamily="34" charset="0"/>
-                <a:ea typeface="Arial" pitchFamily="34" charset="-122"/>
-                <a:cs typeface="Arial" pitchFamily="34" charset="-120"/>
-              </a:rPr>
-              <a:t>ASR Prototype</a:t>
-            </a:r>
-            <a:endParaRPr lang="en-US" sz="1050" dirty="0"/>
-          </a:p>
-        </p:txBody>
-      </p:sp>
-      <p:sp>
-        <p:nvSpPr>
-          <p:cNvPr id="11" name="Shape 7"/>
-          <p:cNvSpPr/>
-          <p:nvPr/>
-        </p:nvSpPr>
-        <p:spPr>
-          <a:xfrm>
-            <a:off x="3054096" y="2468880"/>
-            <a:ext cx="219456" cy="0"/>
-          </a:xfrm>
-          <a:prstGeom prst="line">
-            <a:avLst/>
-          </a:prstGeom>
-          <a:noFill/>
-          <a:ln w="25400">
-            <a:solidFill>
-              <a:srgbClr val="C7D4DB"/>
-            </a:solidFill>
-            <a:prstDash val="solid"/>
-          </a:ln>
-        </p:spPr>
-      </p:sp>
-      <p:sp>
-        <p:nvSpPr>
-          <p:cNvPr id="12" name="Shape 8"/>
-          <p:cNvSpPr/>
-          <p:nvPr/>
-        </p:nvSpPr>
-        <p:spPr>
-          <a:xfrm>
-            <a:off x="3502152" y="2103120"/>
-            <a:ext cx="731520" cy="731520"/>
-          </a:xfrm>
-          <a:prstGeom prst="ellipse">
-            <a:avLst/>
-          </a:prstGeom>
-          <a:solidFill>
-            <a:srgbClr val="B9C6CE"/>
-          </a:solidFill>
-          <a:ln/>
-        </p:spPr>
-      </p:sp>
-      <p:pic>
-        <p:nvPicPr>
-          <p:cNvPr id="13" name="Image 2" descr="/tmp/claude-1000/-home-ballen-GitHub/10f2e268-ec1d-4d6f-8dc8-6cf2617b3162/scratchpad/pptx_work/icons/hourglass-half-white.png">    </p:cNvPr>
+          <p:cNvPr id="5" name="Image 0" descr="/tmp/claude-1000/-home-ballen-GitHub/10f2e268-ec1d-4d6f-8dc8-6cf2617b3162/scratchpad/pptx_work/icons/check-circle-white.png"/>
           <p:cNvPicPr>
             <a:picLocks noChangeAspect="1"/>
           </p:cNvPicPr>
@@ -3848,7 +3463,7 @@
         </p:blipFill>
         <p:spPr>
           <a:xfrm>
-            <a:off x="3666744" y="2267712"/>
+            <a:off x="850392" y="2267712"/>
             <a:ext cx="402336" cy="402336"/>
           </a:xfrm>
           <a:prstGeom prst="rect">
@@ -3858,13 +3473,13 @@
       </p:pic>
       <p:sp>
         <p:nvSpPr>
-          <p:cNvPr id="14" name="Text 9"/>
-          <p:cNvSpPr txBox="1"/>
-          <p:nvPr/>
-        </p:nvSpPr>
-        <p:spPr>
-          <a:xfrm>
-            <a:off x="3136392" y="2926080"/>
+          <p:cNvPr id="6" name="Text 3"/>
+          <p:cNvSpPr txBox="1"/>
+          <p:nvPr/>
+        </p:nvSpPr>
+        <p:spPr>
+          <a:xfrm>
+            <a:off x="320040" y="2926080"/>
             <a:ext cx="1463040" cy="548640"/>
           </a:xfrm>
           <a:prstGeom prst="rect">
@@ -3877,19 +3492,19 @@
           <a:bodyPr wrap="square" lIns="0" tIns="0" rIns="0" bIns="0" rtlCol="0" anchor="ctr"/>
           <a:lstStyle/>
           <a:p>
-            <a:pPr algn="ctr" indent="0" marL="0">
+            <a:pPr marL="0" indent="0" algn="ctr">
               <a:buNone/>
             </a:pPr>
             <a:r>
               <a:rPr lang="en-US" sz="1050" b="1" dirty="0">
                 <a:solidFill>
-                  <a:srgbClr val="6B7A86"/>
-                </a:solidFill>
-                <a:latin typeface="Arial" pitchFamily="34" charset="0"/>
-                <a:ea typeface="Arial" pitchFamily="34" charset="-122"/>
-                <a:cs typeface="Arial" pitchFamily="34" charset="-120"/>
-              </a:rPr>
-              <a:t>ASR Pipeline</a:t>
+                  <a:srgbClr val="384957"/>
+                </a:solidFill>
+                <a:latin typeface="Arial" pitchFamily="34" charset="0"/>
+                <a:ea typeface="Arial" pitchFamily="34" charset="-122"/>
+                <a:cs typeface="Arial" pitchFamily="34" charset="-120"/>
+              </a:rPr>
+              <a:t>EDA</a:t>
             </a:r>
             <a:endParaRPr lang="en-US" sz="1050" dirty="0"/>
           </a:p>
@@ -3897,13 +3512,13 @@
       </p:sp>
       <p:sp>
         <p:nvSpPr>
-          <p:cNvPr id="15" name="Shape 10"/>
+          <p:cNvPr id="7" name="Shape 4"/>
           <p:cNvSpPr/>
           <p:nvPr/>
         </p:nvSpPr>
         <p:spPr>
           <a:xfrm>
-            <a:off x="4462272" y="2468880"/>
+            <a:off x="1645920" y="2468880"/>
             <a:ext cx="219456" cy="0"/>
           </a:xfrm>
           <a:prstGeom prst="line">
@@ -3914,19 +3529,146 @@
             <a:solidFill>
               <a:srgbClr val="C7D4DB"/>
             </a:solidFill>
-            <a:prstDash val="dash"/>
+            <a:prstDash val="solid"/>
           </a:ln>
         </p:spPr>
-      </p:sp>
-      <p:sp>
-        <p:nvSpPr>
-          <p:cNvPr id="16" name="Shape 11"/>
+        <p:txBody>
+          <a:bodyPr/>
+          <a:lstStyle/>
+          <a:p>
+            <a:endParaRPr lang="en-US"/>
+          </a:p>
+        </p:txBody>
+      </p:sp>
+      <p:sp>
+        <p:nvSpPr>
+          <p:cNvPr id="8" name="Shape 5"/>
           <p:cNvSpPr/>
           <p:nvPr/>
         </p:nvSpPr>
         <p:spPr>
           <a:xfrm>
-            <a:off x="4910328" y="2103120"/>
+            <a:off x="2093976" y="2103120"/>
+            <a:ext cx="731520" cy="731520"/>
+          </a:xfrm>
+          <a:prstGeom prst="ellipse">
+            <a:avLst/>
+          </a:prstGeom>
+          <a:solidFill>
+            <a:srgbClr val="0097A7"/>
+          </a:solidFill>
+          <a:ln/>
+        </p:spPr>
+        <p:txBody>
+          <a:bodyPr/>
+          <a:lstStyle/>
+          <a:p>
+            <a:endParaRPr lang="en-US"/>
+          </a:p>
+        </p:txBody>
+      </p:sp>
+      <p:pic>
+        <p:nvPicPr>
+          <p:cNvPr id="9" name="Image 1" descr="/tmp/claude-1000/-home-ballen-GitHub/10f2e268-ec1d-4d6f-8dc8-6cf2617b3162/scratchpad/pptx_work/icons/check-circle-white.png"/>
+          <p:cNvPicPr>
+            <a:picLocks noChangeAspect="1"/>
+          </p:cNvPicPr>
+          <p:nvPr/>
+        </p:nvPicPr>
+        <p:blipFill>
+          <a:blip r:embed="rId3"/>
+          <a:stretch>
+            <a:fillRect/>
+          </a:stretch>
+        </p:blipFill>
+        <p:spPr>
+          <a:xfrm>
+            <a:off x="2258568" y="2267712"/>
+            <a:ext cx="402336" cy="402336"/>
+          </a:xfrm>
+          <a:prstGeom prst="rect">
+            <a:avLst/>
+          </a:prstGeom>
+        </p:spPr>
+      </p:pic>
+      <p:sp>
+        <p:nvSpPr>
+          <p:cNvPr id="10" name="Text 6"/>
+          <p:cNvSpPr txBox="1"/>
+          <p:nvPr/>
+        </p:nvSpPr>
+        <p:spPr>
+          <a:xfrm>
+            <a:off x="1728216" y="2926080"/>
+            <a:ext cx="1463040" cy="548640"/>
+          </a:xfrm>
+          <a:prstGeom prst="rect">
+            <a:avLst/>
+          </a:prstGeom>
+          <a:noFill/>
+          <a:ln/>
+        </p:spPr>
+        <p:txBody>
+          <a:bodyPr wrap="square" lIns="0" tIns="0" rIns="0" bIns="0" rtlCol="0" anchor="ctr"/>
+          <a:lstStyle/>
+          <a:p>
+            <a:pPr marL="0" indent="0" algn="ctr">
+              <a:buNone/>
+            </a:pPr>
+            <a:r>
+              <a:rPr lang="en-US" sz="1050" b="1" dirty="0">
+                <a:solidFill>
+                  <a:srgbClr val="384957"/>
+                </a:solidFill>
+                <a:latin typeface="Arial" pitchFamily="34" charset="0"/>
+                <a:ea typeface="Arial" pitchFamily="34" charset="-122"/>
+                <a:cs typeface="Arial" pitchFamily="34" charset="-120"/>
+              </a:rPr>
+              <a:t>ASR Prototype</a:t>
+            </a:r>
+            <a:endParaRPr lang="en-US" sz="1050" dirty="0"/>
+          </a:p>
+        </p:txBody>
+      </p:sp>
+      <p:sp>
+        <p:nvSpPr>
+          <p:cNvPr id="11" name="Shape 7"/>
+          <p:cNvSpPr/>
+          <p:nvPr/>
+        </p:nvSpPr>
+        <p:spPr>
+          <a:xfrm>
+            <a:off x="3054096" y="2468880"/>
+            <a:ext cx="219456" cy="0"/>
+          </a:xfrm>
+          <a:prstGeom prst="line">
+            <a:avLst/>
+          </a:prstGeom>
+          <a:noFill/>
+          <a:ln w="25400">
+            <a:solidFill>
+              <a:srgbClr val="C7D4DB"/>
+            </a:solidFill>
+            <a:prstDash val="solid"/>
+          </a:ln>
+        </p:spPr>
+        <p:txBody>
+          <a:bodyPr/>
+          <a:lstStyle/>
+          <a:p>
+            <a:endParaRPr lang="en-US"/>
+          </a:p>
+        </p:txBody>
+      </p:sp>
+      <p:sp>
+        <p:nvSpPr>
+          <p:cNvPr id="12" name="Shape 8"/>
+          <p:cNvSpPr/>
+          <p:nvPr/>
+        </p:nvSpPr>
+        <p:spPr>
+          <a:xfrm>
+            <a:off x="3502152" y="2103120"/>
             <a:ext cx="731520" cy="731520"/>
           </a:xfrm>
           <a:prstGeom prst="ellipse">
@@ -3937,10 +3679,17 @@
           </a:solidFill>
           <a:ln/>
         </p:spPr>
+        <p:txBody>
+          <a:bodyPr/>
+          <a:lstStyle/>
+          <a:p>
+            <a:endParaRPr lang="en-US"/>
+          </a:p>
+        </p:txBody>
       </p:sp>
       <p:pic>
         <p:nvPicPr>
-          <p:cNvPr id="17" name="Image 3" descr="/tmp/claude-1000/-home-ballen-GitHub/10f2e268-ec1d-4d6f-8dc8-6cf2617b3162/scratchpad/pptx_work/icons/hourglass-half-white.png">    </p:cNvPr>
+          <p:cNvPr id="13" name="Image 2" descr="/tmp/claude-1000/-home-ballen-GitHub/10f2e268-ec1d-4d6f-8dc8-6cf2617b3162/scratchpad/pptx_work/icons/hourglass-half-white.png"/>
           <p:cNvPicPr>
             <a:picLocks noChangeAspect="1"/>
           </p:cNvPicPr>
@@ -3954,7 +3703,7 @@
         </p:blipFill>
         <p:spPr>
           <a:xfrm>
-            <a:off x="5074920" y="2267712"/>
+            <a:off x="3666744" y="2267712"/>
             <a:ext cx="402336" cy="402336"/>
           </a:xfrm>
           <a:prstGeom prst="rect">
@@ -3964,13 +3713,13 @@
       </p:pic>
       <p:sp>
         <p:nvSpPr>
-          <p:cNvPr id="18" name="Text 12"/>
-          <p:cNvSpPr txBox="1"/>
-          <p:nvPr/>
-        </p:nvSpPr>
-        <p:spPr>
-          <a:xfrm>
-            <a:off x="4544568" y="2926080"/>
+          <p:cNvPr id="14" name="Text 9"/>
+          <p:cNvSpPr txBox="1"/>
+          <p:nvPr/>
+        </p:nvSpPr>
+        <p:spPr>
+          <a:xfrm>
+            <a:off x="3136392" y="2926080"/>
             <a:ext cx="1463040" cy="548640"/>
           </a:xfrm>
           <a:prstGeom prst="rect">
@@ -3983,7 +3732,7 @@
           <a:bodyPr wrap="square" lIns="0" tIns="0" rIns="0" bIns="0" rtlCol="0" anchor="ctr"/>
           <a:lstStyle/>
           <a:p>
-            <a:pPr algn="ctr" indent="0" marL="0">
+            <a:pPr marL="0" indent="0" algn="ctr">
               <a:buNone/>
             </a:pPr>
             <a:r>
@@ -3995,7 +3744,7 @@
                 <a:ea typeface="Arial" pitchFamily="34" charset="-122"/>
                 <a:cs typeface="Arial" pitchFamily="34" charset="-120"/>
               </a:rPr>
-              <a:t>Aviation NER</a:t>
+              <a:t>ASR Pipeline</a:t>
             </a:r>
             <a:endParaRPr lang="en-US" sz="1050" dirty="0"/>
           </a:p>
@@ -4003,13 +3752,13 @@
       </p:sp>
       <p:sp>
         <p:nvSpPr>
-          <p:cNvPr id="19" name="Shape 13"/>
+          <p:cNvPr id="15" name="Shape 10"/>
           <p:cNvSpPr/>
           <p:nvPr/>
         </p:nvSpPr>
         <p:spPr>
           <a:xfrm>
-            <a:off x="5870448" y="2468880"/>
+            <a:off x="4462272" y="2468880"/>
             <a:ext cx="219456" cy="0"/>
           </a:xfrm>
           <a:prstGeom prst="line">
@@ -4023,16 +3772,23 @@
             <a:prstDash val="dash"/>
           </a:ln>
         </p:spPr>
-      </p:sp>
-      <p:sp>
-        <p:nvSpPr>
-          <p:cNvPr id="20" name="Shape 14"/>
+        <p:txBody>
+          <a:bodyPr/>
+          <a:lstStyle/>
+          <a:p>
+            <a:endParaRPr lang="en-US"/>
+          </a:p>
+        </p:txBody>
+      </p:sp>
+      <p:sp>
+        <p:nvSpPr>
+          <p:cNvPr id="16" name="Shape 11"/>
           <p:cNvSpPr/>
           <p:nvPr/>
         </p:nvSpPr>
         <p:spPr>
           <a:xfrm>
-            <a:off x="6318504" y="2103120"/>
+            <a:off x="4910328" y="2103120"/>
             <a:ext cx="731520" cy="731520"/>
           </a:xfrm>
           <a:prstGeom prst="ellipse">
@@ -4043,10 +3799,257 @@
           </a:solidFill>
           <a:ln/>
         </p:spPr>
+        <p:txBody>
+          <a:bodyPr/>
+          <a:lstStyle/>
+          <a:p>
+            <a:endParaRPr lang="en-US"/>
+          </a:p>
+        </p:txBody>
       </p:sp>
       <p:pic>
         <p:nvPicPr>
-          <p:cNvPr id="21" name="Image 4" descr="/tmp/claude-1000/-home-ballen-GitHub/10f2e268-ec1d-4d6f-8dc8-6cf2617b3162/scratchpad/pptx_work/icons/hourglass-half-white.png">    </p:cNvPr>
+          <p:cNvPr id="17" name="Image 3" descr="/tmp/claude-1000/-home-ballen-GitHub/10f2e268-ec1d-4d6f-8dc8-6cf2617b3162/scratchpad/pptx_work/icons/hourglass-half-white.png"/>
+          <p:cNvPicPr>
+            <a:picLocks noChangeAspect="1"/>
+          </p:cNvPicPr>
+          <p:nvPr/>
+        </p:nvPicPr>
+        <p:blipFill>
+          <a:blip r:embed="rId4"/>
+          <a:stretch>
+            <a:fillRect/>
+          </a:stretch>
+        </p:blipFill>
+        <p:spPr>
+          <a:xfrm>
+            <a:off x="5074920" y="2267712"/>
+            <a:ext cx="402336" cy="402336"/>
+          </a:xfrm>
+          <a:prstGeom prst="rect">
+            <a:avLst/>
+          </a:prstGeom>
+        </p:spPr>
+      </p:pic>
+      <p:sp>
+        <p:nvSpPr>
+          <p:cNvPr id="18" name="Text 12"/>
+          <p:cNvSpPr txBox="1"/>
+          <p:nvPr/>
+        </p:nvSpPr>
+        <p:spPr>
+          <a:xfrm>
+            <a:off x="4544568" y="2926080"/>
+            <a:ext cx="1463040" cy="548640"/>
+          </a:xfrm>
+          <a:prstGeom prst="rect">
+            <a:avLst/>
+          </a:prstGeom>
+          <a:noFill/>
+          <a:ln/>
+        </p:spPr>
+        <p:txBody>
+          <a:bodyPr wrap="square" lIns="0" tIns="0" rIns="0" bIns="0" rtlCol="0" anchor="ctr"/>
+          <a:lstStyle/>
+          <a:p>
+            <a:pPr marL="0" indent="0" algn="ctr">
+              <a:buNone/>
+            </a:pPr>
+            <a:r>
+              <a:rPr lang="en-US" sz="1050" b="1" dirty="0">
+                <a:solidFill>
+                  <a:srgbClr val="6B7A86"/>
+                </a:solidFill>
+                <a:latin typeface="Arial" pitchFamily="34" charset="0"/>
+                <a:ea typeface="Arial" pitchFamily="34" charset="-122"/>
+                <a:cs typeface="Arial" pitchFamily="34" charset="-120"/>
+              </a:rPr>
+              <a:t>Aviation NER</a:t>
+            </a:r>
+            <a:endParaRPr lang="en-US" sz="1050" dirty="0"/>
+          </a:p>
+        </p:txBody>
+      </p:sp>
+      <p:sp>
+        <p:nvSpPr>
+          <p:cNvPr id="19" name="Shape 13"/>
+          <p:cNvSpPr/>
+          <p:nvPr/>
+        </p:nvSpPr>
+        <p:spPr>
+          <a:xfrm>
+            <a:off x="5870448" y="2468880"/>
+            <a:ext cx="219456" cy="0"/>
+          </a:xfrm>
+          <a:prstGeom prst="line">
+            <a:avLst/>
+          </a:prstGeom>
+          <a:noFill/>
+          <a:ln w="25400">
+            <a:solidFill>
+              <a:srgbClr val="C7D4DB"/>
+            </a:solidFill>
+            <a:prstDash val="dash"/>
+          </a:ln>
+        </p:spPr>
+        <p:txBody>
+          <a:bodyPr/>
+          <a:lstStyle/>
+          <a:p>
+            <a:endParaRPr lang="en-US"/>
+          </a:p>
+        </p:txBody>
+      </p:sp>
+      <p:sp>
+        <p:nvSpPr>
+          <p:cNvPr id="20" name="Shape 14"/>
+          <p:cNvSpPr/>
+          <p:nvPr/>
+        </p:nvSpPr>
+        <p:spPr>
+          <a:xfrm>
+            <a:off x="6318504" y="2103120"/>
+            <a:ext cx="731520" cy="731520"/>
+          </a:xfrm>
+          <a:prstGeom prst="ellipse">
+            <a:avLst/>
+          </a:prstGeom>
+          <a:solidFill>
+            <a:srgbClr val="B9C6CE"/>
+          </a:solidFill>
+          <a:ln/>
+        </p:spPr>
+        <p:txBody>
+          <a:bodyPr/>
+          <a:lstStyle/>
+          <a:p>
+            <a:endParaRPr lang="en-US"/>
+          </a:p>
+        </p:txBody>
+      </p:sp>
+      <p:pic>
+        <p:nvPicPr>
+          <p:cNvPr id="21" name="Image 4" descr="/tmp/claude-1000/-home-ballen-GitHub/10f2e268-ec1d-4d6f-8dc8-6cf2617b3162/scratchpad/pptx_work/icons/hourglass-half-white.png"/>
+          <p:cNvPicPr>
+            <a:picLocks noChangeAspect="1"/>
+          </p:cNvPicPr>
+          <p:nvPr/>
+        </p:nvPicPr>
+        <p:blipFill>
+          <a:blip r:embed="rId4"/>
+          <a:stretch>
+            <a:fillRect/>
+          </a:stretch>
+        </p:blipFill>
+        <p:spPr>
+          <a:xfrm>
+            <a:off x="6483096" y="2267712"/>
+            <a:ext cx="402336" cy="402336"/>
+          </a:xfrm>
+          <a:prstGeom prst="rect">
+            <a:avLst/>
+          </a:prstGeom>
+        </p:spPr>
+      </p:pic>
+      <p:sp>
+        <p:nvSpPr>
+          <p:cNvPr id="22" name="Text 15"/>
+          <p:cNvSpPr txBox="1"/>
+          <p:nvPr/>
+        </p:nvSpPr>
+        <p:spPr>
+          <a:xfrm>
+            <a:off x="5952744" y="2926080"/>
+            <a:ext cx="1463040" cy="548640"/>
+          </a:xfrm>
+          <a:prstGeom prst="rect">
+            <a:avLst/>
+          </a:prstGeom>
+          <a:noFill/>
+          <a:ln/>
+        </p:spPr>
+        <p:txBody>
+          <a:bodyPr wrap="square" lIns="0" tIns="0" rIns="0" bIns="0" rtlCol="0" anchor="ctr"/>
+          <a:lstStyle/>
+          <a:p>
+            <a:pPr marL="0" indent="0" algn="ctr">
+              <a:buNone/>
+            </a:pPr>
+            <a:r>
+              <a:rPr lang="en-US" sz="1050" b="1" dirty="0">
+                <a:solidFill>
+                  <a:srgbClr val="6B7A86"/>
+                </a:solidFill>
+                <a:latin typeface="Arial" pitchFamily="34" charset="0"/>
+                <a:ea typeface="Arial" pitchFamily="34" charset="-122"/>
+                <a:cs typeface="Arial" pitchFamily="34" charset="-120"/>
+              </a:rPr>
+              <a:t>NER Pipeline</a:t>
+            </a:r>
+            <a:endParaRPr lang="en-US" sz="1050" dirty="0"/>
+          </a:p>
+        </p:txBody>
+      </p:sp>
+      <p:sp>
+        <p:nvSpPr>
+          <p:cNvPr id="23" name="Shape 16"/>
+          <p:cNvSpPr/>
+          <p:nvPr/>
+        </p:nvSpPr>
+        <p:spPr>
+          <a:xfrm>
+            <a:off x="7278624" y="2468880"/>
+            <a:ext cx="219456" cy="0"/>
+          </a:xfrm>
+          <a:prstGeom prst="line">
+            <a:avLst/>
+          </a:prstGeom>
+          <a:noFill/>
+          <a:ln w="25400">
+            <a:solidFill>
+              <a:srgbClr val="C7D4DB"/>
+            </a:solidFill>
+            <a:prstDash val="dash"/>
+          </a:ln>
+        </p:spPr>
+        <p:txBody>
+          <a:bodyPr/>
+          <a:lstStyle/>
+          <a:p>
+            <a:endParaRPr lang="en-US"/>
+          </a:p>
+        </p:txBody>
+      </p:sp>
+      <p:sp>
+        <p:nvSpPr>
+          <p:cNvPr id="24" name="Shape 17"/>
+          <p:cNvSpPr/>
+          <p:nvPr/>
+        </p:nvSpPr>
+        <p:spPr>
+          <a:xfrm>
+            <a:off x="7726680" y="2103120"/>
+            <a:ext cx="731520" cy="731520"/>
+          </a:xfrm>
+          <a:prstGeom prst="ellipse">
+            <a:avLst/>
+          </a:prstGeom>
+          <a:solidFill>
+            <a:srgbClr val="B9C6CE"/>
+          </a:solidFill>
+          <a:ln/>
+        </p:spPr>
+        <p:txBody>
+          <a:bodyPr/>
+          <a:lstStyle/>
+          <a:p>
+            <a:endParaRPr lang="en-US"/>
+          </a:p>
+        </p:txBody>
+      </p:sp>
+      <p:pic>
+        <p:nvPicPr>
+          <p:cNvPr id="25" name="Image 5" descr="/tmp/claude-1000/-home-ballen-GitHub/10f2e268-ec1d-4d6f-8dc8-6cf2617b3162/scratchpad/pptx_work/icons/desktop-white.png"/>
           <p:cNvPicPr>
             <a:picLocks noChangeAspect="1"/>
           </p:cNvPicPr>
@@ -4060,112 +4063,6 @@
         </p:blipFill>
         <p:spPr>
           <a:xfrm>
-            <a:off x="6483096" y="2267712"/>
-            <a:ext cx="402336" cy="402336"/>
-          </a:xfrm>
-          <a:prstGeom prst="rect">
-            <a:avLst/>
-          </a:prstGeom>
-        </p:spPr>
-      </p:pic>
-      <p:sp>
-        <p:nvSpPr>
-          <p:cNvPr id="22" name="Text 15"/>
-          <p:cNvSpPr txBox="1"/>
-          <p:nvPr/>
-        </p:nvSpPr>
-        <p:spPr>
-          <a:xfrm>
-            <a:off x="5952744" y="2926080"/>
-            <a:ext cx="1463040" cy="548640"/>
-          </a:xfrm>
-          <a:prstGeom prst="rect">
-            <a:avLst/>
-          </a:prstGeom>
-          <a:noFill/>
-          <a:ln/>
-        </p:spPr>
-        <p:txBody>
-          <a:bodyPr wrap="square" lIns="0" tIns="0" rIns="0" bIns="0" rtlCol="0" anchor="ctr"/>
-          <a:lstStyle/>
-          <a:p>
-            <a:pPr algn="ctr" indent="0" marL="0">
-              <a:buNone/>
-            </a:pPr>
-            <a:r>
-              <a:rPr lang="en-US" sz="1050" b="1" dirty="0">
-                <a:solidFill>
-                  <a:srgbClr val="6B7A86"/>
-                </a:solidFill>
-                <a:latin typeface="Arial" pitchFamily="34" charset="0"/>
-                <a:ea typeface="Arial" pitchFamily="34" charset="-122"/>
-                <a:cs typeface="Arial" pitchFamily="34" charset="-120"/>
-              </a:rPr>
-              <a:t>NER Pipeline</a:t>
-            </a:r>
-            <a:endParaRPr lang="en-US" sz="1050" dirty="0"/>
-          </a:p>
-        </p:txBody>
-      </p:sp>
-      <p:sp>
-        <p:nvSpPr>
-          <p:cNvPr id="23" name="Shape 16"/>
-          <p:cNvSpPr/>
-          <p:nvPr/>
-        </p:nvSpPr>
-        <p:spPr>
-          <a:xfrm>
-            <a:off x="7278624" y="2468880"/>
-            <a:ext cx="219456" cy="0"/>
-          </a:xfrm>
-          <a:prstGeom prst="line">
-            <a:avLst/>
-          </a:prstGeom>
-          <a:noFill/>
-          <a:ln w="25400">
-            <a:solidFill>
-              <a:srgbClr val="C7D4DB"/>
-            </a:solidFill>
-            <a:prstDash val="dash"/>
-          </a:ln>
-        </p:spPr>
-      </p:sp>
-      <p:sp>
-        <p:nvSpPr>
-          <p:cNvPr id="24" name="Shape 17"/>
-          <p:cNvSpPr/>
-          <p:nvPr/>
-        </p:nvSpPr>
-        <p:spPr>
-          <a:xfrm>
-            <a:off x="7726680" y="2103120"/>
-            <a:ext cx="731520" cy="731520"/>
-          </a:xfrm>
-          <a:prstGeom prst="ellipse">
-            <a:avLst/>
-          </a:prstGeom>
-          <a:solidFill>
-            <a:srgbClr val="B9C6CE"/>
-          </a:solidFill>
-          <a:ln/>
-        </p:spPr>
-      </p:sp>
-      <p:pic>
-        <p:nvPicPr>
-          <p:cNvPr id="25" name="Image 5" descr="/tmp/claude-1000/-home-ballen-GitHub/10f2e268-ec1d-4d6f-8dc8-6cf2617b3162/scratchpad/pptx_work/icons/desktop-white.png">    </p:cNvPr>
-          <p:cNvPicPr>
-            <a:picLocks noChangeAspect="1"/>
-          </p:cNvPicPr>
-          <p:nvPr/>
-        </p:nvPicPr>
-        <p:blipFill>
-          <a:blip r:embed="rId6"/>
-          <a:stretch>
-            <a:fillRect/>
-          </a:stretch>
-        </p:blipFill>
-        <p:spPr>
-          <a:xfrm>
             <a:off x="7891272" y="2267712"/>
             <a:ext cx="402336" cy="402336"/>
           </a:xfrm>
@@ -4195,7 +4092,7 @@
           <a:bodyPr wrap="square" lIns="0" tIns="0" rIns="0" bIns="0" rtlCol="0" anchor="ctr"/>
           <a:lstStyle/>
           <a:p>
-            <a:pPr algn="ctr" indent="0" marL="0">
+            <a:pPr marL="0" indent="0" algn="ctr">
               <a:buNone/>
             </a:pPr>
             <a:r>
@@ -4234,7 +4131,7 @@
           <a:bodyPr wrap="square" lIns="0" tIns="0" rIns="0" bIns="0" rtlCol="0" anchor="ctr"/>
           <a:lstStyle/>
           <a:p>
-            <a:pPr algn="l" indent="0" marL="0">
+            <a:pPr marL="0" indent="0" algn="l">
               <a:buNone/>
             </a:pPr>
             <a:r>
@@ -4246,7 +4143,7 @@
                 <a:ea typeface="Arial" pitchFamily="34" charset="-122"/>
                 <a:cs typeface="Arial" pitchFamily="34" charset="-120"/>
               </a:rPr>
-              <a:t>Milestones ahead: ASR pipeline → LLM-assisted entity labeling + NER training → NER pipeline → Streamlit integration &amp; demo.</a:t>
+              <a:t>Milestones: ASR pipeline → LLM-assisted entity labeling + NER training → NER pipeline → Streamlit integration &amp; demo.</a:t>
             </a:r>
             <a:endParaRPr lang="en-US" sz="1150" dirty="0"/>
           </a:p>
@@ -4273,7 +4170,7 @@
           <a:bodyPr wrap="square" lIns="0" tIns="0" rIns="0" bIns="0" rtlCol="0" anchor="ctr"/>
           <a:lstStyle/>
           <a:p>
-            <a:pPr algn="l" indent="0" marL="0">
+            <a:pPr marL="0" indent="0" algn="l">
               <a:buNone/>
             </a:pPr>
             <a:r>
@@ -4312,7 +4209,7 @@
           <a:bodyPr wrap="square" lIns="0" tIns="0" rIns="0" bIns="0" rtlCol="0" anchor="ctr"/>
           <a:lstStyle/>
           <a:p>
-            <a:pPr algn="r" indent="0" marL="0">
+            <a:pPr marL="0" indent="0" algn="r">
               <a:buNone/>
             </a:pPr>
             <a:r>
@@ -4346,6 +4243,7 @@
         <a:solidFill>
           <a:srgbClr val="27333D"/>
         </a:solidFill>
+        <a:effectLst/>
       </p:bgPr>
     </p:bg>
     <p:spTree>
@@ -4364,14 +4262,14 @@
       </p:grpSpPr>
       <p:pic>
         <p:nvPicPr>
-          <p:cNvPr id="2" name="Image 0" descr="/tmp/claude-1000/-home-ballen-GitHub/10f2e268-ec1d-4d6f-8dc8-6cf2617b3162/scratchpad/pptx_work/bg/thanks-bg.png">    </p:cNvPr>
+          <p:cNvPr id="2" name="Image 0" descr="/tmp/claude-1000/-home-ballen-GitHub/10f2e268-ec1d-4d6f-8dc8-6cf2617b3162/scratchpad/pptx_work/bg/thanks-bg.png"/>
           <p:cNvPicPr>
             <a:picLocks noChangeAspect="1"/>
           </p:cNvPicPr>
           <p:nvPr/>
         </p:nvPicPr>
         <p:blipFill>
-          <a:blip r:embed="rId1"/>
+          <a:blip r:embed="rId3"/>
           <a:stretch>
             <a:fillRect/>
           </a:stretch>
@@ -4407,6 +4305,13 @@
           </a:solidFill>
           <a:ln/>
         </p:spPr>
+        <p:txBody>
+          <a:bodyPr/>
+          <a:lstStyle/>
+          <a:p>
+            <a:endParaRPr lang="en-US"/>
+          </a:p>
+        </p:txBody>
       </p:sp>
       <p:sp>
         <p:nvSpPr>
@@ -4429,7 +4334,7 @@
           <a:bodyPr wrap="square" lIns="0" tIns="0" rIns="0" bIns="0" rtlCol="0" anchor="ctr"/>
           <a:lstStyle/>
           <a:p>
-            <a:pPr algn="ctr" indent="0" marL="0">
+            <a:pPr marL="0" indent="0" algn="ctr">
               <a:buNone/>
             </a:pPr>
             <a:r>
@@ -4468,7 +4373,7 @@
           <a:bodyPr wrap="square" lIns="0" tIns="0" rIns="0" bIns="0" rtlCol="0" anchor="ctr"/>
           <a:lstStyle/>
           <a:p>
-            <a:pPr algn="ctr" indent="0" marL="0">
+            <a:pPr marL="0" indent="0" algn="ctr">
               <a:buNone/>
             </a:pPr>
             <a:r>
@@ -4507,7 +4412,7 @@
           <a:bodyPr wrap="square" lIns="0" tIns="0" rIns="0" bIns="0" rtlCol="0" anchor="ctr"/>
           <a:lstStyle/>
           <a:p>
-            <a:pPr algn="ctr" indent="0" marL="0">
+            <a:pPr marL="0" indent="0" algn="ctr">
               <a:buNone/>
             </a:pPr>
             <a:r>
@@ -4541,6 +4446,7 @@
         <a:solidFill>
           <a:srgbClr val="FFFFFF"/>
         </a:solidFill>
+        <a:effectLst/>
       </p:bgPr>
     </p:bg>
     <p:spTree>
@@ -4578,7 +4484,7 @@
           <a:bodyPr wrap="square" lIns="0" tIns="0" rIns="0" bIns="0" rtlCol="0" anchor="ctr"/>
           <a:lstStyle/>
           <a:p>
-            <a:pPr algn="l" indent="0" marL="0">
+            <a:pPr marL="0" indent="0" algn="l">
               <a:buNone/>
             </a:pPr>
             <a:r>
@@ -4617,13 +4523,20 @@
           </a:solidFill>
           <a:ln/>
           <a:effectLst>
-            <a:outerShdw sx="100000" sy="100000" kx="0" ky="0" algn="bl" rotWithShape="0" blurRad="76200" dist="25400" dir="5400000">
+            <a:outerShdw blurRad="76200" dist="25400" dir="5400000" algn="bl" rotWithShape="0">
               <a:srgbClr val="1B2733">
                 <a:alpha val="12000"/>
               </a:srgbClr>
             </a:outerShdw>
           </a:effectLst>
         </p:spPr>
+        <p:txBody>
+          <a:bodyPr/>
+          <a:lstStyle/>
+          <a:p>
+            <a:endParaRPr lang="en-US"/>
+          </a:p>
+        </p:txBody>
       </p:sp>
       <p:sp>
         <p:nvSpPr>
@@ -4644,6 +4557,13 @@
           </a:solidFill>
           <a:ln/>
         </p:spPr>
+        <p:txBody>
+          <a:bodyPr/>
+          <a:lstStyle/>
+          <a:p>
+            <a:endParaRPr lang="en-US"/>
+          </a:p>
+        </p:txBody>
       </p:sp>
       <p:sp>
         <p:nvSpPr>
@@ -4666,7 +4586,7 @@
           <a:bodyPr wrap="square" lIns="0" tIns="0" rIns="0" bIns="0" rtlCol="0" anchor="ctr"/>
           <a:lstStyle/>
           <a:p>
-            <a:pPr algn="ctr" indent="0" marL="0">
+            <a:pPr marL="0" indent="0" algn="ctr">
               <a:buNone/>
             </a:pPr>
             <a:r>
@@ -4705,7 +4625,7 @@
           <a:bodyPr wrap="square" lIns="0" tIns="0" rIns="0" bIns="0" rtlCol="0" anchor="ctr"/>
           <a:lstStyle/>
           <a:p>
-            <a:pPr algn="l" indent="0" marL="0">
+            <a:pPr marL="0" indent="0" algn="l">
               <a:buNone/>
             </a:pPr>
             <a:r>
@@ -4744,7 +4664,7 @@
           <a:bodyPr wrap="square" lIns="0" tIns="0" rIns="0" bIns="0" rtlCol="0" anchor="ctr"/>
           <a:lstStyle/>
           <a:p>
-            <a:pPr algn="l" indent="0" marL="0">
+            <a:pPr marL="0" indent="0" algn="l">
               <a:buNone/>
             </a:pPr>
             <a:r>
@@ -4783,13 +4703,20 @@
           </a:solidFill>
           <a:ln/>
           <a:effectLst>
-            <a:outerShdw sx="100000" sy="100000" kx="0" ky="0" algn="bl" rotWithShape="0" blurRad="76200" dist="25400" dir="5400000">
+            <a:outerShdw blurRad="76200" dist="25400" dir="5400000" algn="bl" rotWithShape="0">
               <a:srgbClr val="1B2733">
                 <a:alpha val="12000"/>
               </a:srgbClr>
             </a:outerShdw>
           </a:effectLst>
         </p:spPr>
+        <p:txBody>
+          <a:bodyPr/>
+          <a:lstStyle/>
+          <a:p>
+            <a:endParaRPr lang="en-US"/>
+          </a:p>
+        </p:txBody>
       </p:sp>
       <p:sp>
         <p:nvSpPr>
@@ -4810,6 +4737,13 @@
           </a:solidFill>
           <a:ln/>
         </p:spPr>
+        <p:txBody>
+          <a:bodyPr/>
+          <a:lstStyle/>
+          <a:p>
+            <a:endParaRPr lang="en-US"/>
+          </a:p>
+        </p:txBody>
       </p:sp>
       <p:sp>
         <p:nvSpPr>
@@ -4832,7 +4766,7 @@
           <a:bodyPr wrap="square" lIns="0" tIns="0" rIns="0" bIns="0" rtlCol="0" anchor="ctr"/>
           <a:lstStyle/>
           <a:p>
-            <a:pPr algn="ctr" indent="0" marL="0">
+            <a:pPr marL="0" indent="0" algn="ctr">
               <a:buNone/>
             </a:pPr>
             <a:r>
@@ -4871,7 +4805,7 @@
           <a:bodyPr wrap="square" lIns="0" tIns="0" rIns="0" bIns="0" rtlCol="0" anchor="ctr"/>
           <a:lstStyle/>
           <a:p>
-            <a:pPr algn="l" indent="0" marL="0">
+            <a:pPr marL="0" indent="0" algn="l">
               <a:buNone/>
             </a:pPr>
             <a:r>
@@ -4910,7 +4844,7 @@
           <a:bodyPr wrap="square" lIns="0" tIns="0" rIns="0" bIns="0" rtlCol="0" anchor="ctr"/>
           <a:lstStyle/>
           <a:p>
-            <a:pPr algn="l" indent="0" marL="0">
+            <a:pPr marL="0" indent="0" algn="l">
               <a:buNone/>
             </a:pPr>
             <a:r>
@@ -4949,13 +4883,20 @@
           </a:solidFill>
           <a:ln/>
           <a:effectLst>
-            <a:outerShdw sx="100000" sy="100000" kx="0" ky="0" algn="bl" rotWithShape="0" blurRad="76200" dist="25400" dir="5400000">
+            <a:outerShdw blurRad="76200" dist="25400" dir="5400000" algn="bl" rotWithShape="0">
               <a:srgbClr val="1B2733">
                 <a:alpha val="12000"/>
               </a:srgbClr>
             </a:outerShdw>
           </a:effectLst>
         </p:spPr>
+        <p:txBody>
+          <a:bodyPr/>
+          <a:lstStyle/>
+          <a:p>
+            <a:endParaRPr lang="en-US"/>
+          </a:p>
+        </p:txBody>
       </p:sp>
       <p:sp>
         <p:nvSpPr>
@@ -4976,6 +4917,13 @@
           </a:solidFill>
           <a:ln/>
         </p:spPr>
+        <p:txBody>
+          <a:bodyPr/>
+          <a:lstStyle/>
+          <a:p>
+            <a:endParaRPr lang="en-US"/>
+          </a:p>
+        </p:txBody>
       </p:sp>
       <p:sp>
         <p:nvSpPr>
@@ -4998,7 +4946,7 @@
           <a:bodyPr wrap="square" lIns="0" tIns="0" rIns="0" bIns="0" rtlCol="0" anchor="ctr"/>
           <a:lstStyle/>
           <a:p>
-            <a:pPr algn="ctr" indent="0" marL="0">
+            <a:pPr marL="0" indent="0" algn="ctr">
               <a:buNone/>
             </a:pPr>
             <a:r>
@@ -5037,7 +4985,7 @@
           <a:bodyPr wrap="square" lIns="0" tIns="0" rIns="0" bIns="0" rtlCol="0" anchor="ctr"/>
           <a:lstStyle/>
           <a:p>
-            <a:pPr algn="l" indent="0" marL="0">
+            <a:pPr marL="0" indent="0" algn="l">
               <a:buNone/>
             </a:pPr>
             <a:r>
@@ -5076,7 +5024,7 @@
           <a:bodyPr wrap="square" lIns="0" tIns="0" rIns="0" bIns="0" rtlCol="0" anchor="ctr"/>
           <a:lstStyle/>
           <a:p>
-            <a:pPr algn="l" indent="0" marL="0">
+            <a:pPr marL="0" indent="0" algn="l">
               <a:buNone/>
             </a:pPr>
             <a:r>
@@ -5115,13 +5063,20 @@
           </a:solidFill>
           <a:ln/>
           <a:effectLst>
-            <a:outerShdw sx="100000" sy="100000" kx="0" ky="0" algn="bl" rotWithShape="0" blurRad="76200" dist="25400" dir="5400000">
+            <a:outerShdw blurRad="76200" dist="25400" dir="5400000" algn="bl" rotWithShape="0">
               <a:srgbClr val="1B2733">
                 <a:alpha val="12000"/>
               </a:srgbClr>
             </a:outerShdw>
           </a:effectLst>
         </p:spPr>
+        <p:txBody>
+          <a:bodyPr/>
+          <a:lstStyle/>
+          <a:p>
+            <a:endParaRPr lang="en-US"/>
+          </a:p>
+        </p:txBody>
       </p:sp>
       <p:sp>
         <p:nvSpPr>
@@ -5142,6 +5097,13 @@
           </a:solidFill>
           <a:ln/>
         </p:spPr>
+        <p:txBody>
+          <a:bodyPr/>
+          <a:lstStyle/>
+          <a:p>
+            <a:endParaRPr lang="en-US"/>
+          </a:p>
+        </p:txBody>
       </p:sp>
       <p:sp>
         <p:nvSpPr>
@@ -5164,7 +5126,7 @@
           <a:bodyPr wrap="square" lIns="0" tIns="0" rIns="0" bIns="0" rtlCol="0" anchor="ctr"/>
           <a:lstStyle/>
           <a:p>
-            <a:pPr algn="ctr" indent="0" marL="0">
+            <a:pPr marL="0" indent="0" algn="ctr">
               <a:buNone/>
             </a:pPr>
             <a:r>
@@ -5203,7 +5165,7 @@
           <a:bodyPr wrap="square" lIns="0" tIns="0" rIns="0" bIns="0" rtlCol="0" anchor="ctr"/>
           <a:lstStyle/>
           <a:p>
-            <a:pPr algn="l" indent="0" marL="0">
+            <a:pPr marL="0" indent="0" algn="l">
               <a:buNone/>
             </a:pPr>
             <a:r>
@@ -5242,7 +5204,7 @@
           <a:bodyPr wrap="square" lIns="0" tIns="0" rIns="0" bIns="0" rtlCol="0" anchor="ctr"/>
           <a:lstStyle/>
           <a:p>
-            <a:pPr algn="l" indent="0" marL="0">
+            <a:pPr marL="0" indent="0" algn="l">
               <a:buNone/>
             </a:pPr>
             <a:r>
@@ -5254,7 +5216,7 @@
                 <a:ea typeface="Arial" pitchFamily="34" charset="-122"/>
                 <a:cs typeface="Arial" pitchFamily="34" charset="-120"/>
               </a:rPr>
-              <a:t>Baseline vs. domain-adapted vs. our fine-tune</a:t>
+              <a:t>Baseline vs. domain-adapted vs. fine-tuned</a:t>
             </a:r>
             <a:endParaRPr lang="en-US" sz="1000" dirty="0"/>
           </a:p>
@@ -5281,13 +5243,20 @@
           </a:solidFill>
           <a:ln/>
           <a:effectLst>
-            <a:outerShdw sx="100000" sy="100000" kx="0" ky="0" algn="bl" rotWithShape="0" blurRad="76200" dist="25400" dir="5400000">
+            <a:outerShdw blurRad="76200" dist="25400" dir="5400000" algn="bl" rotWithShape="0">
               <a:srgbClr val="1B2733">
                 <a:alpha val="12000"/>
               </a:srgbClr>
             </a:outerShdw>
           </a:effectLst>
         </p:spPr>
+        <p:txBody>
+          <a:bodyPr/>
+          <a:lstStyle/>
+          <a:p>
+            <a:endParaRPr lang="en-US"/>
+          </a:p>
+        </p:txBody>
       </p:sp>
       <p:sp>
         <p:nvSpPr>
@@ -5308,6 +5277,13 @@
           </a:solidFill>
           <a:ln/>
         </p:spPr>
+        <p:txBody>
+          <a:bodyPr/>
+          <a:lstStyle/>
+          <a:p>
+            <a:endParaRPr lang="en-US"/>
+          </a:p>
+        </p:txBody>
       </p:sp>
       <p:sp>
         <p:nvSpPr>
@@ -5330,7 +5306,7 @@
           <a:bodyPr wrap="square" lIns="0" tIns="0" rIns="0" bIns="0" rtlCol="0" anchor="ctr"/>
           <a:lstStyle/>
           <a:p>
-            <a:pPr algn="ctr" indent="0" marL="0">
+            <a:pPr marL="0" indent="0" algn="ctr">
               <a:buNone/>
             </a:pPr>
             <a:r>
@@ -5369,7 +5345,7 @@
           <a:bodyPr wrap="square" lIns="0" tIns="0" rIns="0" bIns="0" rtlCol="0" anchor="ctr"/>
           <a:lstStyle/>
           <a:p>
-            <a:pPr algn="l" indent="0" marL="0">
+            <a:pPr marL="0" indent="0" algn="l">
               <a:buNone/>
             </a:pPr>
             <a:r>
@@ -5408,7 +5384,7 @@
           <a:bodyPr wrap="square" lIns="0" tIns="0" rIns="0" bIns="0" rtlCol="0" anchor="ctr"/>
           <a:lstStyle/>
           <a:p>
-            <a:pPr algn="l" indent="0" marL="0">
+            <a:pPr marL="0" indent="0" algn="l">
               <a:buNone/>
             </a:pPr>
             <a:r>
@@ -5447,13 +5423,20 @@
           </a:solidFill>
           <a:ln/>
           <a:effectLst>
-            <a:outerShdw sx="100000" sy="100000" kx="0" ky="0" algn="bl" rotWithShape="0" blurRad="76200" dist="25400" dir="5400000">
+            <a:outerShdw blurRad="76200" dist="25400" dir="5400000" algn="bl" rotWithShape="0">
               <a:srgbClr val="1B2733">
                 <a:alpha val="12000"/>
               </a:srgbClr>
             </a:outerShdw>
           </a:effectLst>
         </p:spPr>
+        <p:txBody>
+          <a:bodyPr/>
+          <a:lstStyle/>
+          <a:p>
+            <a:endParaRPr lang="en-US"/>
+          </a:p>
+        </p:txBody>
       </p:sp>
       <p:sp>
         <p:nvSpPr>
@@ -5474,6 +5457,13 @@
           </a:solidFill>
           <a:ln/>
         </p:spPr>
+        <p:txBody>
+          <a:bodyPr/>
+          <a:lstStyle/>
+          <a:p>
+            <a:endParaRPr lang="en-US"/>
+          </a:p>
+        </p:txBody>
       </p:sp>
       <p:sp>
         <p:nvSpPr>
@@ -5496,7 +5486,7 @@
           <a:bodyPr wrap="square" lIns="0" tIns="0" rIns="0" bIns="0" rtlCol="0" anchor="ctr"/>
           <a:lstStyle/>
           <a:p>
-            <a:pPr algn="ctr" indent="0" marL="0">
+            <a:pPr marL="0" indent="0" algn="ctr">
               <a:buNone/>
             </a:pPr>
             <a:r>
@@ -5535,7 +5525,7 @@
           <a:bodyPr wrap="square" lIns="0" tIns="0" rIns="0" bIns="0" rtlCol="0" anchor="ctr"/>
           <a:lstStyle/>
           <a:p>
-            <a:pPr algn="l" indent="0" marL="0">
+            <a:pPr marL="0" indent="0" algn="l">
               <a:buNone/>
             </a:pPr>
             <a:r>
@@ -5574,7 +5564,7 @@
           <a:bodyPr wrap="square" lIns="0" tIns="0" rIns="0" bIns="0" rtlCol="0" anchor="ctr"/>
           <a:lstStyle/>
           <a:p>
-            <a:pPr algn="l" indent="0" marL="0">
+            <a:pPr marL="0" indent="0" algn="l">
               <a:buNone/>
             </a:pPr>
             <a:r>
@@ -5613,7 +5603,7 @@
           <a:bodyPr wrap="square" lIns="0" tIns="0" rIns="0" bIns="0" rtlCol="0" anchor="ctr"/>
           <a:lstStyle/>
           <a:p>
-            <a:pPr algn="l" indent="0" marL="0">
+            <a:pPr marL="0" indent="0" algn="l">
               <a:buNone/>
             </a:pPr>
             <a:r>
@@ -5652,7 +5642,7 @@
           <a:bodyPr wrap="square" lIns="0" tIns="0" rIns="0" bIns="0" rtlCol="0" anchor="ctr"/>
           <a:lstStyle/>
           <a:p>
-            <a:pPr algn="r" indent="0" marL="0">
+            <a:pPr marL="0" indent="0" algn="r">
               <a:buNone/>
             </a:pPr>
             <a:r>
@@ -5686,6 +5676,7 @@
         <a:solidFill>
           <a:srgbClr val="FFFFFF"/>
         </a:solidFill>
+        <a:effectLst/>
       </p:bgPr>
     </p:bg>
     <p:spTree>
@@ -5723,7 +5714,7 @@
           <a:bodyPr wrap="square" lIns="0" tIns="0" rIns="0" bIns="0" rtlCol="0" anchor="ctr"/>
           <a:lstStyle/>
           <a:p>
-            <a:pPr algn="l" indent="0" marL="0">
+            <a:pPr marL="0" indent="0" algn="l">
               <a:buNone/>
             </a:pPr>
             <a:r>
@@ -5762,7 +5753,7 @@
           <a:bodyPr wrap="square" lIns="0" tIns="0" rIns="0" bIns="0" rtlCol="0" anchor="ctr"/>
           <a:lstStyle/>
           <a:p>
-            <a:pPr algn="l" indent="0" marL="0">
+            <a:pPr marL="0" indent="0" algn="l">
               <a:buNone/>
             </a:pPr>
             <a:r>
@@ -5774,7 +5765,7 @@
                 <a:ea typeface="Arial" pitchFamily="34" charset="-122"/>
                 <a:cs typeface="Arial" pitchFamily="34" charset="-120"/>
               </a:rPr>
-              <a:t>Goal: a prototype tool (Streamlit app) that transcribes real ATC audio and extracts structured operational information for pilots and controllers, not just a transcript.</a:t>
+              <a:t>Goal: a prototype tool (Streamlit app) that transcribes real ATC audio and extracts structured operational information for pilots and controllers in real-time.</a:t>
             </a:r>
             <a:endParaRPr lang="en-US" sz="1300" dirty="0"/>
           </a:p>
@@ -5799,366 +5790,17 @@
           </a:solidFill>
           <a:ln/>
         </p:spPr>
+        <p:txBody>
+          <a:bodyPr/>
+          <a:lstStyle/>
+          <a:p>
+            <a:endParaRPr lang="en-US"/>
+          </a:p>
+        </p:txBody>
       </p:sp>
       <p:pic>
         <p:nvPicPr>
-          <p:cNvPr id="5" name="Image 0" descr="/tmp/claude-1000/-home-ballen-GitHub/10f2e268-ec1d-4d6f-8dc8-6cf2617b3162/scratchpad/pptx_work/icons/mic-white.png">    </p:cNvPr>
-          <p:cNvPicPr>
-            <a:picLocks noChangeAspect="1"/>
-          </p:cNvPicPr>
-          <p:nvPr/>
-        </p:nvPicPr>
-        <p:blipFill>
-          <a:blip r:embed="rId1"/>
-          <a:stretch>
-            <a:fillRect/>
-          </a:stretch>
-        </p:blipFill>
-        <p:spPr>
-          <a:xfrm>
-            <a:off x="1051560" y="2148840"/>
-            <a:ext cx="548640" cy="548640"/>
-          </a:xfrm>
-          <a:prstGeom prst="rect">
-            <a:avLst/>
-          </a:prstGeom>
-        </p:spPr>
-      </p:pic>
-      <p:sp>
-        <p:nvSpPr>
-          <p:cNvPr id="6" name="Text 3"/>
-          <p:cNvSpPr txBox="1"/>
-          <p:nvPr/>
-        </p:nvSpPr>
-        <p:spPr>
-          <a:xfrm>
-            <a:off x="457200" y="2990088"/>
-            <a:ext cx="1737360" cy="475488"/>
-          </a:xfrm>
-          <a:prstGeom prst="rect">
-            <a:avLst/>
-          </a:prstGeom>
-          <a:noFill/>
-          <a:ln/>
-        </p:spPr>
-        <p:txBody>
-          <a:bodyPr wrap="square" lIns="0" tIns="0" rIns="0" bIns="0" rtlCol="0" anchor="ctr"/>
-          <a:lstStyle/>
-          <a:p>
-            <a:pPr algn="ctr" indent="0" marL="0">
-              <a:buNone/>
-            </a:pPr>
-            <a:r>
-              <a:rPr lang="en-US" sz="1300" b="1" dirty="0">
-                <a:solidFill>
-                  <a:srgbClr val="384957"/>
-                </a:solidFill>
-                <a:latin typeface="Arial" pitchFamily="34" charset="0"/>
-                <a:ea typeface="Arial" pitchFamily="34" charset="-122"/>
-                <a:cs typeface="Arial" pitchFamily="34" charset="-120"/>
-              </a:rPr>
-              <a:t>ATC Audio</a:t>
-            </a:r>
-            <a:endParaRPr lang="en-US" sz="1300" dirty="0"/>
-          </a:p>
-        </p:txBody>
-      </p:sp>
-      <p:sp>
-        <p:nvSpPr>
-          <p:cNvPr id="7" name="Text 4"/>
-          <p:cNvSpPr txBox="1"/>
-          <p:nvPr/>
-        </p:nvSpPr>
-        <p:spPr>
-          <a:xfrm>
-            <a:off x="457200" y="3502152"/>
-            <a:ext cx="1737360" cy="658368"/>
-          </a:xfrm>
-          <a:prstGeom prst="rect">
-            <a:avLst/>
-          </a:prstGeom>
-          <a:noFill/>
-          <a:ln/>
-        </p:spPr>
-        <p:txBody>
-          <a:bodyPr wrap="square" lIns="0" tIns="0" rIns="0" bIns="0" rtlCol="0" anchor="ctr"/>
-          <a:lstStyle/>
-          <a:p>
-            <a:pPr algn="ctr" indent="0" marL="0">
-              <a:buNone/>
-            </a:pPr>
-            <a:r>
-              <a:rPr lang="en-US" sz="950" dirty="0">
-                <a:solidFill>
-                  <a:srgbClr val="6B7A86"/>
-                </a:solidFill>
-                <a:latin typeface="Arial" pitchFamily="34" charset="0"/>
-                <a:ea typeface="Arial" pitchFamily="34" charset="-122"/>
-                <a:cs typeface="Arial" pitchFamily="34" charset="-120"/>
-              </a:rPr>
-              <a:t>Real + simulated</a:t>
-            </a:r>
-            <a:endParaRPr lang="en-US" sz="950" dirty="0"/>
-          </a:p>
-          <a:p>
-            <a:pPr algn="ctr" indent="0" marL="0">
-              <a:buNone/>
-            </a:pPr>
-            <a:r>
-              <a:rPr lang="en-US" sz="950" dirty="0">
-                <a:solidFill>
-                  <a:srgbClr val="6B7A86"/>
-                </a:solidFill>
-                <a:latin typeface="Arial" pitchFamily="34" charset="0"/>
-                <a:ea typeface="Arial" pitchFamily="34" charset="-122"/>
-                <a:cs typeface="Arial" pitchFamily="34" charset="-120"/>
-              </a:rPr>
-              <a:t>controller/pilot speech</a:t>
-            </a:r>
-            <a:endParaRPr lang="en-US" sz="950" dirty="0"/>
-          </a:p>
-        </p:txBody>
-      </p:sp>
-      <p:sp>
-        <p:nvSpPr>
-          <p:cNvPr id="8" name="Text 5"/>
-          <p:cNvSpPr txBox="1"/>
-          <p:nvPr/>
-        </p:nvSpPr>
-        <p:spPr>
-          <a:xfrm>
-            <a:off x="2194560" y="2194560"/>
-            <a:ext cx="426720" cy="548640"/>
-          </a:xfrm>
-          <a:prstGeom prst="rect">
-            <a:avLst/>
-          </a:prstGeom>
-          <a:noFill/>
-          <a:ln/>
-        </p:spPr>
-        <p:txBody>
-          <a:bodyPr wrap="square" lIns="0" tIns="0" rIns="0" bIns="0" rtlCol="0" anchor="ctr"/>
-          <a:lstStyle/>
-          <a:p>
-            <a:pPr algn="ctr" indent="0" marL="0">
-              <a:buNone/>
-            </a:pPr>
-            <a:r>
-              <a:rPr lang="en-US" sz="2400" b="1" dirty="0">
-                <a:solidFill>
-                  <a:srgbClr val="6B7A86"/>
-                </a:solidFill>
-                <a:latin typeface="Arial" pitchFamily="34" charset="0"/>
-                <a:ea typeface="Arial" pitchFamily="34" charset="-122"/>
-                <a:cs typeface="Arial" pitchFamily="34" charset="-120"/>
-              </a:rPr>
-              <a:t>→</a:t>
-            </a:r>
-            <a:endParaRPr lang="en-US" sz="2400" dirty="0"/>
-          </a:p>
-        </p:txBody>
-      </p:sp>
-      <p:sp>
-        <p:nvSpPr>
-          <p:cNvPr id="9" name="Shape 6"/>
-          <p:cNvSpPr/>
-          <p:nvPr/>
-        </p:nvSpPr>
-        <p:spPr>
-          <a:xfrm>
-            <a:off x="3032760" y="1965960"/>
-            <a:ext cx="914400" cy="914400"/>
-          </a:xfrm>
-          <a:prstGeom prst="ellipse">
-            <a:avLst/>
-          </a:prstGeom>
-          <a:solidFill>
-            <a:srgbClr val="384957"/>
-          </a:solidFill>
-          <a:ln/>
-        </p:spPr>
-      </p:sp>
-      <p:pic>
-        <p:nvPicPr>
-          <p:cNvPr id="10" name="Image 1" descr="/tmp/claude-1000/-home-ballen-GitHub/10f2e268-ec1d-4d6f-8dc8-6cf2617b3162/scratchpad/pptx_work/icons/robot-white.png">    </p:cNvPr>
-          <p:cNvPicPr>
-            <a:picLocks noChangeAspect="1"/>
-          </p:cNvPicPr>
-          <p:nvPr/>
-        </p:nvPicPr>
-        <p:blipFill>
-          <a:blip r:embed="rId2"/>
-          <a:stretch>
-            <a:fillRect/>
-          </a:stretch>
-        </p:blipFill>
-        <p:spPr>
-          <a:xfrm>
-            <a:off x="3215640" y="2148840"/>
-            <a:ext cx="548640" cy="548640"/>
-          </a:xfrm>
-          <a:prstGeom prst="rect">
-            <a:avLst/>
-          </a:prstGeom>
-        </p:spPr>
-      </p:pic>
-      <p:sp>
-        <p:nvSpPr>
-          <p:cNvPr id="11" name="Text 7"/>
-          <p:cNvSpPr txBox="1"/>
-          <p:nvPr/>
-        </p:nvSpPr>
-        <p:spPr>
-          <a:xfrm>
-            <a:off x="2621280" y="2990088"/>
-            <a:ext cx="1737360" cy="475488"/>
-          </a:xfrm>
-          <a:prstGeom prst="rect">
-            <a:avLst/>
-          </a:prstGeom>
-          <a:noFill/>
-          <a:ln/>
-        </p:spPr>
-        <p:txBody>
-          <a:bodyPr wrap="square" lIns="0" tIns="0" rIns="0" bIns="0" rtlCol="0" anchor="ctr"/>
-          <a:lstStyle/>
-          <a:p>
-            <a:pPr algn="ctr" indent="0" marL="0">
-              <a:buNone/>
-            </a:pPr>
-            <a:r>
-              <a:rPr lang="en-US" sz="1300" b="1" dirty="0">
-                <a:solidFill>
-                  <a:srgbClr val="384957"/>
-                </a:solidFill>
-                <a:latin typeface="Arial" pitchFamily="34" charset="0"/>
-                <a:ea typeface="Arial" pitchFamily="34" charset="-122"/>
-                <a:cs typeface="Arial" pitchFamily="34" charset="-120"/>
-              </a:rPr>
-              <a:t>Speech Recognition</a:t>
-            </a:r>
-            <a:endParaRPr lang="en-US" sz="1300" dirty="0"/>
-          </a:p>
-        </p:txBody>
-      </p:sp>
-      <p:sp>
-        <p:nvSpPr>
-          <p:cNvPr id="12" name="Text 8"/>
-          <p:cNvSpPr txBox="1"/>
-          <p:nvPr/>
-        </p:nvSpPr>
-        <p:spPr>
-          <a:xfrm>
-            <a:off x="2621280" y="3502152"/>
-            <a:ext cx="1737360" cy="658368"/>
-          </a:xfrm>
-          <a:prstGeom prst="rect">
-            <a:avLst/>
-          </a:prstGeom>
-          <a:noFill/>
-          <a:ln/>
-        </p:spPr>
-        <p:txBody>
-          <a:bodyPr wrap="square" lIns="0" tIns="0" rIns="0" bIns="0" rtlCol="0" anchor="ctr"/>
-          <a:lstStyle/>
-          <a:p>
-            <a:pPr algn="ctr" indent="0" marL="0">
-              <a:buNone/>
-            </a:pPr>
-            <a:r>
-              <a:rPr lang="en-US" sz="950" dirty="0">
-                <a:solidFill>
-                  <a:srgbClr val="6B7A86"/>
-                </a:solidFill>
-                <a:latin typeface="Arial" pitchFamily="34" charset="0"/>
-                <a:ea typeface="Arial" pitchFamily="34" charset="-122"/>
-                <a:cs typeface="Arial" pitchFamily="34" charset="-120"/>
-              </a:rPr>
-              <a:t>Whisper-family ASR</a:t>
-            </a:r>
-            <a:endParaRPr lang="en-US" sz="950" dirty="0"/>
-          </a:p>
-          <a:p>
-            <a:pPr algn="ctr" indent="0" marL="0">
-              <a:buNone/>
-            </a:pPr>
-            <a:r>
-              <a:rPr lang="en-US" sz="950" dirty="0">
-                <a:solidFill>
-                  <a:srgbClr val="6B7A86"/>
-                </a:solidFill>
-                <a:latin typeface="Arial" pitchFamily="34" charset="0"/>
-                <a:ea typeface="Arial" pitchFamily="34" charset="-122"/>
-                <a:cs typeface="Arial" pitchFamily="34" charset="-120"/>
-              </a:rPr>
-              <a:t>(baseline, adapted, fine-tuned)</a:t>
-            </a:r>
-            <a:endParaRPr lang="en-US" sz="950" dirty="0"/>
-          </a:p>
-        </p:txBody>
-      </p:sp>
-      <p:sp>
-        <p:nvSpPr>
-          <p:cNvPr id="13" name="Text 9"/>
-          <p:cNvSpPr txBox="1"/>
-          <p:nvPr/>
-        </p:nvSpPr>
-        <p:spPr>
-          <a:xfrm>
-            <a:off x="4358640" y="2194560"/>
-            <a:ext cx="426720" cy="548640"/>
-          </a:xfrm>
-          <a:prstGeom prst="rect">
-            <a:avLst/>
-          </a:prstGeom>
-          <a:noFill/>
-          <a:ln/>
-        </p:spPr>
-        <p:txBody>
-          <a:bodyPr wrap="square" lIns="0" tIns="0" rIns="0" bIns="0" rtlCol="0" anchor="ctr"/>
-          <a:lstStyle/>
-          <a:p>
-            <a:pPr algn="ctr" indent="0" marL="0">
-              <a:buNone/>
-            </a:pPr>
-            <a:r>
-              <a:rPr lang="en-US" sz="2400" b="1" dirty="0">
-                <a:solidFill>
-                  <a:srgbClr val="6B7A86"/>
-                </a:solidFill>
-                <a:latin typeface="Arial" pitchFamily="34" charset="0"/>
-                <a:ea typeface="Arial" pitchFamily="34" charset="-122"/>
-                <a:cs typeface="Arial" pitchFamily="34" charset="-120"/>
-              </a:rPr>
-              <a:t>→</a:t>
-            </a:r>
-            <a:endParaRPr lang="en-US" sz="2400" dirty="0"/>
-          </a:p>
-        </p:txBody>
-      </p:sp>
-      <p:sp>
-        <p:nvSpPr>
-          <p:cNvPr id="14" name="Shape 10"/>
-          <p:cNvSpPr/>
-          <p:nvPr/>
-        </p:nvSpPr>
-        <p:spPr>
-          <a:xfrm>
-            <a:off x="5196840" y="1965960"/>
-            <a:ext cx="914400" cy="914400"/>
-          </a:xfrm>
-          <a:prstGeom prst="ellipse">
-            <a:avLst/>
-          </a:prstGeom>
-          <a:solidFill>
-            <a:srgbClr val="0097A7"/>
-          </a:solidFill>
-          <a:ln/>
-        </p:spPr>
-      </p:sp>
-      <p:pic>
-        <p:nvPicPr>
-          <p:cNvPr id="15" name="Image 2" descr="/tmp/claude-1000/-home-ballen-GitHub/10f2e268-ec1d-4d6f-8dc8-6cf2617b3162/scratchpad/pptx_work/icons/tags-white.png">    </p:cNvPr>
+          <p:cNvPr id="5" name="Image 0" descr="/tmp/claude-1000/-home-ballen-GitHub/10f2e268-ec1d-4d6f-8dc8-6cf2617b3162/scratchpad/pptx_work/icons/mic-white.png"/>
           <p:cNvPicPr>
             <a:picLocks noChangeAspect="1"/>
           </p:cNvPicPr>
@@ -6172,7 +5814,7 @@
         </p:blipFill>
         <p:spPr>
           <a:xfrm>
-            <a:off x="5379720" y="2148840"/>
+            <a:off x="1051560" y="2148840"/>
             <a:ext cx="548640" cy="548640"/>
           </a:xfrm>
           <a:prstGeom prst="rect">
@@ -6182,13 +5824,13 @@
       </p:pic>
       <p:sp>
         <p:nvSpPr>
-          <p:cNvPr id="16" name="Text 11"/>
-          <p:cNvSpPr txBox="1"/>
-          <p:nvPr/>
-        </p:nvSpPr>
-        <p:spPr>
-          <a:xfrm>
-            <a:off x="4785360" y="2990088"/>
+          <p:cNvPr id="6" name="Text 3"/>
+          <p:cNvSpPr txBox="1"/>
+          <p:nvPr/>
+        </p:nvSpPr>
+        <p:spPr>
+          <a:xfrm>
+            <a:off x="457200" y="2990088"/>
             <a:ext cx="1737360" cy="475488"/>
           </a:xfrm>
           <a:prstGeom prst="rect">
@@ -6201,7 +5843,7 @@
           <a:bodyPr wrap="square" lIns="0" tIns="0" rIns="0" bIns="0" rtlCol="0" anchor="ctr"/>
           <a:lstStyle/>
           <a:p>
-            <a:pPr algn="ctr" indent="0" marL="0">
+            <a:pPr marL="0" indent="0" algn="ctr">
               <a:buNone/>
             </a:pPr>
             <a:r>
@@ -6213,7 +5855,7 @@
                 <a:ea typeface="Arial" pitchFamily="34" charset="-122"/>
                 <a:cs typeface="Arial" pitchFamily="34" charset="-120"/>
               </a:rPr>
-              <a:t>Aviation Info Extraction</a:t>
+              <a:t>ATC Audio</a:t>
             </a:r>
             <a:endParaRPr lang="en-US" sz="1300" dirty="0"/>
           </a:p>
@@ -6221,13 +5863,13 @@
       </p:sp>
       <p:sp>
         <p:nvSpPr>
-          <p:cNvPr id="17" name="Text 12"/>
-          <p:cNvSpPr txBox="1"/>
-          <p:nvPr/>
-        </p:nvSpPr>
-        <p:spPr>
-          <a:xfrm>
-            <a:off x="4785360" y="3502152"/>
+          <p:cNvPr id="7" name="Text 4"/>
+          <p:cNvSpPr txBox="1"/>
+          <p:nvPr/>
+        </p:nvSpPr>
+        <p:spPr>
+          <a:xfrm>
+            <a:off x="457200" y="3502152"/>
             <a:ext cx="1737360" cy="658368"/>
           </a:xfrm>
           <a:prstGeom prst="rect">
@@ -6240,7 +5882,7 @@
           <a:bodyPr wrap="square" lIns="0" tIns="0" rIns="0" bIns="0" rtlCol="0" anchor="ctr"/>
           <a:lstStyle/>
           <a:p>
-            <a:pPr algn="ctr" indent="0" marL="0">
+            <a:pPr marL="0" indent="0" algn="ctr">
               <a:buNone/>
             </a:pPr>
             <a:r>
@@ -6252,12 +5894,12 @@
                 <a:ea typeface="Arial" pitchFamily="34" charset="-122"/>
                 <a:cs typeface="Arial" pitchFamily="34" charset="-120"/>
               </a:rPr>
-              <a:t>Callsigns, commands,</a:t>
+              <a:t>Real + simulated</a:t>
             </a:r>
             <a:endParaRPr lang="en-US" sz="950" dirty="0"/>
           </a:p>
           <a:p>
-            <a:pPr algn="ctr" indent="0" marL="0">
+            <a:pPr marL="0" indent="0" algn="ctr">
               <a:buNone/>
             </a:pPr>
             <a:r>
@@ -6269,7 +5911,7 @@
                 <a:ea typeface="Arial" pitchFamily="34" charset="-122"/>
                 <a:cs typeface="Arial" pitchFamily="34" charset="-120"/>
               </a:rPr>
-              <a:t>altitudes, headings (NER)</a:t>
+              <a:t>controller/pilot speech</a:t>
             </a:r>
             <a:endParaRPr lang="en-US" sz="950" dirty="0"/>
           </a:p>
@@ -6277,13 +5919,13 @@
       </p:sp>
       <p:sp>
         <p:nvSpPr>
-          <p:cNvPr id="18" name="Text 13"/>
-          <p:cNvSpPr txBox="1"/>
-          <p:nvPr/>
-        </p:nvSpPr>
-        <p:spPr>
-          <a:xfrm>
-            <a:off x="6522720" y="2194560"/>
+          <p:cNvPr id="8" name="Text 5"/>
+          <p:cNvSpPr txBox="1"/>
+          <p:nvPr/>
+        </p:nvSpPr>
+        <p:spPr>
+          <a:xfrm>
+            <a:off x="2194560" y="2194560"/>
             <a:ext cx="426720" cy="548640"/>
           </a:xfrm>
           <a:prstGeom prst="rect">
@@ -6296,7 +5938,7 @@
           <a:bodyPr wrap="square" lIns="0" tIns="0" rIns="0" bIns="0" rtlCol="0" anchor="ctr"/>
           <a:lstStyle/>
           <a:p>
-            <a:pPr algn="ctr" indent="0" marL="0">
+            <a:pPr marL="0" indent="0" algn="ctr">
               <a:buNone/>
             </a:pPr>
             <a:r>
@@ -6316,27 +5958,34 @@
       </p:sp>
       <p:sp>
         <p:nvSpPr>
-          <p:cNvPr id="19" name="Shape 14"/>
+          <p:cNvPr id="9" name="Shape 6"/>
           <p:cNvSpPr/>
           <p:nvPr/>
         </p:nvSpPr>
         <p:spPr>
           <a:xfrm>
-            <a:off x="7360920" y="1965960"/>
+            <a:off x="3032760" y="1965960"/>
             <a:ext cx="914400" cy="914400"/>
           </a:xfrm>
           <a:prstGeom prst="ellipse">
             <a:avLst/>
           </a:prstGeom>
           <a:solidFill>
-            <a:srgbClr val="0097A7"/>
+            <a:srgbClr val="384957"/>
           </a:solidFill>
           <a:ln/>
         </p:spPr>
+        <p:txBody>
+          <a:bodyPr/>
+          <a:lstStyle/>
+          <a:p>
+            <a:endParaRPr lang="en-US"/>
+          </a:p>
+        </p:txBody>
       </p:sp>
       <p:pic>
         <p:nvPicPr>
-          <p:cNvPr id="20" name="Image 3" descr="/tmp/claude-1000/-home-ballen-GitHub/10f2e268-ec1d-4d6f-8dc8-6cf2617b3162/scratchpad/pptx_work/icons/chart-line-white.png">    </p:cNvPr>
+          <p:cNvPr id="10" name="Image 1" descr="/tmp/claude-1000/-home-ballen-GitHub/10f2e268-ec1d-4d6f-8dc8-6cf2617b3162/scratchpad/pptx_work/icons/robot-white.png"/>
           <p:cNvPicPr>
             <a:picLocks noChangeAspect="1"/>
           </p:cNvPicPr>
@@ -6350,6 +5999,376 @@
         </p:blipFill>
         <p:spPr>
           <a:xfrm>
+            <a:off x="3215640" y="2148840"/>
+            <a:ext cx="548640" cy="548640"/>
+          </a:xfrm>
+          <a:prstGeom prst="rect">
+            <a:avLst/>
+          </a:prstGeom>
+        </p:spPr>
+      </p:pic>
+      <p:sp>
+        <p:nvSpPr>
+          <p:cNvPr id="11" name="Text 7"/>
+          <p:cNvSpPr txBox="1"/>
+          <p:nvPr/>
+        </p:nvSpPr>
+        <p:spPr>
+          <a:xfrm>
+            <a:off x="2621280" y="2990088"/>
+            <a:ext cx="1737360" cy="475488"/>
+          </a:xfrm>
+          <a:prstGeom prst="rect">
+            <a:avLst/>
+          </a:prstGeom>
+          <a:noFill/>
+          <a:ln/>
+        </p:spPr>
+        <p:txBody>
+          <a:bodyPr wrap="square" lIns="0" tIns="0" rIns="0" bIns="0" rtlCol="0" anchor="ctr"/>
+          <a:lstStyle/>
+          <a:p>
+            <a:pPr marL="0" indent="0" algn="ctr">
+              <a:buNone/>
+            </a:pPr>
+            <a:r>
+              <a:rPr lang="en-US" sz="1300" b="1" dirty="0">
+                <a:solidFill>
+                  <a:srgbClr val="384957"/>
+                </a:solidFill>
+                <a:latin typeface="Arial" pitchFamily="34" charset="0"/>
+                <a:ea typeface="Arial" pitchFamily="34" charset="-122"/>
+                <a:cs typeface="Arial" pitchFamily="34" charset="-120"/>
+              </a:rPr>
+              <a:t>Speech Recognition</a:t>
+            </a:r>
+            <a:endParaRPr lang="en-US" sz="1300" dirty="0"/>
+          </a:p>
+        </p:txBody>
+      </p:sp>
+      <p:sp>
+        <p:nvSpPr>
+          <p:cNvPr id="12" name="Text 8"/>
+          <p:cNvSpPr txBox="1"/>
+          <p:nvPr/>
+        </p:nvSpPr>
+        <p:spPr>
+          <a:xfrm>
+            <a:off x="2621280" y="3502152"/>
+            <a:ext cx="1737360" cy="658368"/>
+          </a:xfrm>
+          <a:prstGeom prst="rect">
+            <a:avLst/>
+          </a:prstGeom>
+          <a:noFill/>
+          <a:ln/>
+        </p:spPr>
+        <p:txBody>
+          <a:bodyPr wrap="square" lIns="0" tIns="0" rIns="0" bIns="0" rtlCol="0" anchor="ctr"/>
+          <a:lstStyle/>
+          <a:p>
+            <a:pPr marL="0" indent="0" algn="ctr">
+              <a:buNone/>
+            </a:pPr>
+            <a:r>
+              <a:rPr lang="en-US" sz="950" dirty="0">
+                <a:solidFill>
+                  <a:srgbClr val="6B7A86"/>
+                </a:solidFill>
+                <a:latin typeface="Arial" pitchFamily="34" charset="0"/>
+                <a:ea typeface="Arial" pitchFamily="34" charset="-122"/>
+                <a:cs typeface="Arial" pitchFamily="34" charset="-120"/>
+              </a:rPr>
+              <a:t>Whisper-family ASR</a:t>
+            </a:r>
+            <a:endParaRPr lang="en-US" sz="950" dirty="0"/>
+          </a:p>
+          <a:p>
+            <a:pPr marL="0" indent="0" algn="ctr">
+              <a:buNone/>
+            </a:pPr>
+            <a:r>
+              <a:rPr lang="en-US" sz="950" dirty="0">
+                <a:solidFill>
+                  <a:srgbClr val="6B7A86"/>
+                </a:solidFill>
+                <a:latin typeface="Arial" pitchFamily="34" charset="0"/>
+                <a:ea typeface="Arial" pitchFamily="34" charset="-122"/>
+                <a:cs typeface="Arial" pitchFamily="34" charset="-120"/>
+              </a:rPr>
+              <a:t>(baseline, adapted, fine-tuned)</a:t>
+            </a:r>
+            <a:endParaRPr lang="en-US" sz="950" dirty="0"/>
+          </a:p>
+        </p:txBody>
+      </p:sp>
+      <p:sp>
+        <p:nvSpPr>
+          <p:cNvPr id="13" name="Text 9"/>
+          <p:cNvSpPr txBox="1"/>
+          <p:nvPr/>
+        </p:nvSpPr>
+        <p:spPr>
+          <a:xfrm>
+            <a:off x="4358640" y="2194560"/>
+            <a:ext cx="426720" cy="548640"/>
+          </a:xfrm>
+          <a:prstGeom prst="rect">
+            <a:avLst/>
+          </a:prstGeom>
+          <a:noFill/>
+          <a:ln/>
+        </p:spPr>
+        <p:txBody>
+          <a:bodyPr wrap="square" lIns="0" tIns="0" rIns="0" bIns="0" rtlCol="0" anchor="ctr"/>
+          <a:lstStyle/>
+          <a:p>
+            <a:pPr marL="0" indent="0" algn="ctr">
+              <a:buNone/>
+            </a:pPr>
+            <a:r>
+              <a:rPr lang="en-US" sz="2400" b="1" dirty="0">
+                <a:solidFill>
+                  <a:srgbClr val="6B7A86"/>
+                </a:solidFill>
+                <a:latin typeface="Arial" pitchFamily="34" charset="0"/>
+                <a:ea typeface="Arial" pitchFamily="34" charset="-122"/>
+                <a:cs typeface="Arial" pitchFamily="34" charset="-120"/>
+              </a:rPr>
+              <a:t>→</a:t>
+            </a:r>
+            <a:endParaRPr lang="en-US" sz="2400" dirty="0"/>
+          </a:p>
+        </p:txBody>
+      </p:sp>
+      <p:sp>
+        <p:nvSpPr>
+          <p:cNvPr id="14" name="Shape 10"/>
+          <p:cNvSpPr/>
+          <p:nvPr/>
+        </p:nvSpPr>
+        <p:spPr>
+          <a:xfrm>
+            <a:off x="5196840" y="1965960"/>
+            <a:ext cx="914400" cy="914400"/>
+          </a:xfrm>
+          <a:prstGeom prst="ellipse">
+            <a:avLst/>
+          </a:prstGeom>
+          <a:solidFill>
+            <a:srgbClr val="0097A7"/>
+          </a:solidFill>
+          <a:ln/>
+        </p:spPr>
+        <p:txBody>
+          <a:bodyPr/>
+          <a:lstStyle/>
+          <a:p>
+            <a:endParaRPr lang="en-US"/>
+          </a:p>
+        </p:txBody>
+      </p:sp>
+      <p:pic>
+        <p:nvPicPr>
+          <p:cNvPr id="15" name="Image 2" descr="/tmp/claude-1000/-home-ballen-GitHub/10f2e268-ec1d-4d6f-8dc8-6cf2617b3162/scratchpad/pptx_work/icons/tags-white.png"/>
+          <p:cNvPicPr>
+            <a:picLocks noChangeAspect="1"/>
+          </p:cNvPicPr>
+          <p:nvPr/>
+        </p:nvPicPr>
+        <p:blipFill>
+          <a:blip r:embed="rId5"/>
+          <a:stretch>
+            <a:fillRect/>
+          </a:stretch>
+        </p:blipFill>
+        <p:spPr>
+          <a:xfrm>
+            <a:off x="5379720" y="2148840"/>
+            <a:ext cx="548640" cy="548640"/>
+          </a:xfrm>
+          <a:prstGeom prst="rect">
+            <a:avLst/>
+          </a:prstGeom>
+        </p:spPr>
+      </p:pic>
+      <p:sp>
+        <p:nvSpPr>
+          <p:cNvPr id="16" name="Text 11"/>
+          <p:cNvSpPr txBox="1"/>
+          <p:nvPr/>
+        </p:nvSpPr>
+        <p:spPr>
+          <a:xfrm>
+            <a:off x="4785360" y="2990088"/>
+            <a:ext cx="1737360" cy="475488"/>
+          </a:xfrm>
+          <a:prstGeom prst="rect">
+            <a:avLst/>
+          </a:prstGeom>
+          <a:noFill/>
+          <a:ln/>
+        </p:spPr>
+        <p:txBody>
+          <a:bodyPr wrap="square" lIns="0" tIns="0" rIns="0" bIns="0" rtlCol="0" anchor="ctr"/>
+          <a:lstStyle/>
+          <a:p>
+            <a:pPr marL="0" indent="0" algn="ctr">
+              <a:buNone/>
+            </a:pPr>
+            <a:r>
+              <a:rPr lang="en-US" sz="1300" b="1" dirty="0">
+                <a:solidFill>
+                  <a:srgbClr val="384957"/>
+                </a:solidFill>
+                <a:latin typeface="Arial" pitchFamily="34" charset="0"/>
+                <a:ea typeface="Arial" pitchFamily="34" charset="-122"/>
+                <a:cs typeface="Arial" pitchFamily="34" charset="-120"/>
+              </a:rPr>
+              <a:t>Aviation Info Extraction</a:t>
+            </a:r>
+            <a:endParaRPr lang="en-US" sz="1300" dirty="0"/>
+          </a:p>
+        </p:txBody>
+      </p:sp>
+      <p:sp>
+        <p:nvSpPr>
+          <p:cNvPr id="17" name="Text 12"/>
+          <p:cNvSpPr txBox="1"/>
+          <p:nvPr/>
+        </p:nvSpPr>
+        <p:spPr>
+          <a:xfrm>
+            <a:off x="4785360" y="3502152"/>
+            <a:ext cx="1737360" cy="658368"/>
+          </a:xfrm>
+          <a:prstGeom prst="rect">
+            <a:avLst/>
+          </a:prstGeom>
+          <a:noFill/>
+          <a:ln/>
+        </p:spPr>
+        <p:txBody>
+          <a:bodyPr wrap="square" lIns="0" tIns="0" rIns="0" bIns="0" rtlCol="0" anchor="ctr"/>
+          <a:lstStyle/>
+          <a:p>
+            <a:pPr marL="0" indent="0" algn="ctr">
+              <a:buNone/>
+            </a:pPr>
+            <a:r>
+              <a:rPr lang="en-US" sz="950" dirty="0">
+                <a:solidFill>
+                  <a:srgbClr val="6B7A86"/>
+                </a:solidFill>
+                <a:latin typeface="Arial" pitchFamily="34" charset="0"/>
+                <a:ea typeface="Arial" pitchFamily="34" charset="-122"/>
+                <a:cs typeface="Arial" pitchFamily="34" charset="-120"/>
+              </a:rPr>
+              <a:t>Callsigns, commands,</a:t>
+            </a:r>
+            <a:endParaRPr lang="en-US" sz="950" dirty="0"/>
+          </a:p>
+          <a:p>
+            <a:pPr marL="0" indent="0" algn="ctr">
+              <a:buNone/>
+            </a:pPr>
+            <a:r>
+              <a:rPr lang="en-US" sz="950" dirty="0">
+                <a:solidFill>
+                  <a:srgbClr val="6B7A86"/>
+                </a:solidFill>
+                <a:latin typeface="Arial" pitchFamily="34" charset="0"/>
+                <a:ea typeface="Arial" pitchFamily="34" charset="-122"/>
+                <a:cs typeface="Arial" pitchFamily="34" charset="-120"/>
+              </a:rPr>
+              <a:t>altitudes, headings (NER)</a:t>
+            </a:r>
+            <a:endParaRPr lang="en-US" sz="950" dirty="0"/>
+          </a:p>
+        </p:txBody>
+      </p:sp>
+      <p:sp>
+        <p:nvSpPr>
+          <p:cNvPr id="18" name="Text 13"/>
+          <p:cNvSpPr txBox="1"/>
+          <p:nvPr/>
+        </p:nvSpPr>
+        <p:spPr>
+          <a:xfrm>
+            <a:off x="6522720" y="2194560"/>
+            <a:ext cx="426720" cy="548640"/>
+          </a:xfrm>
+          <a:prstGeom prst="rect">
+            <a:avLst/>
+          </a:prstGeom>
+          <a:noFill/>
+          <a:ln/>
+        </p:spPr>
+        <p:txBody>
+          <a:bodyPr wrap="square" lIns="0" tIns="0" rIns="0" bIns="0" rtlCol="0" anchor="ctr"/>
+          <a:lstStyle/>
+          <a:p>
+            <a:pPr marL="0" indent="0" algn="ctr">
+              <a:buNone/>
+            </a:pPr>
+            <a:r>
+              <a:rPr lang="en-US" sz="2400" b="1" dirty="0">
+                <a:solidFill>
+                  <a:srgbClr val="6B7A86"/>
+                </a:solidFill>
+                <a:latin typeface="Arial" pitchFamily="34" charset="0"/>
+                <a:ea typeface="Arial" pitchFamily="34" charset="-122"/>
+                <a:cs typeface="Arial" pitchFamily="34" charset="-120"/>
+              </a:rPr>
+              <a:t>→</a:t>
+            </a:r>
+            <a:endParaRPr lang="en-US" sz="2400" dirty="0"/>
+          </a:p>
+        </p:txBody>
+      </p:sp>
+      <p:sp>
+        <p:nvSpPr>
+          <p:cNvPr id="19" name="Shape 14"/>
+          <p:cNvSpPr/>
+          <p:nvPr/>
+        </p:nvSpPr>
+        <p:spPr>
+          <a:xfrm>
+            <a:off x="7360920" y="1965960"/>
+            <a:ext cx="914400" cy="914400"/>
+          </a:xfrm>
+          <a:prstGeom prst="ellipse">
+            <a:avLst/>
+          </a:prstGeom>
+          <a:solidFill>
+            <a:srgbClr val="0097A7"/>
+          </a:solidFill>
+          <a:ln/>
+        </p:spPr>
+        <p:txBody>
+          <a:bodyPr/>
+          <a:lstStyle/>
+          <a:p>
+            <a:endParaRPr lang="en-US"/>
+          </a:p>
+        </p:txBody>
+      </p:sp>
+      <p:pic>
+        <p:nvPicPr>
+          <p:cNvPr id="20" name="Image 3" descr="/tmp/claude-1000/-home-ballen-GitHub/10f2e268-ec1d-4d6f-8dc8-6cf2617b3162/scratchpad/pptx_work/icons/chart-line-white.png"/>
+          <p:cNvPicPr>
+            <a:picLocks noChangeAspect="1"/>
+          </p:cNvPicPr>
+          <p:nvPr/>
+        </p:nvPicPr>
+        <p:blipFill>
+          <a:blip r:embed="rId6"/>
+          <a:stretch>
+            <a:fillRect/>
+          </a:stretch>
+        </p:blipFill>
+        <p:spPr>
+          <a:xfrm>
             <a:off x="7543800" y="2148840"/>
             <a:ext cx="548640" cy="548640"/>
           </a:xfrm>
@@ -6379,7 +6398,7 @@
           <a:bodyPr wrap="square" lIns="0" tIns="0" rIns="0" bIns="0" rtlCol="0" anchor="ctr"/>
           <a:lstStyle/>
           <a:p>
-            <a:pPr algn="ctr" indent="0" marL="0">
+            <a:pPr marL="0" indent="0" algn="ctr">
               <a:buNone/>
             </a:pPr>
             <a:r>
@@ -6418,7 +6437,7 @@
           <a:bodyPr wrap="square" lIns="0" tIns="0" rIns="0" bIns="0" rtlCol="0" anchor="ctr"/>
           <a:lstStyle/>
           <a:p>
-            <a:pPr algn="ctr" indent="0" marL="0">
+            <a:pPr marL="0" indent="0" algn="ctr">
               <a:buNone/>
             </a:pPr>
             <a:r>
@@ -6435,7 +6454,7 @@
             <a:endParaRPr lang="en-US" sz="950" dirty="0"/>
           </a:p>
           <a:p>
-            <a:pPr algn="ctr" indent="0" marL="0">
+            <a:pPr marL="0" indent="0" algn="ctr">
               <a:buNone/>
             </a:pPr>
             <a:r>
@@ -6474,7 +6493,7 @@
           <a:bodyPr wrap="square" lIns="0" tIns="0" rIns="0" bIns="0" rtlCol="0" anchor="ctr"/>
           <a:lstStyle/>
           <a:p>
-            <a:pPr algn="l" indent="0" marL="0">
+            <a:pPr marL="0" indent="0" algn="l">
               <a:buNone/>
             </a:pPr>
             <a:r>
@@ -6486,7 +6505,23 @@
                 <a:ea typeface="Arial" pitchFamily="34" charset="-122"/>
                 <a:cs typeface="Arial" pitchFamily="34" charset="-120"/>
               </a:rPr>
-              <a:t>Research Questions:   RQ1 ASR accuracy  ·  RQ2 aviation information extraction  ·  RQ3 what drives transcription error</a:t>
+              <a:t>Research Questions:   </a:t>
+            </a:r>
+          </a:p>
+          <a:p>
+            <a:pPr marL="0" indent="0" algn="l">
+              <a:buNone/>
+            </a:pPr>
+            <a:r>
+              <a:rPr lang="en-US" sz="1150" i="1" dirty="0">
+                <a:solidFill>
+                  <a:srgbClr val="384957"/>
+                </a:solidFill>
+                <a:latin typeface="Arial" pitchFamily="34" charset="0"/>
+                <a:ea typeface="Arial" pitchFamily="34" charset="-122"/>
+                <a:cs typeface="Arial" pitchFamily="34" charset="-120"/>
+              </a:rPr>
+              <a:t>RQ1 Automatic Speech Recognition (ASR) ·  RQ2 Aviation information extraction  ·  RQ3 Transcription error drivers</a:t>
             </a:r>
             <a:endParaRPr lang="en-US" sz="1150" dirty="0"/>
           </a:p>
@@ -6513,7 +6548,7 @@
           <a:bodyPr wrap="square" lIns="0" tIns="0" rIns="0" bIns="0" rtlCol="0" anchor="ctr"/>
           <a:lstStyle/>
           <a:p>
-            <a:pPr algn="l" indent="0" marL="0">
+            <a:pPr marL="0" indent="0" algn="l">
               <a:buNone/>
             </a:pPr>
             <a:r>
@@ -6552,7 +6587,7 @@
           <a:bodyPr wrap="square" lIns="0" tIns="0" rIns="0" bIns="0" rtlCol="0" anchor="ctr"/>
           <a:lstStyle/>
           <a:p>
-            <a:pPr algn="r" indent="0" marL="0">
+            <a:pPr marL="0" indent="0" algn="r">
               <a:buNone/>
             </a:pPr>
             <a:r>
@@ -6586,6 +6621,7 @@
         <a:solidFill>
           <a:srgbClr val="FFFFFF"/>
         </a:solidFill>
+        <a:effectLst/>
       </p:bgPr>
     </p:bg>
     <p:spTree>
@@ -6623,7 +6659,7 @@
           <a:bodyPr wrap="square" lIns="0" tIns="0" rIns="0" bIns="0" rtlCol="0" anchor="ctr"/>
           <a:lstStyle/>
           <a:p>
-            <a:pPr algn="l" indent="0" marL="0">
+            <a:pPr marL="0" indent="0" algn="l">
               <a:buNone/>
             </a:pPr>
             <a:r>
@@ -6635,7 +6671,7 @@
                 <a:ea typeface="Arial" pitchFamily="34" charset="-122"/>
                 <a:cs typeface="Arial" pitchFamily="34" charset="-120"/>
               </a:rPr>
-              <a:t>02.  EDA Results: Complete</a:t>
+              <a:t>02.  EDA Results</a:t>
             </a:r>
             <a:endParaRPr lang="en-US" sz="2800" dirty="0"/>
           </a:p>
@@ -6662,13 +6698,20 @@
           </a:solidFill>
           <a:ln/>
           <a:effectLst>
-            <a:outerShdw sx="100000" sy="100000" kx="0" ky="0" algn="bl" rotWithShape="0" blurRad="76200" dist="25400" dir="5400000">
+            <a:outerShdw blurRad="76200" dist="25400" dir="5400000" algn="bl" rotWithShape="0">
               <a:srgbClr val="1B2733">
                 <a:alpha val="12000"/>
               </a:srgbClr>
             </a:outerShdw>
           </a:effectLst>
         </p:spPr>
+        <p:txBody>
+          <a:bodyPr/>
+          <a:lstStyle/>
+          <a:p>
+            <a:endParaRPr lang="en-US"/>
+          </a:p>
+        </p:txBody>
       </p:sp>
       <p:sp>
         <p:nvSpPr>
@@ -6689,346 +6732,17 @@
           </a:solidFill>
           <a:ln/>
         </p:spPr>
+        <p:txBody>
+          <a:bodyPr/>
+          <a:lstStyle/>
+          <a:p>
+            <a:endParaRPr lang="en-US"/>
+          </a:p>
+        </p:txBody>
       </p:sp>
       <p:pic>
         <p:nvPicPr>
-          <p:cNvPr id="5" name="Image 0" descr="/tmp/claude-1000/-home-ballen-GitHub/10f2e268-ec1d-4d6f-8dc8-6cf2617b3162/scratchpad/pptx_work/icons/database-white.png">    </p:cNvPr>
-          <p:cNvPicPr>
-            <a:picLocks noChangeAspect="1"/>
-          </p:cNvPicPr>
-          <p:nvPr/>
-        </p:nvPicPr>
-        <p:blipFill>
-          <a:blip r:embed="rId1"/>
-          <a:stretch>
-            <a:fillRect/>
-          </a:stretch>
-        </p:blipFill>
-        <p:spPr>
-          <a:xfrm>
-            <a:off x="1243584" y="1746504"/>
-            <a:ext cx="347472" cy="347472"/>
-          </a:xfrm>
-          <a:prstGeom prst="rect">
-            <a:avLst/>
-          </a:prstGeom>
-        </p:spPr>
-      </p:pic>
-      <p:sp>
-        <p:nvSpPr>
-          <p:cNvPr id="6" name="Text 3"/>
-          <p:cNvSpPr txBox="1"/>
-          <p:nvPr/>
-        </p:nvSpPr>
-        <p:spPr>
-          <a:xfrm>
-            <a:off x="457200" y="2304288"/>
-            <a:ext cx="1920240" cy="548640"/>
-          </a:xfrm>
-          <a:prstGeom prst="rect">
-            <a:avLst/>
-          </a:prstGeom>
-          <a:noFill/>
-          <a:ln/>
-        </p:spPr>
-        <p:txBody>
-          <a:bodyPr wrap="square" lIns="0" tIns="0" rIns="0" bIns="0" rtlCol="0" anchor="ctr"/>
-          <a:lstStyle/>
-          <a:p>
-            <a:pPr algn="ctr" indent="0" marL="0">
-              <a:buNone/>
-            </a:pPr>
-            <a:r>
-              <a:rPr lang="en-US" sz="3000" b="1" dirty="0">
-                <a:solidFill>
-                  <a:srgbClr val="384957"/>
-                </a:solidFill>
-                <a:latin typeface="Arial" pitchFamily="34" charset="0"/>
-                <a:ea typeface="Arial" pitchFamily="34" charset="-122"/>
-                <a:cs typeface="Arial" pitchFamily="34" charset="-120"/>
-              </a:rPr>
-              <a:t>17,681</a:t>
-            </a:r>
-            <a:endParaRPr lang="en-US" sz="3000" dirty="0"/>
-          </a:p>
-        </p:txBody>
-      </p:sp>
-      <p:sp>
-        <p:nvSpPr>
-          <p:cNvPr id="7" name="Text 4"/>
-          <p:cNvSpPr txBox="1"/>
-          <p:nvPr/>
-        </p:nvSpPr>
-        <p:spPr>
-          <a:xfrm>
-            <a:off x="566928" y="2852928"/>
-            <a:ext cx="1700784" cy="777240"/>
-          </a:xfrm>
-          <a:prstGeom prst="rect">
-            <a:avLst/>
-          </a:prstGeom>
-          <a:noFill/>
-          <a:ln/>
-        </p:spPr>
-        <p:txBody>
-          <a:bodyPr wrap="square" lIns="0" tIns="0" rIns="0" bIns="0" rtlCol="0" anchor="ctr"/>
-          <a:lstStyle/>
-          <a:p>
-            <a:pPr algn="ctr" indent="0" marL="0">
-              <a:buNone/>
-            </a:pPr>
-            <a:r>
-              <a:rPr lang="en-US" sz="1050" dirty="0">
-                <a:solidFill>
-                  <a:srgbClr val="6B7A86"/>
-                </a:solidFill>
-                <a:latin typeface="Arial" pitchFamily="34" charset="0"/>
-                <a:ea typeface="Arial" pitchFamily="34" charset="-122"/>
-                <a:cs typeface="Arial" pitchFamily="34" charset="-120"/>
-              </a:rPr>
-              <a:t>Utterances combined</a:t>
-            </a:r>
-            <a:endParaRPr lang="en-US" sz="1050" dirty="0"/>
-          </a:p>
-          <a:p>
-            <a:pPr algn="ctr" indent="0" marL="0">
-              <a:buNone/>
-            </a:pPr>
-            <a:r>
-              <a:rPr lang="en-US" sz="1050" dirty="0">
-                <a:solidFill>
-                  <a:srgbClr val="6B7A86"/>
-                </a:solidFill>
-                <a:latin typeface="Arial" pitchFamily="34" charset="0"/>
-                <a:ea typeface="Arial" pitchFamily="34" charset="-122"/>
-                <a:cs typeface="Arial" pitchFamily="34" charset="-120"/>
-              </a:rPr>
-              <a:t>across both corpora</a:t>
-            </a:r>
-            <a:endParaRPr lang="en-US" sz="1050" dirty="0"/>
-          </a:p>
-        </p:txBody>
-      </p:sp>
-      <p:sp>
-        <p:nvSpPr>
-          <p:cNvPr id="8" name="Shape 5"/>
-          <p:cNvSpPr/>
-          <p:nvPr/>
-        </p:nvSpPr>
-        <p:spPr>
-          <a:xfrm>
-            <a:off x="2560320" y="1371600"/>
-            <a:ext cx="1920240" cy="2331720"/>
-          </a:xfrm>
-          <a:prstGeom prst="roundRect">
-            <a:avLst>
-              <a:gd name="adj" fmla="val 4762"/>
-            </a:avLst>
-          </a:prstGeom>
-          <a:solidFill>
-            <a:srgbClr val="F3F8FC"/>
-          </a:solidFill>
-          <a:ln/>
-          <a:effectLst>
-            <a:outerShdw sx="100000" sy="100000" kx="0" ky="0" algn="bl" rotWithShape="0" blurRad="76200" dist="25400" dir="5400000">
-              <a:srgbClr val="1B2733">
-                <a:alpha val="12000"/>
-              </a:srgbClr>
-            </a:outerShdw>
-          </a:effectLst>
-        </p:spPr>
-      </p:sp>
-      <p:sp>
-        <p:nvSpPr>
-          <p:cNvPr id="9" name="Shape 6"/>
-          <p:cNvSpPr/>
-          <p:nvPr/>
-        </p:nvSpPr>
-        <p:spPr>
-          <a:xfrm>
-            <a:off x="3209544" y="1609344"/>
-            <a:ext cx="621792" cy="621792"/>
-          </a:xfrm>
-          <a:prstGeom prst="ellipse">
-            <a:avLst/>
-          </a:prstGeom>
-          <a:solidFill>
-            <a:srgbClr val="0097A7"/>
-          </a:solidFill>
-          <a:ln/>
-        </p:spPr>
-      </p:sp>
-      <p:pic>
-        <p:nvPicPr>
-          <p:cNvPr id="10" name="Image 1" descr="/tmp/claude-1000/-home-ballen-GitHub/10f2e268-ec1d-4d6f-8dc8-6cf2617b3162/scratchpad/pptx_work/icons/wave-square-white.png">    </p:cNvPr>
-          <p:cNvPicPr>
-            <a:picLocks noChangeAspect="1"/>
-          </p:cNvPicPr>
-          <p:nvPr/>
-        </p:nvPicPr>
-        <p:blipFill>
-          <a:blip r:embed="rId2"/>
-          <a:stretch>
-            <a:fillRect/>
-          </a:stretch>
-        </p:blipFill>
-        <p:spPr>
-          <a:xfrm>
-            <a:off x="3346704" y="1746504"/>
-            <a:ext cx="347472" cy="347472"/>
-          </a:xfrm>
-          <a:prstGeom prst="rect">
-            <a:avLst/>
-          </a:prstGeom>
-        </p:spPr>
-      </p:pic>
-      <p:sp>
-        <p:nvSpPr>
-          <p:cNvPr id="11" name="Text 7"/>
-          <p:cNvSpPr txBox="1"/>
-          <p:nvPr/>
-        </p:nvSpPr>
-        <p:spPr>
-          <a:xfrm>
-            <a:off x="2560320" y="2304288"/>
-            <a:ext cx="1920240" cy="548640"/>
-          </a:xfrm>
-          <a:prstGeom prst="rect">
-            <a:avLst/>
-          </a:prstGeom>
-          <a:noFill/>
-          <a:ln/>
-        </p:spPr>
-        <p:txBody>
-          <a:bodyPr wrap="square" lIns="0" tIns="0" rIns="0" bIns="0" rtlCol="0" anchor="ctr"/>
-          <a:lstStyle/>
-          <a:p>
-            <a:pPr algn="ctr" indent="0" marL="0">
-              <a:buNone/>
-            </a:pPr>
-            <a:r>
-              <a:rPr lang="en-US" sz="3000" b="1" dirty="0">
-                <a:solidFill>
-                  <a:srgbClr val="384957"/>
-                </a:solidFill>
-                <a:latin typeface="Arial" pitchFamily="34" charset="0"/>
-                <a:ea typeface="Arial" pitchFamily="34" charset="-122"/>
-                <a:cs typeface="Arial" pitchFamily="34" charset="-120"/>
-              </a:rPr>
-              <a:t>17.9 hrs</a:t>
-            </a:r>
-            <a:endParaRPr lang="en-US" sz="3000" dirty="0"/>
-          </a:p>
-        </p:txBody>
-      </p:sp>
-      <p:sp>
-        <p:nvSpPr>
-          <p:cNvPr id="12" name="Text 8"/>
-          <p:cNvSpPr txBox="1"/>
-          <p:nvPr/>
-        </p:nvSpPr>
-        <p:spPr>
-          <a:xfrm>
-            <a:off x="2670048" y="2852928"/>
-            <a:ext cx="1700784" cy="777240"/>
-          </a:xfrm>
-          <a:prstGeom prst="rect">
-            <a:avLst/>
-          </a:prstGeom>
-          <a:noFill/>
-          <a:ln/>
-        </p:spPr>
-        <p:txBody>
-          <a:bodyPr wrap="square" lIns="0" tIns="0" rIns="0" bIns="0" rtlCol="0" anchor="ctr"/>
-          <a:lstStyle/>
-          <a:p>
-            <a:pPr algn="ctr" indent="0" marL="0">
-              <a:buNone/>
-            </a:pPr>
-            <a:r>
-              <a:rPr lang="en-US" sz="1050" dirty="0">
-                <a:solidFill>
-                  <a:srgbClr val="6B7A86"/>
-                </a:solidFill>
-                <a:latin typeface="Arial" pitchFamily="34" charset="0"/>
-                <a:ea typeface="Arial" pitchFamily="34" charset="-122"/>
-                <a:cs typeface="Arial" pitchFamily="34" charset="-120"/>
-              </a:rPr>
-              <a:t>Of ATC audio,</a:t>
-            </a:r>
-            <a:endParaRPr lang="en-US" sz="1050" dirty="0"/>
-          </a:p>
-          <a:p>
-            <a:pPr algn="ctr" indent="0" marL="0">
-              <a:buNone/>
-            </a:pPr>
-            <a:r>
-              <a:rPr lang="en-US" sz="1050" dirty="0">
-                <a:solidFill>
-                  <a:srgbClr val="6B7A86"/>
-                </a:solidFill>
-                <a:latin typeface="Arial" pitchFamily="34" charset="0"/>
-                <a:ea typeface="Arial" pitchFamily="34" charset="-122"/>
-                <a:cs typeface="Arial" pitchFamily="34" charset="-120"/>
-              </a:rPr>
-              <a:t>resampled to 16kHz</a:t>
-            </a:r>
-            <a:endParaRPr lang="en-US" sz="1050" dirty="0"/>
-          </a:p>
-        </p:txBody>
-      </p:sp>
-      <p:sp>
-        <p:nvSpPr>
-          <p:cNvPr id="13" name="Shape 9"/>
-          <p:cNvSpPr/>
-          <p:nvPr/>
-        </p:nvSpPr>
-        <p:spPr>
-          <a:xfrm>
-            <a:off x="4663440" y="1371600"/>
-            <a:ext cx="1920240" cy="2331720"/>
-          </a:xfrm>
-          <a:prstGeom prst="roundRect">
-            <a:avLst>
-              <a:gd name="adj" fmla="val 4762"/>
-            </a:avLst>
-          </a:prstGeom>
-          <a:solidFill>
-            <a:srgbClr val="F3F8FC"/>
-          </a:solidFill>
-          <a:ln/>
-          <a:effectLst>
-            <a:outerShdw sx="100000" sy="100000" kx="0" ky="0" algn="bl" rotWithShape="0" blurRad="76200" dist="25400" dir="5400000">
-              <a:srgbClr val="1B2733">
-                <a:alpha val="12000"/>
-              </a:srgbClr>
-            </a:outerShdw>
-          </a:effectLst>
-        </p:spPr>
-      </p:sp>
-      <p:sp>
-        <p:nvSpPr>
-          <p:cNvPr id="14" name="Shape 10"/>
-          <p:cNvSpPr/>
-          <p:nvPr/>
-        </p:nvSpPr>
-        <p:spPr>
-          <a:xfrm>
-            <a:off x="5312664" y="1609344"/>
-            <a:ext cx="621792" cy="621792"/>
-          </a:xfrm>
-          <a:prstGeom prst="ellipse">
-            <a:avLst/>
-          </a:prstGeom>
-          <a:solidFill>
-            <a:srgbClr val="0097A7"/>
-          </a:solidFill>
-          <a:ln/>
-        </p:spPr>
-      </p:sp>
-      <p:pic>
-        <p:nvPicPr>
-          <p:cNvPr id="15" name="Image 2" descr="/tmp/claude-1000/-home-ballen-GitHub/10f2e268-ec1d-4d6f-8dc8-6cf2617b3162/scratchpad/pptx_work/icons/layer-group-white.png">    </p:cNvPr>
+          <p:cNvPr id="5" name="Image 0" descr="/tmp/claude-1000/-home-ballen-GitHub/10f2e268-ec1d-4d6f-8dc8-6cf2617b3162/scratchpad/pptx_work/icons/database-white.png"/>
           <p:cNvPicPr>
             <a:picLocks noChangeAspect="1"/>
           </p:cNvPicPr>
@@ -7042,7 +6756,7 @@
         </p:blipFill>
         <p:spPr>
           <a:xfrm>
-            <a:off x="5449824" y="1746504"/>
+            <a:off x="1243584" y="1746504"/>
             <a:ext cx="347472" cy="347472"/>
           </a:xfrm>
           <a:prstGeom prst="rect">
@@ -7052,13 +6766,13 @@
       </p:pic>
       <p:sp>
         <p:nvSpPr>
-          <p:cNvPr id="16" name="Text 11"/>
-          <p:cNvSpPr txBox="1"/>
-          <p:nvPr/>
-        </p:nvSpPr>
-        <p:spPr>
-          <a:xfrm>
-            <a:off x="4663440" y="2304288"/>
+          <p:cNvPr id="6" name="Text 3"/>
+          <p:cNvSpPr txBox="1"/>
+          <p:nvPr/>
+        </p:nvSpPr>
+        <p:spPr>
+          <a:xfrm>
+            <a:off x="457200" y="2304288"/>
             <a:ext cx="1920240" cy="548640"/>
           </a:xfrm>
           <a:prstGeom prst="rect">
@@ -7071,7 +6785,7 @@
           <a:bodyPr wrap="square" lIns="0" tIns="0" rIns="0" bIns="0" rtlCol="0" anchor="ctr"/>
           <a:lstStyle/>
           <a:p>
-            <a:pPr algn="ctr" indent="0" marL="0">
+            <a:pPr marL="0" indent="0" algn="ctr">
               <a:buNone/>
             </a:pPr>
             <a:r>
@@ -7083,7 +6797,7 @@
                 <a:ea typeface="Arial" pitchFamily="34" charset="-122"/>
                 <a:cs typeface="Arial" pitchFamily="34" charset="-120"/>
               </a:rPr>
-              <a:t>2</a:t>
+              <a:t>17,681</a:t>
             </a:r>
             <a:endParaRPr lang="en-US" sz="3000" dirty="0"/>
           </a:p>
@@ -7091,13 +6805,13 @@
       </p:sp>
       <p:sp>
         <p:nvSpPr>
-          <p:cNvPr id="17" name="Text 12"/>
-          <p:cNvSpPr txBox="1"/>
-          <p:nvPr/>
-        </p:nvSpPr>
-        <p:spPr>
-          <a:xfrm>
-            <a:off x="4773168" y="2852928"/>
+          <p:cNvPr id="7" name="Text 4"/>
+          <p:cNvSpPr txBox="1"/>
+          <p:nvPr/>
+        </p:nvSpPr>
+        <p:spPr>
+          <a:xfrm>
+            <a:off x="566928" y="2852928"/>
             <a:ext cx="1700784" cy="777240"/>
           </a:xfrm>
           <a:prstGeom prst="rect">
@@ -7110,7 +6824,7 @@
           <a:bodyPr wrap="square" lIns="0" tIns="0" rIns="0" bIns="0" rtlCol="0" anchor="ctr"/>
           <a:lstStyle/>
           <a:p>
-            <a:pPr algn="ctr" indent="0" marL="0">
+            <a:pPr marL="0" indent="0" algn="ctr">
               <a:buNone/>
             </a:pPr>
             <a:r>
@@ -7122,12 +6836,12 @@
                 <a:ea typeface="Arial" pitchFamily="34" charset="-122"/>
                 <a:cs typeface="Arial" pitchFamily="34" charset="-120"/>
               </a:rPr>
-              <a:t>Sources: real (ATC-ASR-</a:t>
+              <a:t>Utterances combined</a:t>
             </a:r>
             <a:endParaRPr lang="en-US" sz="1050" dirty="0"/>
           </a:p>
           <a:p>
-            <a:pPr algn="ctr" indent="0" marL="0">
+            <a:pPr marL="0" indent="0" algn="ctr">
               <a:buNone/>
             </a:pPr>
             <a:r>
@@ -7139,7 +6853,7 @@
                 <a:ea typeface="Arial" pitchFamily="34" charset="-122"/>
                 <a:cs typeface="Arial" pitchFamily="34" charset="-120"/>
               </a:rPr>
-              <a:t>Dataset) + simulated (ATCOSIM)</a:t>
+              <a:t>across both corpora</a:t>
             </a:r>
             <a:endParaRPr lang="en-US" sz="1050" dirty="0"/>
           </a:p>
@@ -7147,13 +6861,13 @@
       </p:sp>
       <p:sp>
         <p:nvSpPr>
-          <p:cNvPr id="18" name="Shape 13"/>
+          <p:cNvPr id="8" name="Shape 5"/>
           <p:cNvSpPr/>
           <p:nvPr/>
         </p:nvSpPr>
         <p:spPr>
           <a:xfrm>
-            <a:off x="6766560" y="1371600"/>
+            <a:off x="2560320" y="1371600"/>
             <a:ext cx="1920240" cy="2331720"/>
           </a:xfrm>
           <a:prstGeom prst="roundRect">
@@ -7166,23 +6880,30 @@
           </a:solidFill>
           <a:ln/>
           <a:effectLst>
-            <a:outerShdw sx="100000" sy="100000" kx="0" ky="0" algn="bl" rotWithShape="0" blurRad="76200" dist="25400" dir="5400000">
+            <a:outerShdw blurRad="76200" dist="25400" dir="5400000" algn="bl" rotWithShape="0">
               <a:srgbClr val="1B2733">
                 <a:alpha val="12000"/>
               </a:srgbClr>
             </a:outerShdw>
           </a:effectLst>
         </p:spPr>
-      </p:sp>
-      <p:sp>
-        <p:nvSpPr>
-          <p:cNvPr id="19" name="Shape 14"/>
+        <p:txBody>
+          <a:bodyPr/>
+          <a:lstStyle/>
+          <a:p>
+            <a:endParaRPr lang="en-US"/>
+          </a:p>
+        </p:txBody>
+      </p:sp>
+      <p:sp>
+        <p:nvSpPr>
+          <p:cNvPr id="9" name="Shape 6"/>
           <p:cNvSpPr/>
           <p:nvPr/>
         </p:nvSpPr>
         <p:spPr>
           <a:xfrm>
-            <a:off x="7415784" y="1609344"/>
+            <a:off x="3209544" y="1609344"/>
             <a:ext cx="621792" cy="621792"/>
           </a:xfrm>
           <a:prstGeom prst="ellipse">
@@ -7193,10 +6914,17 @@
           </a:solidFill>
           <a:ln/>
         </p:spPr>
+        <p:txBody>
+          <a:bodyPr/>
+          <a:lstStyle/>
+          <a:p>
+            <a:endParaRPr lang="en-US"/>
+          </a:p>
+        </p:txBody>
       </p:sp>
       <p:pic>
         <p:nvPicPr>
-          <p:cNvPr id="20" name="Image 3" descr="/tmp/claude-1000/-home-ballen-GitHub/10f2e268-ec1d-4d6f-8dc8-6cf2617b3162/scratchpad/pptx_work/icons/clipboard-check-white.png">    </p:cNvPr>
+          <p:cNvPr id="10" name="Image 1" descr="/tmp/claude-1000/-home-ballen-GitHub/10f2e268-ec1d-4d6f-8dc8-6cf2617b3162/scratchpad/pptx_work/icons/wave-square-white.png"/>
           <p:cNvPicPr>
             <a:picLocks noChangeAspect="1"/>
           </p:cNvPicPr>
@@ -7210,6 +6938,370 @@
         </p:blipFill>
         <p:spPr>
           <a:xfrm>
+            <a:off x="3346704" y="1746504"/>
+            <a:ext cx="347472" cy="347472"/>
+          </a:xfrm>
+          <a:prstGeom prst="rect">
+            <a:avLst/>
+          </a:prstGeom>
+        </p:spPr>
+      </p:pic>
+      <p:sp>
+        <p:nvSpPr>
+          <p:cNvPr id="11" name="Text 7"/>
+          <p:cNvSpPr txBox="1"/>
+          <p:nvPr/>
+        </p:nvSpPr>
+        <p:spPr>
+          <a:xfrm>
+            <a:off x="2560320" y="2304288"/>
+            <a:ext cx="1920240" cy="548640"/>
+          </a:xfrm>
+          <a:prstGeom prst="rect">
+            <a:avLst/>
+          </a:prstGeom>
+          <a:noFill/>
+          <a:ln/>
+        </p:spPr>
+        <p:txBody>
+          <a:bodyPr wrap="square" lIns="0" tIns="0" rIns="0" bIns="0" rtlCol="0" anchor="ctr"/>
+          <a:lstStyle/>
+          <a:p>
+            <a:pPr marL="0" indent="0" algn="ctr">
+              <a:buNone/>
+            </a:pPr>
+            <a:r>
+              <a:rPr lang="en-US" sz="3000" b="1" dirty="0">
+                <a:solidFill>
+                  <a:srgbClr val="384957"/>
+                </a:solidFill>
+                <a:latin typeface="Arial" pitchFamily="34" charset="0"/>
+                <a:ea typeface="Arial" pitchFamily="34" charset="-122"/>
+                <a:cs typeface="Arial" pitchFamily="34" charset="-120"/>
+              </a:rPr>
+              <a:t>17.9 hrs</a:t>
+            </a:r>
+            <a:endParaRPr lang="en-US" sz="3000" dirty="0"/>
+          </a:p>
+        </p:txBody>
+      </p:sp>
+      <p:sp>
+        <p:nvSpPr>
+          <p:cNvPr id="12" name="Text 8"/>
+          <p:cNvSpPr txBox="1"/>
+          <p:nvPr/>
+        </p:nvSpPr>
+        <p:spPr>
+          <a:xfrm>
+            <a:off x="2670048" y="2852928"/>
+            <a:ext cx="1700784" cy="777240"/>
+          </a:xfrm>
+          <a:prstGeom prst="rect">
+            <a:avLst/>
+          </a:prstGeom>
+          <a:noFill/>
+          <a:ln/>
+        </p:spPr>
+        <p:txBody>
+          <a:bodyPr wrap="square" lIns="0" tIns="0" rIns="0" bIns="0" rtlCol="0" anchor="ctr"/>
+          <a:lstStyle/>
+          <a:p>
+            <a:pPr marL="0" indent="0" algn="ctr">
+              <a:buNone/>
+            </a:pPr>
+            <a:r>
+              <a:rPr lang="en-US" sz="1050" dirty="0">
+                <a:solidFill>
+                  <a:srgbClr val="6B7A86"/>
+                </a:solidFill>
+                <a:latin typeface="Arial" pitchFamily="34" charset="0"/>
+                <a:ea typeface="Arial" pitchFamily="34" charset="-122"/>
+                <a:cs typeface="Arial" pitchFamily="34" charset="-120"/>
+              </a:rPr>
+              <a:t>Of ATC audio,</a:t>
+            </a:r>
+            <a:endParaRPr lang="en-US" sz="1050" dirty="0"/>
+          </a:p>
+          <a:p>
+            <a:pPr marL="0" indent="0" algn="ctr">
+              <a:buNone/>
+            </a:pPr>
+            <a:r>
+              <a:rPr lang="en-US" sz="1050" dirty="0">
+                <a:solidFill>
+                  <a:srgbClr val="6B7A86"/>
+                </a:solidFill>
+                <a:latin typeface="Arial" pitchFamily="34" charset="0"/>
+                <a:ea typeface="Arial" pitchFamily="34" charset="-122"/>
+                <a:cs typeface="Arial" pitchFamily="34" charset="-120"/>
+              </a:rPr>
+              <a:t>resampled to 16kHz</a:t>
+            </a:r>
+            <a:endParaRPr lang="en-US" sz="1050" dirty="0"/>
+          </a:p>
+        </p:txBody>
+      </p:sp>
+      <p:sp>
+        <p:nvSpPr>
+          <p:cNvPr id="13" name="Shape 9"/>
+          <p:cNvSpPr/>
+          <p:nvPr/>
+        </p:nvSpPr>
+        <p:spPr>
+          <a:xfrm>
+            <a:off x="4663440" y="1371600"/>
+            <a:ext cx="1920240" cy="2331720"/>
+          </a:xfrm>
+          <a:prstGeom prst="roundRect">
+            <a:avLst>
+              <a:gd name="adj" fmla="val 4762"/>
+            </a:avLst>
+          </a:prstGeom>
+          <a:solidFill>
+            <a:srgbClr val="F3F8FC"/>
+          </a:solidFill>
+          <a:ln/>
+          <a:effectLst>
+            <a:outerShdw blurRad="76200" dist="25400" dir="5400000" algn="bl" rotWithShape="0">
+              <a:srgbClr val="1B2733">
+                <a:alpha val="12000"/>
+              </a:srgbClr>
+            </a:outerShdw>
+          </a:effectLst>
+        </p:spPr>
+        <p:txBody>
+          <a:bodyPr/>
+          <a:lstStyle/>
+          <a:p>
+            <a:endParaRPr lang="en-US"/>
+          </a:p>
+        </p:txBody>
+      </p:sp>
+      <p:sp>
+        <p:nvSpPr>
+          <p:cNvPr id="14" name="Shape 10"/>
+          <p:cNvSpPr/>
+          <p:nvPr/>
+        </p:nvSpPr>
+        <p:spPr>
+          <a:xfrm>
+            <a:off x="5312664" y="1609344"/>
+            <a:ext cx="621792" cy="621792"/>
+          </a:xfrm>
+          <a:prstGeom prst="ellipse">
+            <a:avLst/>
+          </a:prstGeom>
+          <a:solidFill>
+            <a:srgbClr val="0097A7"/>
+          </a:solidFill>
+          <a:ln/>
+        </p:spPr>
+        <p:txBody>
+          <a:bodyPr/>
+          <a:lstStyle/>
+          <a:p>
+            <a:endParaRPr lang="en-US"/>
+          </a:p>
+        </p:txBody>
+      </p:sp>
+      <p:pic>
+        <p:nvPicPr>
+          <p:cNvPr id="15" name="Image 2" descr="/tmp/claude-1000/-home-ballen-GitHub/10f2e268-ec1d-4d6f-8dc8-6cf2617b3162/scratchpad/pptx_work/icons/layer-group-white.png"/>
+          <p:cNvPicPr>
+            <a:picLocks noChangeAspect="1"/>
+          </p:cNvPicPr>
+          <p:nvPr/>
+        </p:nvPicPr>
+        <p:blipFill>
+          <a:blip r:embed="rId5"/>
+          <a:stretch>
+            <a:fillRect/>
+          </a:stretch>
+        </p:blipFill>
+        <p:spPr>
+          <a:xfrm>
+            <a:off x="5449824" y="1746504"/>
+            <a:ext cx="347472" cy="347472"/>
+          </a:xfrm>
+          <a:prstGeom prst="rect">
+            <a:avLst/>
+          </a:prstGeom>
+        </p:spPr>
+      </p:pic>
+      <p:sp>
+        <p:nvSpPr>
+          <p:cNvPr id="16" name="Text 11"/>
+          <p:cNvSpPr txBox="1"/>
+          <p:nvPr/>
+        </p:nvSpPr>
+        <p:spPr>
+          <a:xfrm>
+            <a:off x="4663440" y="2304288"/>
+            <a:ext cx="1920240" cy="548640"/>
+          </a:xfrm>
+          <a:prstGeom prst="rect">
+            <a:avLst/>
+          </a:prstGeom>
+          <a:noFill/>
+          <a:ln/>
+        </p:spPr>
+        <p:txBody>
+          <a:bodyPr wrap="square" lIns="0" tIns="0" rIns="0" bIns="0" rtlCol="0" anchor="ctr"/>
+          <a:lstStyle/>
+          <a:p>
+            <a:pPr marL="0" indent="0" algn="ctr">
+              <a:buNone/>
+            </a:pPr>
+            <a:r>
+              <a:rPr lang="en-US" sz="3000" b="1" dirty="0">
+                <a:solidFill>
+                  <a:srgbClr val="384957"/>
+                </a:solidFill>
+                <a:latin typeface="Arial" pitchFamily="34" charset="0"/>
+                <a:ea typeface="Arial" pitchFamily="34" charset="-122"/>
+                <a:cs typeface="Arial" pitchFamily="34" charset="-120"/>
+              </a:rPr>
+              <a:t>2</a:t>
+            </a:r>
+            <a:endParaRPr lang="en-US" sz="3000" dirty="0"/>
+          </a:p>
+        </p:txBody>
+      </p:sp>
+      <p:sp>
+        <p:nvSpPr>
+          <p:cNvPr id="17" name="Text 12"/>
+          <p:cNvSpPr txBox="1"/>
+          <p:nvPr/>
+        </p:nvSpPr>
+        <p:spPr>
+          <a:xfrm>
+            <a:off x="4773168" y="2852928"/>
+            <a:ext cx="1700784" cy="777240"/>
+          </a:xfrm>
+          <a:prstGeom prst="rect">
+            <a:avLst/>
+          </a:prstGeom>
+          <a:noFill/>
+          <a:ln/>
+        </p:spPr>
+        <p:txBody>
+          <a:bodyPr wrap="square" lIns="0" tIns="0" rIns="0" bIns="0" rtlCol="0" anchor="ctr"/>
+          <a:lstStyle/>
+          <a:p>
+            <a:pPr marL="0" indent="0" algn="ctr">
+              <a:buNone/>
+            </a:pPr>
+            <a:r>
+              <a:rPr lang="en-US" sz="1050" dirty="0">
+                <a:solidFill>
+                  <a:srgbClr val="6B7A86"/>
+                </a:solidFill>
+                <a:latin typeface="Arial" pitchFamily="34" charset="0"/>
+                <a:ea typeface="Arial" pitchFamily="34" charset="-122"/>
+                <a:cs typeface="Arial" pitchFamily="34" charset="-120"/>
+              </a:rPr>
+              <a:t>Sources: real (ATC-ASR-</a:t>
+            </a:r>
+            <a:endParaRPr lang="en-US" sz="1050" dirty="0"/>
+          </a:p>
+          <a:p>
+            <a:pPr marL="0" indent="0" algn="ctr">
+              <a:buNone/>
+            </a:pPr>
+            <a:r>
+              <a:rPr lang="en-US" sz="1050" dirty="0">
+                <a:solidFill>
+                  <a:srgbClr val="6B7A86"/>
+                </a:solidFill>
+                <a:latin typeface="Arial" pitchFamily="34" charset="0"/>
+                <a:ea typeface="Arial" pitchFamily="34" charset="-122"/>
+                <a:cs typeface="Arial" pitchFamily="34" charset="-120"/>
+              </a:rPr>
+              <a:t>Dataset) + simulated (ATCOSIM)</a:t>
+            </a:r>
+            <a:endParaRPr lang="en-US" sz="1050" dirty="0"/>
+          </a:p>
+        </p:txBody>
+      </p:sp>
+      <p:sp>
+        <p:nvSpPr>
+          <p:cNvPr id="18" name="Shape 13"/>
+          <p:cNvSpPr/>
+          <p:nvPr/>
+        </p:nvSpPr>
+        <p:spPr>
+          <a:xfrm>
+            <a:off x="6766560" y="1371600"/>
+            <a:ext cx="1920240" cy="2331720"/>
+          </a:xfrm>
+          <a:prstGeom prst="roundRect">
+            <a:avLst>
+              <a:gd name="adj" fmla="val 4762"/>
+            </a:avLst>
+          </a:prstGeom>
+          <a:solidFill>
+            <a:srgbClr val="F3F8FC"/>
+          </a:solidFill>
+          <a:ln/>
+          <a:effectLst>
+            <a:outerShdw blurRad="76200" dist="25400" dir="5400000" algn="bl" rotWithShape="0">
+              <a:srgbClr val="1B2733">
+                <a:alpha val="12000"/>
+              </a:srgbClr>
+            </a:outerShdw>
+          </a:effectLst>
+        </p:spPr>
+        <p:txBody>
+          <a:bodyPr/>
+          <a:lstStyle/>
+          <a:p>
+            <a:endParaRPr lang="en-US"/>
+          </a:p>
+        </p:txBody>
+      </p:sp>
+      <p:sp>
+        <p:nvSpPr>
+          <p:cNvPr id="19" name="Shape 14"/>
+          <p:cNvSpPr/>
+          <p:nvPr/>
+        </p:nvSpPr>
+        <p:spPr>
+          <a:xfrm>
+            <a:off x="7415784" y="1609344"/>
+            <a:ext cx="621792" cy="621792"/>
+          </a:xfrm>
+          <a:prstGeom prst="ellipse">
+            <a:avLst/>
+          </a:prstGeom>
+          <a:solidFill>
+            <a:srgbClr val="0097A7"/>
+          </a:solidFill>
+          <a:ln/>
+        </p:spPr>
+        <p:txBody>
+          <a:bodyPr/>
+          <a:lstStyle/>
+          <a:p>
+            <a:endParaRPr lang="en-US"/>
+          </a:p>
+        </p:txBody>
+      </p:sp>
+      <p:pic>
+        <p:nvPicPr>
+          <p:cNvPr id="20" name="Image 3" descr="/tmp/claude-1000/-home-ballen-GitHub/10f2e268-ec1d-4d6f-8dc8-6cf2617b3162/scratchpad/pptx_work/icons/clipboard-check-white.png"/>
+          <p:cNvPicPr>
+            <a:picLocks noChangeAspect="1"/>
+          </p:cNvPicPr>
+          <p:nvPr/>
+        </p:nvPicPr>
+        <p:blipFill>
+          <a:blip r:embed="rId6"/>
+          <a:stretch>
+            <a:fillRect/>
+          </a:stretch>
+        </p:blipFill>
+        <p:spPr>
+          <a:xfrm>
             <a:off x="7552944" y="1746504"/>
             <a:ext cx="347472" cy="347472"/>
           </a:xfrm>
@@ -7239,7 +7331,7 @@
           <a:bodyPr wrap="square" lIns="0" tIns="0" rIns="0" bIns="0" rtlCol="0" anchor="ctr"/>
           <a:lstStyle/>
           <a:p>
-            <a:pPr algn="ctr" indent="0" marL="0">
+            <a:pPr marL="0" indent="0" algn="ctr">
               <a:buNone/>
             </a:pPr>
             <a:r>
@@ -7278,7 +7370,7 @@
           <a:bodyPr wrap="square" lIns="0" tIns="0" rIns="0" bIns="0" rtlCol="0" anchor="ctr"/>
           <a:lstStyle/>
           <a:p>
-            <a:pPr algn="ctr" indent="0" marL="0">
+            <a:pPr marL="0" indent="0" algn="ctr">
               <a:buNone/>
             </a:pPr>
             <a:r>
@@ -7295,7 +7387,7 @@
             <a:endParaRPr lang="en-US" sz="1050" dirty="0"/>
           </a:p>
           <a:p>
-            <a:pPr algn="ctr" indent="0" marL="0">
+            <a:pPr marL="0" indent="0" algn="ctr">
               <a:buNone/>
             </a:pPr>
             <a:r>
@@ -7334,7 +7426,7 @@
           <a:bodyPr wrap="square" lIns="0" tIns="0" rIns="0" bIns="0" rtlCol="0" anchor="ctr"/>
           <a:lstStyle/>
           <a:p>
-            <a:pPr algn="l" indent="0" marL="0">
+            <a:pPr marL="0" indent="0" algn="l">
               <a:buNone/>
             </a:pPr>
             <a:r>
@@ -7346,7 +7438,7 @@
                 <a:ea typeface="Arial" pitchFamily="34" charset="-122"/>
                 <a:cs typeface="Arial" pitchFamily="34" charset="-120"/>
               </a:rPr>
-              <a:t>Full ingestion → cleaning → feature-derivation pipeline is reusable (src/preprocessing/) and already exposed as a standalone CLI script (see slide 07).</a:t>
+              <a:t>Full ingestion → cleaning → feature-derivation pipeline is reusable (src/preprocessing/) and exposed as a standalone CLI script.</a:t>
             </a:r>
             <a:endParaRPr lang="en-US" sz="1150" dirty="0"/>
           </a:p>
@@ -7373,7 +7465,7 @@
           <a:bodyPr wrap="square" lIns="0" tIns="0" rIns="0" bIns="0" rtlCol="0" anchor="ctr"/>
           <a:lstStyle/>
           <a:p>
-            <a:pPr algn="l" indent="0" marL="0">
+            <a:pPr marL="0" indent="0" algn="l">
               <a:buNone/>
             </a:pPr>
             <a:r>
@@ -7412,7 +7504,7 @@
           <a:bodyPr wrap="square" lIns="0" tIns="0" rIns="0" bIns="0" rtlCol="0" anchor="ctr"/>
           <a:lstStyle/>
           <a:p>
-            <a:pPr algn="r" indent="0" marL="0">
+            <a:pPr marL="0" indent="0" algn="r">
               <a:buNone/>
             </a:pPr>
             <a:r>
@@ -7446,6 +7538,7 @@
         <a:solidFill>
           <a:srgbClr val="FFFFFF"/>
         </a:solidFill>
+        <a:effectLst/>
       </p:bgPr>
     </p:bg>
     <p:spTree>
@@ -7483,7 +7576,7 @@
           <a:bodyPr wrap="square" lIns="0" tIns="0" rIns="0" bIns="0" rtlCol="0" anchor="ctr"/>
           <a:lstStyle/>
           <a:p>
-            <a:pPr algn="l" indent="0" marL="0">
+            <a:pPr marL="0" indent="0" algn="l">
               <a:buNone/>
             </a:pPr>
             <a:r>
@@ -7503,14 +7596,14 @@
       </p:sp>
       <p:pic>
         <p:nvPicPr>
-          <p:cNvPr id="3" name="Image 0" descr="/home/ballen/GitHub/UMBC-DATA606-Capstone/res/figures/acoustic_features_by_source.png">    </p:cNvPr>
+          <p:cNvPr id="3" name="Image 0" descr="/home/ballen/GitHub/UMBC-DATA606-Capstone/res/figures/acoustic_features_by_source.png"/>
           <p:cNvPicPr>
             <a:picLocks noChangeAspect="1"/>
           </p:cNvPicPr>
           <p:nvPr/>
         </p:nvPicPr>
         <p:blipFill>
-          <a:blip r:embed="rId1"/>
+          <a:blip r:embed="rId3"/>
           <a:stretch>
             <a:fillRect/>
           </a:stretch>
@@ -7546,7 +7639,7 @@
           <a:bodyPr wrap="square" lIns="0" tIns="0" rIns="0" bIns="0" rtlCol="0" anchor="ctr"/>
           <a:lstStyle/>
           <a:p>
-            <a:pPr algn="l" indent="0" marL="0">
+            <a:pPr marL="0" indent="0" algn="l">
               <a:buNone/>
             </a:pPr>
             <a:r>
@@ -7558,7 +7651,7 @@
                 <a:ea typeface="Arial" pitchFamily="34" charset="-122"/>
                 <a:cs typeface="Arial" pitchFamily="34" charset="-120"/>
               </a:rPr>
-              <a:t>Real ATC audio is measurably narrower-band than simulated audio, the acoustic fingerprint of a VHF radio channel and a domain gap any model must account for.</a:t>
+              <a:t>Real ATC audio is measurably narrower-band than simulated audio, indicating acoustics of a VHF radio channel which is a domain gap the ASR model must account for.</a:t>
             </a:r>
             <a:endParaRPr lang="en-US" sz="1150" dirty="0"/>
           </a:p>
@@ -7585,7 +7678,7 @@
           <a:bodyPr wrap="square" lIns="0" tIns="0" rIns="0" bIns="0" rtlCol="0" anchor="ctr"/>
           <a:lstStyle/>
           <a:p>
-            <a:pPr algn="l" indent="0" marL="0">
+            <a:pPr marL="0" indent="0" algn="l">
               <a:buNone/>
             </a:pPr>
             <a:r>
@@ -7624,7 +7717,7 @@
           <a:bodyPr wrap="square" lIns="0" tIns="0" rIns="0" bIns="0" rtlCol="0" anchor="ctr"/>
           <a:lstStyle/>
           <a:p>
-            <a:pPr algn="r" indent="0" marL="0">
+            <a:pPr marL="0" indent="0" algn="r">
               <a:buNone/>
             </a:pPr>
             <a:r>
@@ -7658,6 +7751,7 @@
         <a:solidFill>
           <a:srgbClr val="FFFFFF"/>
         </a:solidFill>
+        <a:effectLst/>
       </p:bgPr>
     </p:bg>
     <p:spTree>
@@ -7695,7 +7789,7 @@
           <a:bodyPr wrap="square" lIns="0" tIns="0" rIns="0" bIns="0" rtlCol="0" anchor="ctr"/>
           <a:lstStyle/>
           <a:p>
-            <a:pPr algn="l" indent="0" marL="0">
+            <a:pPr marL="0" indent="0" algn="l">
               <a:buNone/>
             </a:pPr>
             <a:r>
@@ -7715,14 +7809,14 @@
       </p:sp>
       <p:pic>
         <p:nvPicPr>
-          <p:cNvPr id="3" name="Image 0" descr="/home/ballen/GitHub/UMBC-DATA606-Capstone/res/figures/wordcloud_by_source.png">    </p:cNvPr>
+          <p:cNvPr id="3" name="Image 0" descr="/home/ballen/GitHub/UMBC-DATA606-Capstone/res/figures/wordcloud_by_source.png"/>
           <p:cNvPicPr>
             <a:picLocks noChangeAspect="1"/>
           </p:cNvPicPr>
           <p:nvPr/>
         </p:nvPicPr>
         <p:blipFill>
-          <a:blip r:embed="rId1"/>
+          <a:blip r:embed="rId3"/>
           <a:stretch>
             <a:fillRect/>
           </a:stretch>
@@ -7758,7 +7852,7 @@
           <a:bodyPr wrap="square" lIns="0" tIns="0" rIns="0" bIns="0" rtlCol="0" anchor="ctr"/>
           <a:lstStyle/>
           <a:p>
-            <a:pPr algn="l" indent="0" marL="0">
+            <a:pPr marL="0" indent="0" algn="l">
               <a:buNone/>
             </a:pPr>
             <a:r>
@@ -7797,7 +7891,7 @@
           <a:bodyPr wrap="square" lIns="0" tIns="0" rIns="0" bIns="0" rtlCol="0" anchor="ctr"/>
           <a:lstStyle/>
           <a:p>
-            <a:pPr algn="l" indent="0" marL="0">
+            <a:pPr marL="0" indent="0" algn="l">
               <a:buNone/>
             </a:pPr>
             <a:r>
@@ -7836,7 +7930,7 @@
           <a:bodyPr wrap="square" lIns="0" tIns="0" rIns="0" bIns="0" rtlCol="0" anchor="ctr"/>
           <a:lstStyle/>
           <a:p>
-            <a:pPr algn="r" indent="0" marL="0">
+            <a:pPr marL="0" indent="0" algn="r">
               <a:buNone/>
             </a:pPr>
             <a:r>
@@ -7870,6 +7964,7 @@
         <a:solidFill>
           <a:srgbClr val="FFFFFF"/>
         </a:solidFill>
+        <a:effectLst/>
       </p:bgPr>
     </p:bg>
     <p:spTree>
@@ -7907,7 +8002,7 @@
           <a:bodyPr wrap="square" lIns="0" tIns="0" rIns="0" bIns="0" rtlCol="0" anchor="ctr"/>
           <a:lstStyle/>
           <a:p>
-            <a:pPr algn="l" indent="0" marL="0">
+            <a:pPr marL="0" indent="0" algn="l">
               <a:buNone/>
             </a:pPr>
             <a:r>
@@ -7946,7 +8041,7 @@
           <a:bodyPr wrap="square" lIns="0" tIns="0" rIns="0" bIns="0" rtlCol="0" anchor="ctr"/>
           <a:lstStyle/>
           <a:p>
-            <a:pPr algn="l" indent="0" marL="0">
+            <a:pPr marL="0" indent="0" algn="l">
               <a:buNone/>
             </a:pPr>
             <a:r>
@@ -7985,13 +8080,20 @@
           </a:solidFill>
           <a:ln/>
           <a:effectLst>
-            <a:outerShdw sx="100000" sy="100000" kx="0" ky="0" algn="bl" rotWithShape="0" blurRad="63500" dist="25400" dir="5400000">
+            <a:outerShdw blurRad="63500" dist="25400" dir="5400000" algn="bl" rotWithShape="0">
               <a:srgbClr val="1B2733">
                 <a:alpha val="10000"/>
               </a:srgbClr>
             </a:outerShdw>
           </a:effectLst>
         </p:spPr>
+        <p:txBody>
+          <a:bodyPr/>
+          <a:lstStyle/>
+          <a:p>
+            <a:endParaRPr lang="en-US"/>
+          </a:p>
+        </p:txBody>
       </p:sp>
       <p:sp>
         <p:nvSpPr>
@@ -8012,434 +8114,17 @@
           </a:solidFill>
           <a:ln/>
         </p:spPr>
+        <p:txBody>
+          <a:bodyPr/>
+          <a:lstStyle/>
+          <a:p>
+            <a:endParaRPr lang="en-US"/>
+          </a:p>
+        </p:txBody>
       </p:sp>
       <p:pic>
         <p:nvPicPr>
-          <p:cNvPr id="6" name="Image 0" descr="/tmp/claude-1000/-home-ballen-GitHub/10f2e268-ec1d-4d6f-8dc8-6cf2617b3162/scratchpad/pptx_work/icons/code-white.png">    </p:cNvPr>
-          <p:cNvPicPr>
-            <a:picLocks noChangeAspect="1"/>
-          </p:cNvPicPr>
-          <p:nvPr/>
-        </p:nvPicPr>
-        <p:blipFill>
-          <a:blip r:embed="rId1"/>
-          <a:stretch>
-            <a:fillRect/>
-          </a:stretch>
-        </p:blipFill>
-        <p:spPr>
-          <a:xfrm>
-            <a:off x="795528" y="1828800"/>
-            <a:ext cx="274320" cy="274320"/>
-          </a:xfrm>
-          <a:prstGeom prst="rect">
-            <a:avLst/>
-          </a:prstGeom>
-        </p:spPr>
-      </p:pic>
-      <p:sp>
-        <p:nvSpPr>
-          <p:cNvPr id="7" name="Text 4"/>
-          <p:cNvSpPr txBox="1"/>
-          <p:nvPr/>
-        </p:nvSpPr>
-        <p:spPr>
-          <a:xfrm>
-            <a:off x="1371600" y="1600200"/>
-            <a:ext cx="4206240" cy="365760"/>
-          </a:xfrm>
-          <a:prstGeom prst="rect">
-            <a:avLst/>
-          </a:prstGeom>
-          <a:noFill/>
-          <a:ln/>
-        </p:spPr>
-        <p:txBody>
-          <a:bodyPr wrap="square" lIns="0" tIns="0" rIns="0" bIns="0" rtlCol="0" anchor="ctr"/>
-          <a:lstStyle/>
-          <a:p>
-            <a:pPr algn="l" indent="0" marL="0">
-              <a:buNone/>
-            </a:pPr>
-            <a:r>
-              <a:rPr lang="en-US" sz="1400" b="1" dirty="0">
-                <a:solidFill>
-                  <a:srgbClr val="384957"/>
-                </a:solidFill>
-                <a:latin typeface="Courier New" pitchFamily="34" charset="0"/>
-                <a:ea typeface="Courier New" pitchFamily="34" charset="-122"/>
-                <a:cs typeface="Courier New" pitchFamily="34" charset="-120"/>
-              </a:rPr>
-              <a:t>scripts/run_ingest.py</a:t>
-            </a:r>
-            <a:endParaRPr lang="en-US" sz="1400" dirty="0"/>
-          </a:p>
-        </p:txBody>
-      </p:sp>
-      <p:sp>
-        <p:nvSpPr>
-          <p:cNvPr id="8" name="Text 5"/>
-          <p:cNvSpPr txBox="1"/>
-          <p:nvPr/>
-        </p:nvSpPr>
-        <p:spPr>
-          <a:xfrm>
-            <a:off x="1371600" y="1947672"/>
-            <a:ext cx="4846320" cy="411480"/>
-          </a:xfrm>
-          <a:prstGeom prst="rect">
-            <a:avLst/>
-          </a:prstGeom>
-          <a:noFill/>
-          <a:ln/>
-        </p:spPr>
-        <p:txBody>
-          <a:bodyPr wrap="square" lIns="0" tIns="0" rIns="0" bIns="0" rtlCol="0" anchor="ctr"/>
-          <a:lstStyle/>
-          <a:p>
-            <a:pPr algn="l" indent="0" marL="0">
-              <a:buNone/>
-            </a:pPr>
-            <a:r>
-              <a:rPr lang="en-US" sz="1050" dirty="0">
-                <a:solidFill>
-                  <a:srgbClr val="6B7A86"/>
-                </a:solidFill>
-                <a:latin typeface="Arial" pitchFamily="34" charset="0"/>
-                <a:ea typeface="Arial" pitchFamily="34" charset="-122"/>
-                <a:cs typeface="Arial" pitchFamily="34" charset="-120"/>
-              </a:rPr>
-              <a:t>Standalone CLI for data curation/ingest, with no notebook memory overhead</a:t>
-            </a:r>
-            <a:endParaRPr lang="en-US" sz="1050" dirty="0"/>
-          </a:p>
-        </p:txBody>
-      </p:sp>
-      <p:sp>
-        <p:nvSpPr>
-          <p:cNvPr id="9" name="Shape 6"/>
-          <p:cNvSpPr/>
-          <p:nvPr/>
-        </p:nvSpPr>
-        <p:spPr>
-          <a:xfrm>
-            <a:off x="7086600" y="1764792"/>
-            <a:ext cx="1417320" cy="402336"/>
-          </a:xfrm>
-          <a:prstGeom prst="roundRect">
-            <a:avLst>
-              <a:gd name="adj" fmla="val 50000"/>
-            </a:avLst>
-          </a:prstGeom>
-          <a:solidFill>
-            <a:srgbClr val="0097A7"/>
-          </a:solidFill>
-          <a:ln/>
-        </p:spPr>
-      </p:sp>
-      <p:sp>
-        <p:nvSpPr>
-          <p:cNvPr id="10" name="Text 7"/>
-          <p:cNvSpPr txBox="1"/>
-          <p:nvPr/>
-        </p:nvSpPr>
-        <p:spPr>
-          <a:xfrm>
-            <a:off x="7086600" y="1764792"/>
-            <a:ext cx="1417320" cy="402336"/>
-          </a:xfrm>
-          <a:prstGeom prst="rect">
-            <a:avLst/>
-          </a:prstGeom>
-          <a:noFill/>
-          <a:ln/>
-        </p:spPr>
-        <p:txBody>
-          <a:bodyPr wrap="square" lIns="0" tIns="0" rIns="0" bIns="0" rtlCol="0" anchor="ctr"/>
-          <a:lstStyle/>
-          <a:p>
-            <a:pPr algn="ctr" indent="0" marL="0">
-              <a:buNone/>
-            </a:pPr>
-            <a:r>
-              <a:rPr lang="en-US" sz="1000" b="1" dirty="0">
-                <a:solidFill>
-                  <a:srgbClr val="FFFFFF"/>
-                </a:solidFill>
-                <a:latin typeface="Arial" pitchFamily="34" charset="0"/>
-                <a:ea typeface="Arial" pitchFamily="34" charset="-122"/>
-                <a:cs typeface="Arial" pitchFamily="34" charset="-120"/>
-              </a:rPr>
-              <a:t>DONE</a:t>
-            </a:r>
-            <a:endParaRPr lang="en-US" sz="1000" dirty="0"/>
-          </a:p>
-        </p:txBody>
-      </p:sp>
-      <p:sp>
-        <p:nvSpPr>
-          <p:cNvPr id="11" name="Shape 8"/>
-          <p:cNvSpPr/>
-          <p:nvPr/>
-        </p:nvSpPr>
-        <p:spPr>
-          <a:xfrm>
-            <a:off x="457200" y="2624328"/>
-            <a:ext cx="8229600" cy="914400"/>
-          </a:xfrm>
-          <a:prstGeom prst="roundRect">
-            <a:avLst>
-              <a:gd name="adj" fmla="val 8000"/>
-            </a:avLst>
-          </a:prstGeom>
-          <a:solidFill>
-            <a:srgbClr val="F3F8FC"/>
-          </a:solidFill>
-          <a:ln/>
-          <a:effectLst>
-            <a:outerShdw sx="100000" sy="100000" kx="0" ky="0" algn="bl" rotWithShape="0" blurRad="63500" dist="25400" dir="5400000">
-              <a:srgbClr val="1B2733">
-                <a:alpha val="10000"/>
-              </a:srgbClr>
-            </a:outerShdw>
-          </a:effectLst>
-        </p:spPr>
-      </p:sp>
-      <p:sp>
-        <p:nvSpPr>
-          <p:cNvPr id="12" name="Shape 9"/>
-          <p:cNvSpPr/>
-          <p:nvPr/>
-        </p:nvSpPr>
-        <p:spPr>
-          <a:xfrm>
-            <a:off x="658368" y="2807208"/>
-            <a:ext cx="548640" cy="548640"/>
-          </a:xfrm>
-          <a:prstGeom prst="ellipse">
-            <a:avLst/>
-          </a:prstGeom>
-          <a:solidFill>
-            <a:srgbClr val="384957"/>
-          </a:solidFill>
-          <a:ln/>
-        </p:spPr>
-      </p:sp>
-      <p:pic>
-        <p:nvPicPr>
-          <p:cNvPr id="13" name="Image 1" descr="/tmp/claude-1000/-home-ballen-GitHub/10f2e268-ec1d-4d6f-8dc8-6cf2617b3162/scratchpad/pptx_work/icons/database-white.png">    </p:cNvPr>
-          <p:cNvPicPr>
-            <a:picLocks noChangeAspect="1"/>
-          </p:cNvPicPr>
-          <p:nvPr/>
-        </p:nvPicPr>
-        <p:blipFill>
-          <a:blip r:embed="rId2"/>
-          <a:stretch>
-            <a:fillRect/>
-          </a:stretch>
-        </p:blipFill>
-        <p:spPr>
-          <a:xfrm>
-            <a:off x="795528" y="2944368"/>
-            <a:ext cx="274320" cy="274320"/>
-          </a:xfrm>
-          <a:prstGeom prst="rect">
-            <a:avLst/>
-          </a:prstGeom>
-        </p:spPr>
-      </p:pic>
-      <p:sp>
-        <p:nvSpPr>
-          <p:cNvPr id="14" name="Text 10"/>
-          <p:cNvSpPr txBox="1"/>
-          <p:nvPr/>
-        </p:nvSpPr>
-        <p:spPr>
-          <a:xfrm>
-            <a:off x="1371600" y="2715768"/>
-            <a:ext cx="4206240" cy="365760"/>
-          </a:xfrm>
-          <a:prstGeom prst="rect">
-            <a:avLst/>
-          </a:prstGeom>
-          <a:noFill/>
-          <a:ln/>
-        </p:spPr>
-        <p:txBody>
-          <a:bodyPr wrap="square" lIns="0" tIns="0" rIns="0" bIns="0" rtlCol="0" anchor="ctr"/>
-          <a:lstStyle/>
-          <a:p>
-            <a:pPr algn="l" indent="0" marL="0">
-              <a:buNone/>
-            </a:pPr>
-            <a:r>
-              <a:rPr lang="en-US" sz="1400" b="1" dirty="0">
-                <a:solidFill>
-                  <a:srgbClr val="384957"/>
-                </a:solidFill>
-                <a:latin typeface="Courier New" pitchFamily="34" charset="0"/>
-                <a:ea typeface="Courier New" pitchFamily="34" charset="-122"/>
-                <a:cs typeface="Courier New" pitchFamily="34" charset="-120"/>
-              </a:rPr>
-              <a:t>--purge-raw flag</a:t>
-            </a:r>
-            <a:endParaRPr lang="en-US" sz="1400" dirty="0"/>
-          </a:p>
-        </p:txBody>
-      </p:sp>
-      <p:sp>
-        <p:nvSpPr>
-          <p:cNvPr id="15" name="Text 11"/>
-          <p:cNvSpPr txBox="1"/>
-          <p:nvPr/>
-        </p:nvSpPr>
-        <p:spPr>
-          <a:xfrm>
-            <a:off x="1371600" y="3063240"/>
-            <a:ext cx="4846320" cy="411480"/>
-          </a:xfrm>
-          <a:prstGeom prst="rect">
-            <a:avLst/>
-          </a:prstGeom>
-          <a:noFill/>
-          <a:ln/>
-        </p:spPr>
-        <p:txBody>
-          <a:bodyPr wrap="square" lIns="0" tIns="0" rIns="0" bIns="0" rtlCol="0" anchor="ctr"/>
-          <a:lstStyle/>
-          <a:p>
-            <a:pPr algn="l" indent="0" marL="0">
-              <a:buNone/>
-            </a:pPr>
-            <a:r>
-              <a:rPr lang="en-US" sz="1050" dirty="0">
-                <a:solidFill>
-                  <a:srgbClr val="6B7A86"/>
-                </a:solidFill>
-                <a:latin typeface="Arial" pitchFamily="34" charset="0"/>
-                <a:ea typeface="Arial" pitchFamily="34" charset="-122"/>
-                <a:cs typeface="Arial" pitchFamily="34" charset="-120"/>
-              </a:rPr>
-              <a:t>Optional post-process purge of large raw downloads to reclaim disk space</a:t>
-            </a:r>
-            <a:endParaRPr lang="en-US" sz="1050" dirty="0"/>
-          </a:p>
-        </p:txBody>
-      </p:sp>
-      <p:sp>
-        <p:nvSpPr>
-          <p:cNvPr id="16" name="Shape 12"/>
-          <p:cNvSpPr/>
-          <p:nvPr/>
-        </p:nvSpPr>
-        <p:spPr>
-          <a:xfrm>
-            <a:off x="7086600" y="2880360"/>
-            <a:ext cx="1417320" cy="402336"/>
-          </a:xfrm>
-          <a:prstGeom prst="roundRect">
-            <a:avLst>
-              <a:gd name="adj" fmla="val 50000"/>
-            </a:avLst>
-          </a:prstGeom>
-          <a:solidFill>
-            <a:srgbClr val="0097A7"/>
-          </a:solidFill>
-          <a:ln/>
-        </p:spPr>
-      </p:sp>
-      <p:sp>
-        <p:nvSpPr>
-          <p:cNvPr id="17" name="Text 13"/>
-          <p:cNvSpPr txBox="1"/>
-          <p:nvPr/>
-        </p:nvSpPr>
-        <p:spPr>
-          <a:xfrm>
-            <a:off x="7086600" y="2880360"/>
-            <a:ext cx="1417320" cy="402336"/>
-          </a:xfrm>
-          <a:prstGeom prst="rect">
-            <a:avLst/>
-          </a:prstGeom>
-          <a:noFill/>
-          <a:ln/>
-        </p:spPr>
-        <p:txBody>
-          <a:bodyPr wrap="square" lIns="0" tIns="0" rIns="0" bIns="0" rtlCol="0" anchor="ctr"/>
-          <a:lstStyle/>
-          <a:p>
-            <a:pPr algn="ctr" indent="0" marL="0">
-              <a:buNone/>
-            </a:pPr>
-            <a:r>
-              <a:rPr lang="en-US" sz="1000" b="1" dirty="0">
-                <a:solidFill>
-                  <a:srgbClr val="FFFFFF"/>
-                </a:solidFill>
-                <a:latin typeface="Arial" pitchFamily="34" charset="0"/>
-                <a:ea typeface="Arial" pitchFamily="34" charset="-122"/>
-                <a:cs typeface="Arial" pitchFamily="34" charset="-120"/>
-              </a:rPr>
-              <a:t>DONE</a:t>
-            </a:r>
-            <a:endParaRPr lang="en-US" sz="1000" dirty="0"/>
-          </a:p>
-        </p:txBody>
-      </p:sp>
-      <p:sp>
-        <p:nvSpPr>
-          <p:cNvPr id="18" name="Shape 14"/>
-          <p:cNvSpPr/>
-          <p:nvPr/>
-        </p:nvSpPr>
-        <p:spPr>
-          <a:xfrm>
-            <a:off x="457200" y="3739896"/>
-            <a:ext cx="8229600" cy="914400"/>
-          </a:xfrm>
-          <a:prstGeom prst="roundRect">
-            <a:avLst>
-              <a:gd name="adj" fmla="val 8000"/>
-            </a:avLst>
-          </a:prstGeom>
-          <a:solidFill>
-            <a:srgbClr val="F3F8FC"/>
-          </a:solidFill>
-          <a:ln/>
-          <a:effectLst>
-            <a:outerShdw sx="100000" sy="100000" kx="0" ky="0" algn="bl" rotWithShape="0" blurRad="63500" dist="25400" dir="5400000">
-              <a:srgbClr val="1B2733">
-                <a:alpha val="10000"/>
-              </a:srgbClr>
-            </a:outerShdw>
-          </a:effectLst>
-        </p:spPr>
-      </p:sp>
-      <p:sp>
-        <p:nvSpPr>
-          <p:cNvPr id="19" name="Shape 15"/>
-          <p:cNvSpPr/>
-          <p:nvPr/>
-        </p:nvSpPr>
-        <p:spPr>
-          <a:xfrm>
-            <a:off x="658368" y="3922776"/>
-            <a:ext cx="548640" cy="548640"/>
-          </a:xfrm>
-          <a:prstGeom prst="ellipse">
-            <a:avLst/>
-          </a:prstGeom>
-          <a:solidFill>
-            <a:srgbClr val="384957"/>
-          </a:solidFill>
-          <a:ln/>
-        </p:spPr>
-      </p:sp>
-      <p:pic>
-        <p:nvPicPr>
-          <p:cNvPr id="20" name="Image 2" descr="/tmp/claude-1000/-home-ballen-GitHub/10f2e268-ec1d-4d6f-8dc8-6cf2617b3162/scratchpad/pptx_work/icons/route-white.png">    </p:cNvPr>
+          <p:cNvPr id="6" name="Image 0" descr="/tmp/claude-1000/-home-ballen-GitHub/10f2e268-ec1d-4d6f-8dc8-6cf2617b3162/scratchpad/pptx_work/icons/code-white.png"/>
           <p:cNvPicPr>
             <a:picLocks noChangeAspect="1"/>
           </p:cNvPicPr>
@@ -8453,7 +8138,7 @@
         </p:blipFill>
         <p:spPr>
           <a:xfrm>
-            <a:off x="795528" y="4059936"/>
+            <a:off x="795528" y="1828800"/>
             <a:ext cx="274320" cy="274320"/>
           </a:xfrm>
           <a:prstGeom prst="rect">
@@ -8463,13 +8148,13 @@
       </p:pic>
       <p:sp>
         <p:nvSpPr>
-          <p:cNvPr id="21" name="Text 16"/>
-          <p:cNvSpPr txBox="1"/>
-          <p:nvPr/>
-        </p:nvSpPr>
-        <p:spPr>
-          <a:xfrm>
-            <a:off x="1371600" y="3831336"/>
+          <p:cNvPr id="7" name="Text 4"/>
+          <p:cNvSpPr txBox="1"/>
+          <p:nvPr/>
+        </p:nvSpPr>
+        <p:spPr>
+          <a:xfrm>
+            <a:off x="1371600" y="1600200"/>
             <a:ext cx="4206240" cy="365760"/>
           </a:xfrm>
           <a:prstGeom prst="rect">
@@ -8482,7 +8167,7 @@
           <a:bodyPr wrap="square" lIns="0" tIns="0" rIns="0" bIns="0" rtlCol="0" anchor="ctr"/>
           <a:lstStyle/>
           <a:p>
-            <a:pPr algn="l" indent="0" marL="0">
+            <a:pPr marL="0" indent="0" algn="l">
               <a:buNone/>
             </a:pPr>
             <a:r>
@@ -8494,6 +8179,336 @@
                 <a:ea typeface="Courier New" pitchFamily="34" charset="-122"/>
                 <a:cs typeface="Courier New" pitchFamily="34" charset="-120"/>
               </a:rPr>
+              <a:t>scripts/run_ingest.py</a:t>
+            </a:r>
+            <a:endParaRPr lang="en-US" sz="1400" dirty="0"/>
+          </a:p>
+        </p:txBody>
+      </p:sp>
+      <p:sp>
+        <p:nvSpPr>
+          <p:cNvPr id="8" name="Text 5"/>
+          <p:cNvSpPr txBox="1"/>
+          <p:nvPr/>
+        </p:nvSpPr>
+        <p:spPr>
+          <a:xfrm>
+            <a:off x="1371600" y="1947672"/>
+            <a:ext cx="4846320" cy="411480"/>
+          </a:xfrm>
+          <a:prstGeom prst="rect">
+            <a:avLst/>
+          </a:prstGeom>
+          <a:noFill/>
+          <a:ln/>
+        </p:spPr>
+        <p:txBody>
+          <a:bodyPr wrap="square" lIns="0" tIns="0" rIns="0" bIns="0" rtlCol="0" anchor="ctr"/>
+          <a:lstStyle/>
+          <a:p>
+            <a:pPr marL="0" indent="0" algn="l">
+              <a:buNone/>
+            </a:pPr>
+            <a:r>
+              <a:rPr lang="en-US" sz="1050" dirty="0">
+                <a:solidFill>
+                  <a:srgbClr val="6B7A86"/>
+                </a:solidFill>
+                <a:latin typeface="Arial" pitchFamily="34" charset="0"/>
+                <a:ea typeface="Arial" pitchFamily="34" charset="-122"/>
+                <a:cs typeface="Arial" pitchFamily="34" charset="-120"/>
+              </a:rPr>
+              <a:t>Standalone CLI for data curation/ingest, with no notebook memory overhead</a:t>
+            </a:r>
+            <a:endParaRPr lang="en-US" sz="1050" dirty="0"/>
+          </a:p>
+        </p:txBody>
+      </p:sp>
+      <p:sp>
+        <p:nvSpPr>
+          <p:cNvPr id="11" name="Shape 8"/>
+          <p:cNvSpPr/>
+          <p:nvPr/>
+        </p:nvSpPr>
+        <p:spPr>
+          <a:xfrm>
+            <a:off x="457200" y="2624328"/>
+            <a:ext cx="8229600" cy="914400"/>
+          </a:xfrm>
+          <a:prstGeom prst="roundRect">
+            <a:avLst>
+              <a:gd name="adj" fmla="val 8000"/>
+            </a:avLst>
+          </a:prstGeom>
+          <a:solidFill>
+            <a:srgbClr val="F3F8FC"/>
+          </a:solidFill>
+          <a:ln/>
+          <a:effectLst>
+            <a:outerShdw blurRad="63500" dist="25400" dir="5400000" algn="bl" rotWithShape="0">
+              <a:srgbClr val="1B2733">
+                <a:alpha val="10000"/>
+              </a:srgbClr>
+            </a:outerShdw>
+          </a:effectLst>
+        </p:spPr>
+        <p:txBody>
+          <a:bodyPr/>
+          <a:lstStyle/>
+          <a:p>
+            <a:endParaRPr lang="en-US"/>
+          </a:p>
+        </p:txBody>
+      </p:sp>
+      <p:sp>
+        <p:nvSpPr>
+          <p:cNvPr id="12" name="Shape 9"/>
+          <p:cNvSpPr/>
+          <p:nvPr/>
+        </p:nvSpPr>
+        <p:spPr>
+          <a:xfrm>
+            <a:off x="658368" y="2807208"/>
+            <a:ext cx="548640" cy="548640"/>
+          </a:xfrm>
+          <a:prstGeom prst="ellipse">
+            <a:avLst/>
+          </a:prstGeom>
+          <a:solidFill>
+            <a:srgbClr val="384957"/>
+          </a:solidFill>
+          <a:ln/>
+        </p:spPr>
+        <p:txBody>
+          <a:bodyPr/>
+          <a:lstStyle/>
+          <a:p>
+            <a:endParaRPr lang="en-US"/>
+          </a:p>
+        </p:txBody>
+      </p:sp>
+      <p:pic>
+        <p:nvPicPr>
+          <p:cNvPr id="13" name="Image 1" descr="/tmp/claude-1000/-home-ballen-GitHub/10f2e268-ec1d-4d6f-8dc8-6cf2617b3162/scratchpad/pptx_work/icons/database-white.png"/>
+          <p:cNvPicPr>
+            <a:picLocks noChangeAspect="1"/>
+          </p:cNvPicPr>
+          <p:nvPr/>
+        </p:nvPicPr>
+        <p:blipFill>
+          <a:blip r:embed="rId4"/>
+          <a:stretch>
+            <a:fillRect/>
+          </a:stretch>
+        </p:blipFill>
+        <p:spPr>
+          <a:xfrm>
+            <a:off x="795528" y="2944368"/>
+            <a:ext cx="274320" cy="274320"/>
+          </a:xfrm>
+          <a:prstGeom prst="rect">
+            <a:avLst/>
+          </a:prstGeom>
+        </p:spPr>
+      </p:pic>
+      <p:sp>
+        <p:nvSpPr>
+          <p:cNvPr id="14" name="Text 10"/>
+          <p:cNvSpPr txBox="1"/>
+          <p:nvPr/>
+        </p:nvSpPr>
+        <p:spPr>
+          <a:xfrm>
+            <a:off x="1371600" y="2715768"/>
+            <a:ext cx="4206240" cy="365760"/>
+          </a:xfrm>
+          <a:prstGeom prst="rect">
+            <a:avLst/>
+          </a:prstGeom>
+          <a:noFill/>
+          <a:ln/>
+        </p:spPr>
+        <p:txBody>
+          <a:bodyPr wrap="square" lIns="0" tIns="0" rIns="0" bIns="0" rtlCol="0" anchor="ctr"/>
+          <a:lstStyle/>
+          <a:p>
+            <a:pPr marL="0" indent="0" algn="l">
+              <a:buNone/>
+            </a:pPr>
+            <a:r>
+              <a:rPr lang="en-US" sz="1400" b="1" dirty="0">
+                <a:solidFill>
+                  <a:srgbClr val="384957"/>
+                </a:solidFill>
+                <a:latin typeface="Courier New" pitchFamily="34" charset="0"/>
+                <a:ea typeface="Courier New" pitchFamily="34" charset="-122"/>
+                <a:cs typeface="Courier New" pitchFamily="34" charset="-120"/>
+              </a:rPr>
+              <a:t>--purge-raw flag</a:t>
+            </a:r>
+            <a:endParaRPr lang="en-US" sz="1400" dirty="0"/>
+          </a:p>
+        </p:txBody>
+      </p:sp>
+      <p:sp>
+        <p:nvSpPr>
+          <p:cNvPr id="15" name="Text 11"/>
+          <p:cNvSpPr txBox="1"/>
+          <p:nvPr/>
+        </p:nvSpPr>
+        <p:spPr>
+          <a:xfrm>
+            <a:off x="1371600" y="3063240"/>
+            <a:ext cx="4846320" cy="411480"/>
+          </a:xfrm>
+          <a:prstGeom prst="rect">
+            <a:avLst/>
+          </a:prstGeom>
+          <a:noFill/>
+          <a:ln/>
+        </p:spPr>
+        <p:txBody>
+          <a:bodyPr wrap="square" lIns="0" tIns="0" rIns="0" bIns="0" rtlCol="0" anchor="ctr"/>
+          <a:lstStyle/>
+          <a:p>
+            <a:pPr marL="0" indent="0" algn="l">
+              <a:buNone/>
+            </a:pPr>
+            <a:r>
+              <a:rPr lang="en-US" sz="1050" dirty="0">
+                <a:solidFill>
+                  <a:srgbClr val="6B7A86"/>
+                </a:solidFill>
+                <a:latin typeface="Arial" pitchFamily="34" charset="0"/>
+                <a:ea typeface="Arial" pitchFamily="34" charset="-122"/>
+                <a:cs typeface="Arial" pitchFamily="34" charset="-120"/>
+              </a:rPr>
+              <a:t>Optional post-process purge of large raw downloads to reclaim disk space</a:t>
+            </a:r>
+            <a:endParaRPr lang="en-US" sz="1050" dirty="0"/>
+          </a:p>
+        </p:txBody>
+      </p:sp>
+      <p:sp>
+        <p:nvSpPr>
+          <p:cNvPr id="18" name="Shape 14"/>
+          <p:cNvSpPr/>
+          <p:nvPr/>
+        </p:nvSpPr>
+        <p:spPr>
+          <a:xfrm>
+            <a:off x="457200" y="3739896"/>
+            <a:ext cx="8229600" cy="914400"/>
+          </a:xfrm>
+          <a:prstGeom prst="roundRect">
+            <a:avLst>
+              <a:gd name="adj" fmla="val 8000"/>
+            </a:avLst>
+          </a:prstGeom>
+          <a:solidFill>
+            <a:srgbClr val="F3F8FC"/>
+          </a:solidFill>
+          <a:ln/>
+          <a:effectLst>
+            <a:outerShdw blurRad="63500" dist="25400" dir="5400000" algn="bl" rotWithShape="0">
+              <a:srgbClr val="1B2733">
+                <a:alpha val="10000"/>
+              </a:srgbClr>
+            </a:outerShdw>
+          </a:effectLst>
+        </p:spPr>
+        <p:txBody>
+          <a:bodyPr/>
+          <a:lstStyle/>
+          <a:p>
+            <a:endParaRPr lang="en-US"/>
+          </a:p>
+        </p:txBody>
+      </p:sp>
+      <p:sp>
+        <p:nvSpPr>
+          <p:cNvPr id="19" name="Shape 15"/>
+          <p:cNvSpPr/>
+          <p:nvPr/>
+        </p:nvSpPr>
+        <p:spPr>
+          <a:xfrm>
+            <a:off x="658368" y="3922776"/>
+            <a:ext cx="548640" cy="548640"/>
+          </a:xfrm>
+          <a:prstGeom prst="ellipse">
+            <a:avLst/>
+          </a:prstGeom>
+          <a:solidFill>
+            <a:srgbClr val="384957"/>
+          </a:solidFill>
+          <a:ln/>
+        </p:spPr>
+        <p:txBody>
+          <a:bodyPr/>
+          <a:lstStyle/>
+          <a:p>
+            <a:endParaRPr lang="en-US"/>
+          </a:p>
+        </p:txBody>
+      </p:sp>
+      <p:pic>
+        <p:nvPicPr>
+          <p:cNvPr id="20" name="Image 2" descr="/tmp/claude-1000/-home-ballen-GitHub/10f2e268-ec1d-4d6f-8dc8-6cf2617b3162/scratchpad/pptx_work/icons/route-white.png"/>
+          <p:cNvPicPr>
+            <a:picLocks noChangeAspect="1"/>
+          </p:cNvPicPr>
+          <p:nvPr/>
+        </p:nvPicPr>
+        <p:blipFill>
+          <a:blip r:embed="rId5"/>
+          <a:stretch>
+            <a:fillRect/>
+          </a:stretch>
+        </p:blipFill>
+        <p:spPr>
+          <a:xfrm>
+            <a:off x="795528" y="4059936"/>
+            <a:ext cx="274320" cy="274320"/>
+          </a:xfrm>
+          <a:prstGeom prst="rect">
+            <a:avLst/>
+          </a:prstGeom>
+        </p:spPr>
+      </p:pic>
+      <p:sp>
+        <p:nvSpPr>
+          <p:cNvPr id="21" name="Text 16"/>
+          <p:cNvSpPr txBox="1"/>
+          <p:nvPr/>
+        </p:nvSpPr>
+        <p:spPr>
+          <a:xfrm>
+            <a:off x="1371600" y="3831336"/>
+            <a:ext cx="4206240" cy="365760"/>
+          </a:xfrm>
+          <a:prstGeom prst="rect">
+            <a:avLst/>
+          </a:prstGeom>
+          <a:noFill/>
+          <a:ln/>
+        </p:spPr>
+        <p:txBody>
+          <a:bodyPr wrap="square" lIns="0" tIns="0" rIns="0" bIns="0" rtlCol="0" anchor="ctr"/>
+          <a:lstStyle/>
+          <a:p>
+            <a:pPr marL="0" indent="0" algn="l">
+              <a:buNone/>
+            </a:pPr>
+            <a:r>
+              <a:rPr lang="en-US" sz="1400" b="1" dirty="0">
+                <a:solidFill>
+                  <a:srgbClr val="384957"/>
+                </a:solidFill>
+                <a:latin typeface="Courier New" pitchFamily="34" charset="0"/>
+                <a:ea typeface="Courier New" pitchFamily="34" charset="-122"/>
+                <a:cs typeface="Courier New" pitchFamily="34" charset="-120"/>
+              </a:rPr>
               <a:t>run-pipeline.sh</a:t>
             </a:r>
             <a:endParaRPr lang="en-US" sz="1400" dirty="0"/>
@@ -8521,7 +8536,7 @@
           <a:bodyPr wrap="square" lIns="0" tIns="0" rIns="0" bIns="0" rtlCol="0" anchor="ctr"/>
           <a:lstStyle/>
           <a:p>
-            <a:pPr algn="l" indent="0" marL="0">
+            <a:pPr marL="0" indent="0" algn="l">
               <a:buNone/>
             </a:pPr>
             <a:r>
@@ -8533,70 +8548,9 @@
                 <a:ea typeface="Arial" pitchFamily="34" charset="-122"/>
                 <a:cs typeface="Arial" pitchFamily="34" charset="-120"/>
               </a:rPr>
-              <a:t>Interactive driver meant to orchestrate ingest → train → infer; asks per-stage questions</a:t>
+              <a:t>Interactive driver meant to orchestrate ingest → train → infer</a:t>
             </a:r>
             <a:endParaRPr lang="en-US" sz="1050" dirty="0"/>
-          </a:p>
-        </p:txBody>
-      </p:sp>
-      <p:sp>
-        <p:nvSpPr>
-          <p:cNvPr id="23" name="Shape 18"/>
-          <p:cNvSpPr/>
-          <p:nvPr/>
-        </p:nvSpPr>
-        <p:spPr>
-          <a:xfrm>
-            <a:off x="7086600" y="3995928"/>
-            <a:ext cx="1417320" cy="402336"/>
-          </a:xfrm>
-          <a:prstGeom prst="roundRect">
-            <a:avLst>
-              <a:gd name="adj" fmla="val 50000"/>
-            </a:avLst>
-          </a:prstGeom>
-          <a:solidFill>
-            <a:srgbClr val="8A9BA8"/>
-          </a:solidFill>
-          <a:ln/>
-        </p:spPr>
-      </p:sp>
-      <p:sp>
-        <p:nvSpPr>
-          <p:cNvPr id="24" name="Text 19"/>
-          <p:cNvSpPr txBox="1"/>
-          <p:nvPr/>
-        </p:nvSpPr>
-        <p:spPr>
-          <a:xfrm>
-            <a:off x="7086600" y="3995928"/>
-            <a:ext cx="1417320" cy="402336"/>
-          </a:xfrm>
-          <a:prstGeom prst="rect">
-            <a:avLst/>
-          </a:prstGeom>
-          <a:noFill/>
-          <a:ln/>
-        </p:spPr>
-        <p:txBody>
-          <a:bodyPr wrap="square" lIns="0" tIns="0" rIns="0" bIns="0" rtlCol="0" anchor="ctr"/>
-          <a:lstStyle/>
-          <a:p>
-            <a:pPr algn="ctr" indent="0" marL="0">
-              <a:buNone/>
-            </a:pPr>
-            <a:r>
-              <a:rPr lang="en-US" sz="1000" b="1" dirty="0">
-                <a:solidFill>
-                  <a:srgbClr val="FFFFFF"/>
-                </a:solidFill>
-                <a:latin typeface="Arial" pitchFamily="34" charset="0"/>
-                <a:ea typeface="Arial" pitchFamily="34" charset="-122"/>
-                <a:cs typeface="Arial" pitchFamily="34" charset="-120"/>
-              </a:rPr>
-              <a:t>INGEST READY</a:t>
-            </a:r>
-            <a:endParaRPr lang="en-US" sz="1000" dirty="0"/>
           </a:p>
         </p:txBody>
       </p:sp>
@@ -8621,7 +8575,7 @@
           <a:bodyPr wrap="square" lIns="0" tIns="0" rIns="0" bIns="0" rtlCol="0" anchor="ctr"/>
           <a:lstStyle/>
           <a:p>
-            <a:pPr algn="l" indent="0" marL="0">
+            <a:pPr marL="0" indent="0" algn="l">
               <a:buNone/>
             </a:pPr>
             <a:r>
@@ -8660,7 +8614,7 @@
           <a:bodyPr wrap="square" lIns="0" tIns="0" rIns="0" bIns="0" rtlCol="0" anchor="ctr"/>
           <a:lstStyle/>
           <a:p>
-            <a:pPr algn="r" indent="0" marL="0">
+            <a:pPr marL="0" indent="0" algn="r">
               <a:buNone/>
             </a:pPr>
             <a:r>
@@ -8694,6 +8648,7 @@
         <a:solidFill>
           <a:srgbClr val="FFFFFF"/>
         </a:solidFill>
+        <a:effectLst/>
       </p:bgPr>
     </p:bg>
     <p:spTree>
@@ -8731,7 +8686,7 @@
           <a:bodyPr wrap="square" lIns="0" tIns="0" rIns="0" bIns="0" rtlCol="0" anchor="ctr"/>
           <a:lstStyle/>
           <a:p>
-            <a:pPr algn="l" indent="0" marL="0">
+            <a:pPr marL="0" indent="0" algn="l">
               <a:buNone/>
             </a:pPr>
             <a:r>
@@ -8770,7 +8725,7 @@
           <a:bodyPr wrap="square" lIns="0" tIns="0" rIns="0" bIns="0" rtlCol="0" anchor="ctr"/>
           <a:lstStyle/>
           <a:p>
-            <a:pPr algn="l" indent="0" marL="0">
+            <a:pPr marL="0" indent="0" algn="l">
               <a:buNone/>
             </a:pPr>
             <a:r>
@@ -8782,7 +8737,29 @@
                 <a:ea typeface="Arial" pitchFamily="34" charset="-122"/>
                 <a:cs typeface="Arial" pitchFamily="34" charset="-120"/>
               </a:rPr>
-              <a:t>Three conditions on the same 100-utterance held-out test set: openai/whisper-medium.en (baseline), jacktol’s fine-tuned medium.en (comparison), and our own whisper-small.en fine-tune.</a:t>
+              <a:t>Three conditions on the same 100-utterance sample test set: openai/whisper-medium.en (baseline) model, jacktol’s fine-tuned medium.en (comparison) model, and a custom fine-tuned whisper-</a:t>
+            </a:r>
+            <a:r>
+              <a:rPr lang="en-US" sz="1100" dirty="0" err="1">
+                <a:solidFill>
+                  <a:srgbClr val="6B7A86"/>
+                </a:solidFill>
+                <a:latin typeface="Arial" pitchFamily="34" charset="0"/>
+                <a:ea typeface="Arial" pitchFamily="34" charset="-122"/>
+                <a:cs typeface="Arial" pitchFamily="34" charset="-120"/>
+              </a:rPr>
+              <a:t>small.en</a:t>
+            </a:r>
+            <a:r>
+              <a:rPr lang="en-US" sz="1100" dirty="0">
+                <a:solidFill>
+                  <a:srgbClr val="6B7A86"/>
+                </a:solidFill>
+                <a:latin typeface="Arial" pitchFamily="34" charset="0"/>
+                <a:ea typeface="Arial" pitchFamily="34" charset="-122"/>
+                <a:cs typeface="Arial" pitchFamily="34" charset="-120"/>
+              </a:rPr>
+              <a:t> model.</a:t>
             </a:r>
             <a:endParaRPr lang="en-US" sz="1100" dirty="0"/>
           </a:p>
@@ -8790,7 +8767,7 @@
       </p:sp>
       <p:graphicFrame>
         <p:nvGraphicFramePr>
-          <p:cNvPr id="4" name="Chart 0" descr=""/>
+          <p:cNvPr id="4" name="Chart 0"/>
           <p:cNvGraphicFramePr/>
           <p:nvPr/>
         </p:nvGraphicFramePr>
@@ -8798,15 +8775,15 @@
           <a:off x="457200" y="1508760"/>
           <a:ext cx="3931920" cy="2651760"/>
         </p:xfrm>
-        <a:graphic xmlns:a="http://schemas.openxmlformats.org/drawingml/2006/main">
+        <a:graphic>
           <a:graphicData uri="http://schemas.openxmlformats.org/drawingml/2006/chart">
-            <c:chart xmlns:c="http://schemas.openxmlformats.org/drawingml/2006/chart" r:id="rId1"/>
+            <c:chart xmlns:c="http://schemas.openxmlformats.org/drawingml/2006/chart" xmlns:r="http://schemas.openxmlformats.org/officeDocument/2006/relationships" r:id="rId3"/>
           </a:graphicData>
         </a:graphic>
       </p:graphicFrame>
       <p:graphicFrame>
         <p:nvGraphicFramePr>
-          <p:cNvPr id="5" name="Chart 1" descr=""/>
+          <p:cNvPr id="5" name="Chart 1"/>
           <p:cNvGraphicFramePr/>
           <p:nvPr/>
         </p:nvGraphicFramePr>
@@ -8814,9 +8791,9 @@
           <a:off x="4663440" y="1508760"/>
           <a:ext cx="3931920" cy="2651760"/>
         </p:xfrm>
-        <a:graphic xmlns:a="http://schemas.openxmlformats.org/drawingml/2006/main">
+        <a:graphic>
           <a:graphicData uri="http://schemas.openxmlformats.org/drawingml/2006/chart">
-            <c:chart xmlns:c="http://schemas.openxmlformats.org/drawingml/2006/chart" r:id="rId2"/>
+            <c:chart xmlns:c="http://schemas.openxmlformats.org/drawingml/2006/chart" xmlns:r="http://schemas.openxmlformats.org/officeDocument/2006/relationships" r:id="rId4"/>
           </a:graphicData>
         </a:graphic>
       </p:graphicFrame>
@@ -8841,7 +8818,7 @@
           <a:bodyPr wrap="square" lIns="0" tIns="0" rIns="0" bIns="0" rtlCol="0" anchor="ctr"/>
           <a:lstStyle/>
           <a:p>
-            <a:pPr algn="l" indent="0" marL="0">
+            <a:pPr marL="0" indent="0" algn="l">
               <a:buNone/>
             </a:pPr>
             <a:r>
@@ -8853,24 +8830,7 @@
                 <a:ea typeface="Arial" pitchFamily="34" charset="-122"/>
                 <a:cs typeface="Arial" pitchFamily="34" charset="-120"/>
               </a:rPr>
-              <a:t>*Baseline’s real-audio WER is dominated by two runaway-generation (hallucination) outliers (see next slide).</a:t>
-            </a:r>
-            <a:endParaRPr lang="en-US" sz="1000" dirty="0"/>
-          </a:p>
-          <a:p>
-            <a:pPr algn="l" indent="0" marL="0">
-              <a:buNone/>
-            </a:pPr>
-            <a:r>
-              <a:rPr lang="en-US" sz="1000" i="1" dirty="0">
-                <a:solidFill>
-                  <a:srgbClr val="6B7A86"/>
-                </a:solidFill>
-                <a:latin typeface="Arial" pitchFamily="34" charset="0"/>
-                <a:ea typeface="Arial" pitchFamily="34" charset="-122"/>
-                <a:cs typeface="Arial" pitchFamily="34" charset="-120"/>
-              </a:rPr>
-              <a:t>†Our Fine-Tune’s figures are approximate: exact WER shifts by a few tenths of a point each time it’s retrained (GPU non-determinism).</a:t>
+              <a:t>*Baseline model’s real-audio WER is skewed by two runaway-generation (hallucination) outliers.</a:t>
             </a:r>
             <a:endParaRPr lang="en-US" sz="1000" dirty="0"/>
           </a:p>
@@ -8897,7 +8857,7 @@
           <a:bodyPr wrap="square" lIns="0" tIns="0" rIns="0" bIns="0" rtlCol="0" anchor="ctr"/>
           <a:lstStyle/>
           <a:p>
-            <a:pPr algn="l" indent="0" marL="0">
+            <a:pPr marL="0" indent="0" algn="l">
               <a:buNone/>
             </a:pPr>
             <a:r>
@@ -8936,7 +8896,7 @@
           <a:bodyPr wrap="square" lIns="0" tIns="0" rIns="0" bIns="0" rtlCol="0" anchor="ctr"/>
           <a:lstStyle/>
           <a:p>
-            <a:pPr algn="r" indent="0" marL="0">
+            <a:pPr marL="0" indent="0" algn="r">
               <a:buNone/>
             </a:pPr>
             <a:r>
@@ -8970,6 +8930,7 @@
         <a:solidFill>
           <a:srgbClr val="FFFFFF"/>
         </a:solidFill>
+        <a:effectLst/>
       </p:bgPr>
     </p:bg>
     <p:spTree>
@@ -9007,7 +8968,7 @@
           <a:bodyPr wrap="square" lIns="0" tIns="0" rIns="0" bIns="0" rtlCol="0" anchor="ctr"/>
           <a:lstStyle/>
           <a:p>
-            <a:pPr algn="l" indent="0" marL="0">
+            <a:pPr marL="0" indent="0" algn="l">
               <a:buNone/>
             </a:pPr>
             <a:r>
@@ -9044,254 +9005,17 @@
           </a:solidFill>
           <a:ln/>
         </p:spPr>
+        <p:txBody>
+          <a:bodyPr/>
+          <a:lstStyle/>
+          <a:p>
+            <a:endParaRPr lang="en-US"/>
+          </a:p>
+        </p:txBody>
       </p:sp>
       <p:pic>
         <p:nvPicPr>
-          <p:cNvPr id="4" name="Image 0" descr="/tmp/claude-1000/-home-ballen-GitHub/10f2e268-ec1d-4d6f-8dc8-6cf2617b3162/scratchpad/pptx_work/icons/scale-unbalanced-white.png">    </p:cNvPr>
-          <p:cNvPicPr>
-            <a:picLocks noChangeAspect="1"/>
-          </p:cNvPicPr>
-          <p:nvPr/>
-        </p:nvPicPr>
-        <p:blipFill>
-          <a:blip r:embed="rId1"/>
-          <a:stretch>
-            <a:fillRect/>
-          </a:stretch>
-        </p:blipFill>
-        <p:spPr>
-          <a:xfrm>
-            <a:off x="566928" y="1207008"/>
-            <a:ext cx="283464" cy="283464"/>
-          </a:xfrm>
-          <a:prstGeom prst="rect">
-            <a:avLst/>
-          </a:prstGeom>
-        </p:spPr>
-      </p:pic>
-      <p:sp>
-        <p:nvSpPr>
-          <p:cNvPr id="5" name="Text 2"/>
-          <p:cNvSpPr txBox="1"/>
-          <p:nvPr/>
-        </p:nvSpPr>
-        <p:spPr>
-          <a:xfrm>
-            <a:off x="1115568" y="1051560"/>
-            <a:ext cx="3273552" cy="365760"/>
-          </a:xfrm>
-          <a:prstGeom prst="rect">
-            <a:avLst/>
-          </a:prstGeom>
-          <a:noFill/>
-          <a:ln/>
-        </p:spPr>
-        <p:txBody>
-          <a:bodyPr wrap="square" lIns="0" tIns="0" rIns="0" bIns="0" rtlCol="0" anchor="ctr"/>
-          <a:lstStyle/>
-          <a:p>
-            <a:pPr algn="l" indent="0" marL="0">
-              <a:buNone/>
-            </a:pPr>
-            <a:r>
-              <a:rPr lang="en-US" sz="1350" b="1" dirty="0">
-                <a:solidFill>
-                  <a:srgbClr val="384957"/>
-                </a:solidFill>
-                <a:latin typeface="Arial" pitchFamily="34" charset="0"/>
-                <a:ea typeface="Arial" pitchFamily="34" charset="-122"/>
-                <a:cs typeface="Arial" pitchFamily="34" charset="-120"/>
-              </a:rPr>
-              <a:t>Fine-tuning beats raw size</a:t>
-            </a:r>
-            <a:endParaRPr lang="en-US" sz="1350" dirty="0"/>
-          </a:p>
-        </p:txBody>
-      </p:sp>
-      <p:sp>
-        <p:nvSpPr>
-          <p:cNvPr id="6" name="Text 3"/>
-          <p:cNvSpPr txBox="1"/>
-          <p:nvPr/>
-        </p:nvSpPr>
-        <p:spPr>
-          <a:xfrm>
-            <a:off x="1115568" y="1417320"/>
-            <a:ext cx="3273552" cy="1005840"/>
-          </a:xfrm>
-          <a:prstGeom prst="rect">
-            <a:avLst/>
-          </a:prstGeom>
-          <a:noFill/>
-          <a:ln/>
-        </p:spPr>
-        <p:txBody>
-          <a:bodyPr wrap="square" lIns="0" tIns="0" rIns="0" bIns="0" rtlCol="0" anchor="ctr"/>
-          <a:lstStyle/>
-          <a:p>
-            <a:pPr algn="l" indent="0" marL="0">
-              <a:buNone/>
-            </a:pPr>
-            <a:r>
-              <a:rPr lang="en-US" sz="1050" dirty="0">
-                <a:solidFill>
-                  <a:srgbClr val="6B7A86"/>
-                </a:solidFill>
-                <a:latin typeface="Arial" pitchFamily="34" charset="0"/>
-                <a:ea typeface="Arial" pitchFamily="34" charset="-122"/>
-                <a:cs typeface="Arial" pitchFamily="34" charset="-120"/>
-              </a:rPr>
-              <a:t>Our small.en fine-tune (244M params, 1,000 training rows) beat the medium.en baseline (769M params) in both domains.</a:t>
-            </a:r>
-            <a:endParaRPr lang="en-US" sz="1050" dirty="0"/>
-          </a:p>
-        </p:txBody>
-      </p:sp>
-      <p:sp>
-        <p:nvSpPr>
-          <p:cNvPr id="7" name="Shape 4"/>
-          <p:cNvSpPr/>
-          <p:nvPr/>
-        </p:nvSpPr>
-        <p:spPr>
-          <a:xfrm>
-            <a:off x="4663440" y="1097280"/>
-            <a:ext cx="502920" cy="502920"/>
-          </a:xfrm>
-          <a:prstGeom prst="ellipse">
-            <a:avLst/>
-          </a:prstGeom>
-          <a:solidFill>
-            <a:srgbClr val="0097A7"/>
-          </a:solidFill>
-          <a:ln/>
-        </p:spPr>
-      </p:sp>
-      <p:pic>
-        <p:nvPicPr>
-          <p:cNvPr id="8" name="Image 1" descr="/tmp/claude-1000/-home-ballen-GitHub/10f2e268-ec1d-4d6f-8dc8-6cf2617b3162/scratchpad/pptx_work/icons/triangle-exclamation-white.png">    </p:cNvPr>
-          <p:cNvPicPr>
-            <a:picLocks noChangeAspect="1"/>
-          </p:cNvPicPr>
-          <p:nvPr/>
-        </p:nvPicPr>
-        <p:blipFill>
-          <a:blip r:embed="rId2"/>
-          <a:stretch>
-            <a:fillRect/>
-          </a:stretch>
-        </p:blipFill>
-        <p:spPr>
-          <a:xfrm>
-            <a:off x="4773168" y="1207008"/>
-            <a:ext cx="283464" cy="283464"/>
-          </a:xfrm>
-          <a:prstGeom prst="rect">
-            <a:avLst/>
-          </a:prstGeom>
-        </p:spPr>
-      </p:pic>
-      <p:sp>
-        <p:nvSpPr>
-          <p:cNvPr id="9" name="Text 5"/>
-          <p:cNvSpPr txBox="1"/>
-          <p:nvPr/>
-        </p:nvSpPr>
-        <p:spPr>
-          <a:xfrm>
-            <a:off x="5321808" y="1051560"/>
-            <a:ext cx="3273552" cy="365760"/>
-          </a:xfrm>
-          <a:prstGeom prst="rect">
-            <a:avLst/>
-          </a:prstGeom>
-          <a:noFill/>
-          <a:ln/>
-        </p:spPr>
-        <p:txBody>
-          <a:bodyPr wrap="square" lIns="0" tIns="0" rIns="0" bIns="0" rtlCol="0" anchor="ctr"/>
-          <a:lstStyle/>
-          <a:p>
-            <a:pPr algn="l" indent="0" marL="0">
-              <a:buNone/>
-            </a:pPr>
-            <a:r>
-              <a:rPr lang="en-US" sz="1350" b="1" dirty="0">
-                <a:solidFill>
-                  <a:srgbClr val="384957"/>
-                </a:solidFill>
-                <a:latin typeface="Arial" pitchFamily="34" charset="0"/>
-                <a:ea typeface="Arial" pitchFamily="34" charset="-122"/>
-                <a:cs typeface="Arial" pitchFamily="34" charset="-120"/>
-              </a:rPr>
-              <a:t>A real failure mode, caught</a:t>
-            </a:r>
-            <a:endParaRPr lang="en-US" sz="1350" dirty="0"/>
-          </a:p>
-        </p:txBody>
-      </p:sp>
-      <p:sp>
-        <p:nvSpPr>
-          <p:cNvPr id="10" name="Text 6"/>
-          <p:cNvSpPr txBox="1"/>
-          <p:nvPr/>
-        </p:nvSpPr>
-        <p:spPr>
-          <a:xfrm>
-            <a:off x="5321808" y="1417320"/>
-            <a:ext cx="3273552" cy="1005840"/>
-          </a:xfrm>
-          <a:prstGeom prst="rect">
-            <a:avLst/>
-          </a:prstGeom>
-          <a:noFill/>
-          <a:ln/>
-        </p:spPr>
-        <p:txBody>
-          <a:bodyPr wrap="square" lIns="0" tIns="0" rIns="0" bIns="0" rtlCol="0" anchor="ctr"/>
-          <a:lstStyle/>
-          <a:p>
-            <a:pPr algn="l" indent="0" marL="0">
-              <a:buNone/>
-            </a:pPr>
-            <a:r>
-              <a:rPr lang="en-US" sz="1050" dirty="0">
-                <a:solidFill>
-                  <a:srgbClr val="6B7A86"/>
-                </a:solidFill>
-                <a:latin typeface="Arial" pitchFamily="34" charset="0"/>
-                <a:ea typeface="Arial" pitchFamily="34" charset="-122"/>
-                <a:cs typeface="Arial" pitchFamily="34" charset="-120"/>
-              </a:rPr>
-              <a:t>The generic baseline repeats itself into a 150-word loop on some real-audio clips, a documented Whisper hallucination pattern, not a bug in our code.</a:t>
-            </a:r>
-            <a:endParaRPr lang="en-US" sz="1050" dirty="0"/>
-          </a:p>
-        </p:txBody>
-      </p:sp>
-      <p:sp>
-        <p:nvSpPr>
-          <p:cNvPr id="11" name="Shape 7"/>
-          <p:cNvSpPr/>
-          <p:nvPr/>
-        </p:nvSpPr>
-        <p:spPr>
-          <a:xfrm>
-            <a:off x="457200" y="2679192"/>
-            <a:ext cx="502920" cy="502920"/>
-          </a:xfrm>
-          <a:prstGeom prst="ellipse">
-            <a:avLst/>
-          </a:prstGeom>
-          <a:solidFill>
-            <a:srgbClr val="0097A7"/>
-          </a:solidFill>
-          <a:ln/>
-        </p:spPr>
-      </p:sp>
-      <p:pic>
-        <p:nvPicPr>
-          <p:cNvPr id="12" name="Image 2" descr="/tmp/claude-1000/-home-ballen-GitHub/10f2e268-ec1d-4d6f-8dc8-6cf2617b3162/scratchpad/pptx_work/icons/gears-white.png">    </p:cNvPr>
+          <p:cNvPr id="4" name="Image 0" descr="/tmp/claude-1000/-home-ballen-GitHub/10f2e268-ec1d-4d6f-8dc8-6cf2617b3162/scratchpad/pptx_work/icons/scale-unbalanced-white.png"/>
           <p:cNvPicPr>
             <a:picLocks noChangeAspect="1"/>
           </p:cNvPicPr>
@@ -9305,7 +9029,7 @@
         </p:blipFill>
         <p:spPr>
           <a:xfrm>
-            <a:off x="566928" y="2788920"/>
+            <a:off x="566928" y="1207008"/>
             <a:ext cx="283464" cy="283464"/>
           </a:xfrm>
           <a:prstGeom prst="rect">
@@ -9315,13 +9039,13 @@
       </p:pic>
       <p:sp>
         <p:nvSpPr>
-          <p:cNvPr id="13" name="Text 8"/>
-          <p:cNvSpPr txBox="1"/>
-          <p:nvPr/>
-        </p:nvSpPr>
-        <p:spPr>
-          <a:xfrm>
-            <a:off x="1115568" y="2633472"/>
+          <p:cNvPr id="5" name="Text 2"/>
+          <p:cNvSpPr txBox="1"/>
+          <p:nvPr/>
+        </p:nvSpPr>
+        <p:spPr>
+          <a:xfrm>
+            <a:off x="1115568" y="1051560"/>
             <a:ext cx="3273552" cy="365760"/>
           </a:xfrm>
           <a:prstGeom prst="rect">
@@ -9334,7 +9058,7 @@
           <a:bodyPr wrap="square" lIns="0" tIns="0" rIns="0" bIns="0" rtlCol="0" anchor="ctr"/>
           <a:lstStyle/>
           <a:p>
-            <a:pPr algn="l" indent="0" marL="0">
+            <a:pPr marL="0" indent="0" algn="l">
               <a:buNone/>
             </a:pPr>
             <a:r>
@@ -9346,7 +9070,7 @@
                 <a:ea typeface="Arial" pitchFamily="34" charset="-122"/>
                 <a:cs typeface="Arial" pitchFamily="34" charset="-120"/>
               </a:rPr>
-              <a:t>An engineering lesson</a:t>
+              <a:t>Fine-tuning beats raw size</a:t>
             </a:r>
             <a:endParaRPr lang="en-US" sz="1350" dirty="0"/>
           </a:p>
@@ -9354,13 +9078,13 @@
       </p:sp>
       <p:sp>
         <p:nvSpPr>
-          <p:cNvPr id="14" name="Text 9"/>
-          <p:cNvSpPr txBox="1"/>
-          <p:nvPr/>
-        </p:nvSpPr>
-        <p:spPr>
-          <a:xfrm>
-            <a:off x="1115568" y="2999232"/>
+          <p:cNvPr id="6" name="Text 3"/>
+          <p:cNvSpPr txBox="1"/>
+          <p:nvPr/>
+        </p:nvSpPr>
+        <p:spPr>
+          <a:xfrm>
+            <a:off x="1115568" y="1417320"/>
             <a:ext cx="3273552" cy="1005840"/>
           </a:xfrm>
           <a:prstGeom prst="rect">
@@ -9373,7 +9097,7 @@
           <a:bodyPr wrap="square" lIns="0" tIns="0" rIns="0" bIns="0" rtlCol="0" anchor="ctr"/>
           <a:lstStyle/>
           <a:p>
-            <a:pPr algn="l" indent="0" marL="0">
+            <a:pPr marL="0" indent="0" algn="l">
               <a:buNone/>
             </a:pPr>
             <a:r>
@@ -9385,7 +9109,51 @@
                 <a:ea typeface="Arial" pitchFamily="34" charset="-122"/>
                 <a:cs typeface="Arial" pitchFamily="34" charset="-120"/>
               </a:rPr>
-              <a:t>Full batch_size=8 fine-tuning pinned this GPU at 98% VRAM and thrashed; batch_size=4 (same effective batch via gradient accumulation) fixed it.</a:t>
+              <a:t>Custom fine-tuned </a:t>
+            </a:r>
+            <a:r>
+              <a:rPr lang="en-US" sz="1050" dirty="0" err="1">
+                <a:solidFill>
+                  <a:srgbClr val="6B7A86"/>
+                </a:solidFill>
+                <a:latin typeface="Arial" pitchFamily="34" charset="0"/>
+                <a:ea typeface="Arial" pitchFamily="34" charset="-122"/>
+                <a:cs typeface="Arial" pitchFamily="34" charset="-120"/>
+              </a:rPr>
+              <a:t>small.en</a:t>
+            </a:r>
+            <a:r>
+              <a:rPr lang="en-US" sz="1050" dirty="0">
+                <a:solidFill>
+                  <a:srgbClr val="6B7A86"/>
+                </a:solidFill>
+                <a:latin typeface="Arial" pitchFamily="34" charset="0"/>
+                <a:ea typeface="Arial" pitchFamily="34" charset="-122"/>
+                <a:cs typeface="Arial" pitchFamily="34" charset="-120"/>
+              </a:rPr>
+              <a:t> model (244M params, 1,000 training samples) beat the </a:t>
+            </a:r>
+            <a:r>
+              <a:rPr lang="en-US" sz="1050" dirty="0" err="1">
+                <a:solidFill>
+                  <a:srgbClr val="6B7A86"/>
+                </a:solidFill>
+                <a:latin typeface="Arial" pitchFamily="34" charset="0"/>
+                <a:ea typeface="Arial" pitchFamily="34" charset="-122"/>
+                <a:cs typeface="Arial" pitchFamily="34" charset="-120"/>
+              </a:rPr>
+              <a:t>medium.en</a:t>
+            </a:r>
+            <a:r>
+              <a:rPr lang="en-US" sz="1050" dirty="0">
+                <a:solidFill>
+                  <a:srgbClr val="6B7A86"/>
+                </a:solidFill>
+                <a:latin typeface="Arial" pitchFamily="34" charset="0"/>
+                <a:ea typeface="Arial" pitchFamily="34" charset="-122"/>
+                <a:cs typeface="Arial" pitchFamily="34" charset="-120"/>
+              </a:rPr>
+              <a:t> baseline model (769M params) in both domains.</a:t>
             </a:r>
             <a:endParaRPr lang="en-US" sz="1050" dirty="0"/>
           </a:p>
@@ -9393,13 +9161,13 @@
       </p:sp>
       <p:sp>
         <p:nvSpPr>
-          <p:cNvPr id="15" name="Shape 10"/>
+          <p:cNvPr id="7" name="Shape 4"/>
           <p:cNvSpPr/>
           <p:nvPr/>
         </p:nvSpPr>
         <p:spPr>
           <a:xfrm>
-            <a:off x="4663440" y="2679192"/>
+            <a:off x="4663440" y="1097280"/>
             <a:ext cx="502920" cy="502920"/>
           </a:xfrm>
           <a:prstGeom prst="ellipse">
@@ -9410,10 +9178,17 @@
           </a:solidFill>
           <a:ln/>
         </p:spPr>
+        <p:txBody>
+          <a:bodyPr/>
+          <a:lstStyle/>
+          <a:p>
+            <a:endParaRPr lang="en-US"/>
+          </a:p>
+        </p:txBody>
       </p:sp>
       <p:pic>
         <p:nvPicPr>
-          <p:cNvPr id="16" name="Image 3" descr="/tmp/claude-1000/-home-ballen-GitHub/10f2e268-ec1d-4d6f-8dc8-6cf2617b3162/scratchpad/pptx_work/icons/clipboard-check-white.png">    </p:cNvPr>
+          <p:cNvPr id="8" name="Image 1" descr="/tmp/claude-1000/-home-ballen-GitHub/10f2e268-ec1d-4d6f-8dc8-6cf2617b3162/scratchpad/pptx_work/icons/triangle-exclamation-white.png"/>
           <p:cNvPicPr>
             <a:picLocks noChangeAspect="1"/>
           </p:cNvPicPr>
@@ -9427,6 +9202,307 @@
         </p:blipFill>
         <p:spPr>
           <a:xfrm>
+            <a:off x="4773168" y="1207008"/>
+            <a:ext cx="283464" cy="283464"/>
+          </a:xfrm>
+          <a:prstGeom prst="rect">
+            <a:avLst/>
+          </a:prstGeom>
+        </p:spPr>
+      </p:pic>
+      <p:sp>
+        <p:nvSpPr>
+          <p:cNvPr id="9" name="Text 5"/>
+          <p:cNvSpPr txBox="1"/>
+          <p:nvPr/>
+        </p:nvSpPr>
+        <p:spPr>
+          <a:xfrm>
+            <a:off x="5321808" y="1051560"/>
+            <a:ext cx="3273552" cy="365760"/>
+          </a:xfrm>
+          <a:prstGeom prst="rect">
+            <a:avLst/>
+          </a:prstGeom>
+          <a:noFill/>
+          <a:ln/>
+        </p:spPr>
+        <p:txBody>
+          <a:bodyPr wrap="square" lIns="0" tIns="0" rIns="0" bIns="0" rtlCol="0" anchor="ctr"/>
+          <a:lstStyle/>
+          <a:p>
+            <a:pPr marL="0" indent="0" algn="l">
+              <a:buNone/>
+            </a:pPr>
+            <a:r>
+              <a:rPr lang="en-US" sz="1350" b="1" dirty="0">
+                <a:solidFill>
+                  <a:srgbClr val="384957"/>
+                </a:solidFill>
+                <a:latin typeface="Arial" pitchFamily="34" charset="0"/>
+                <a:ea typeface="Arial" pitchFamily="34" charset="-122"/>
+                <a:cs typeface="Arial" pitchFamily="34" charset="-120"/>
+              </a:rPr>
+              <a:t>Whisper model architecture caveat</a:t>
+            </a:r>
+            <a:endParaRPr lang="en-US" sz="1350" dirty="0"/>
+          </a:p>
+        </p:txBody>
+      </p:sp>
+      <p:sp>
+        <p:nvSpPr>
+          <p:cNvPr id="10" name="Text 6"/>
+          <p:cNvSpPr txBox="1"/>
+          <p:nvPr/>
+        </p:nvSpPr>
+        <p:spPr>
+          <a:xfrm>
+            <a:off x="5321808" y="1417320"/>
+            <a:ext cx="3273552" cy="1005840"/>
+          </a:xfrm>
+          <a:prstGeom prst="rect">
+            <a:avLst/>
+          </a:prstGeom>
+          <a:noFill/>
+          <a:ln/>
+        </p:spPr>
+        <p:txBody>
+          <a:bodyPr wrap="square" lIns="0" tIns="0" rIns="0" bIns="0" rtlCol="0" anchor="ctr"/>
+          <a:lstStyle/>
+          <a:p>
+            <a:pPr marL="0" indent="0" algn="l">
+              <a:buNone/>
+            </a:pPr>
+            <a:r>
+              <a:rPr lang="en-US" sz="1050" dirty="0">
+                <a:solidFill>
+                  <a:srgbClr val="6B7A86"/>
+                </a:solidFill>
+                <a:latin typeface="Arial" pitchFamily="34" charset="0"/>
+                <a:ea typeface="Arial" pitchFamily="34" charset="-122"/>
+                <a:cs typeface="Arial" pitchFamily="34" charset="-120"/>
+              </a:rPr>
+              <a:t>The generic baseline repeats itself into a 150-word loop on some real-audio clips which is a documented Whisper hallucination pattern.</a:t>
+            </a:r>
+          </a:p>
+          <a:p>
+            <a:pPr marL="0" indent="0" algn="l">
+              <a:buNone/>
+            </a:pPr>
+            <a:endParaRPr lang="en-US" sz="1050" dirty="0">
+              <a:solidFill>
+                <a:srgbClr val="6B7A86"/>
+              </a:solidFill>
+              <a:latin typeface="Arial" pitchFamily="34" charset="0"/>
+              <a:ea typeface="Arial" pitchFamily="34" charset="-122"/>
+              <a:cs typeface="Arial" pitchFamily="34" charset="-120"/>
+            </a:endParaRPr>
+          </a:p>
+          <a:p>
+            <a:r>
+              <a:rPr lang="en-US" sz="1050" dirty="0">
+                <a:solidFill>
+                  <a:srgbClr val="6B7A86"/>
+                </a:solidFill>
+                <a:latin typeface="Arial" pitchFamily="34" charset="0"/>
+                <a:cs typeface="Arial" pitchFamily="34" charset="-120"/>
+              </a:rPr>
+              <a:t>See: </a:t>
+            </a:r>
+            <a:r>
+              <a:rPr lang="en-US" sz="1050" dirty="0">
+                <a:solidFill>
+                  <a:srgbClr val="6B7A86"/>
+                </a:solidFill>
+                <a:latin typeface="Arial" pitchFamily="34" charset="0"/>
+                <a:cs typeface="Arial" pitchFamily="34" charset="-120"/>
+                <a:hlinkClick r:id="rId5"/>
+              </a:rPr>
+              <a:t>https://metawhisp.com/blog/whisper-repeating-word-loop-fix/</a:t>
+            </a:r>
+            <a:r>
+              <a:rPr lang="en-US" sz="1050" dirty="0">
+                <a:solidFill>
+                  <a:srgbClr val="6B7A86"/>
+                </a:solidFill>
+                <a:latin typeface="Arial" pitchFamily="34" charset="0"/>
+                <a:cs typeface="Arial" pitchFamily="34" charset="-120"/>
+              </a:rPr>
+              <a:t> </a:t>
+            </a:r>
+            <a:endParaRPr lang="en-US" sz="1050" dirty="0"/>
+          </a:p>
+        </p:txBody>
+      </p:sp>
+      <p:sp>
+        <p:nvSpPr>
+          <p:cNvPr id="11" name="Shape 7"/>
+          <p:cNvSpPr/>
+          <p:nvPr/>
+        </p:nvSpPr>
+        <p:spPr>
+          <a:xfrm>
+            <a:off x="457200" y="2679192"/>
+            <a:ext cx="502920" cy="502920"/>
+          </a:xfrm>
+          <a:prstGeom prst="ellipse">
+            <a:avLst/>
+          </a:prstGeom>
+          <a:solidFill>
+            <a:srgbClr val="0097A7"/>
+          </a:solidFill>
+          <a:ln/>
+        </p:spPr>
+        <p:txBody>
+          <a:bodyPr/>
+          <a:lstStyle/>
+          <a:p>
+            <a:endParaRPr lang="en-US"/>
+          </a:p>
+        </p:txBody>
+      </p:sp>
+      <p:pic>
+        <p:nvPicPr>
+          <p:cNvPr id="12" name="Image 2" descr="/tmp/claude-1000/-home-ballen-GitHub/10f2e268-ec1d-4d6f-8dc8-6cf2617b3162/scratchpad/pptx_work/icons/gears-white.png"/>
+          <p:cNvPicPr>
+            <a:picLocks noChangeAspect="1"/>
+          </p:cNvPicPr>
+          <p:nvPr/>
+        </p:nvPicPr>
+        <p:blipFill>
+          <a:blip r:embed="rId6"/>
+          <a:stretch>
+            <a:fillRect/>
+          </a:stretch>
+        </p:blipFill>
+        <p:spPr>
+          <a:xfrm>
+            <a:off x="566928" y="2788920"/>
+            <a:ext cx="283464" cy="283464"/>
+          </a:xfrm>
+          <a:prstGeom prst="rect">
+            <a:avLst/>
+          </a:prstGeom>
+        </p:spPr>
+      </p:pic>
+      <p:sp>
+        <p:nvSpPr>
+          <p:cNvPr id="13" name="Text 8"/>
+          <p:cNvSpPr txBox="1"/>
+          <p:nvPr/>
+        </p:nvSpPr>
+        <p:spPr>
+          <a:xfrm>
+            <a:off x="1115568" y="2633472"/>
+            <a:ext cx="3273552" cy="365760"/>
+          </a:xfrm>
+          <a:prstGeom prst="rect">
+            <a:avLst/>
+          </a:prstGeom>
+          <a:noFill/>
+          <a:ln/>
+        </p:spPr>
+        <p:txBody>
+          <a:bodyPr wrap="square" lIns="0" tIns="0" rIns="0" bIns="0" rtlCol="0" anchor="ctr"/>
+          <a:lstStyle/>
+          <a:p>
+            <a:pPr marL="0" indent="0" algn="l">
+              <a:buNone/>
+            </a:pPr>
+            <a:r>
+              <a:rPr lang="en-US" sz="1350" b="1" dirty="0">
+                <a:solidFill>
+                  <a:srgbClr val="384957"/>
+                </a:solidFill>
+                <a:latin typeface="Arial" pitchFamily="34" charset="0"/>
+                <a:ea typeface="Arial" pitchFamily="34" charset="-122"/>
+                <a:cs typeface="Arial" pitchFamily="34" charset="-120"/>
+              </a:rPr>
+              <a:t>An engineering lesson</a:t>
+            </a:r>
+            <a:endParaRPr lang="en-US" sz="1350" dirty="0"/>
+          </a:p>
+        </p:txBody>
+      </p:sp>
+      <p:sp>
+        <p:nvSpPr>
+          <p:cNvPr id="14" name="Text 9"/>
+          <p:cNvSpPr txBox="1"/>
+          <p:nvPr/>
+        </p:nvSpPr>
+        <p:spPr>
+          <a:xfrm>
+            <a:off x="1115568" y="2999232"/>
+            <a:ext cx="3273552" cy="1005840"/>
+          </a:xfrm>
+          <a:prstGeom prst="rect">
+            <a:avLst/>
+          </a:prstGeom>
+          <a:noFill/>
+          <a:ln/>
+        </p:spPr>
+        <p:txBody>
+          <a:bodyPr wrap="square" lIns="0" tIns="0" rIns="0" bIns="0" rtlCol="0" anchor="ctr"/>
+          <a:lstStyle/>
+          <a:p>
+            <a:r>
+              <a:rPr lang="en-US" sz="1050" dirty="0">
+                <a:solidFill>
+                  <a:srgbClr val="6B7A86"/>
+                </a:solidFill>
+                <a:latin typeface="Arial" pitchFamily="34" charset="0"/>
+                <a:ea typeface="Arial" pitchFamily="34" charset="-122"/>
+                <a:cs typeface="Arial" pitchFamily="34" charset="-120"/>
+              </a:rPr>
+              <a:t>Full batch size set to 8 for fine-tuning resulted in 98% VRAM usage on an 8GB VRAM GPUT. Setting batch size to 4 resulted in the same effective batch via gradient accumulation which fixed it.</a:t>
+            </a:r>
+            <a:endParaRPr lang="en-US" sz="1050" dirty="0"/>
+          </a:p>
+        </p:txBody>
+      </p:sp>
+      <p:sp>
+        <p:nvSpPr>
+          <p:cNvPr id="15" name="Shape 10"/>
+          <p:cNvSpPr/>
+          <p:nvPr/>
+        </p:nvSpPr>
+        <p:spPr>
+          <a:xfrm>
+            <a:off x="4663440" y="2679192"/>
+            <a:ext cx="502920" cy="502920"/>
+          </a:xfrm>
+          <a:prstGeom prst="ellipse">
+            <a:avLst/>
+          </a:prstGeom>
+          <a:solidFill>
+            <a:srgbClr val="0097A7"/>
+          </a:solidFill>
+          <a:ln/>
+        </p:spPr>
+        <p:txBody>
+          <a:bodyPr/>
+          <a:lstStyle/>
+          <a:p>
+            <a:endParaRPr lang="en-US"/>
+          </a:p>
+        </p:txBody>
+      </p:sp>
+      <p:pic>
+        <p:nvPicPr>
+          <p:cNvPr id="16" name="Image 3" descr="/tmp/claude-1000/-home-ballen-GitHub/10f2e268-ec1d-4d6f-8dc8-6cf2617b3162/scratchpad/pptx_work/icons/clipboard-check-white.png"/>
+          <p:cNvPicPr>
+            <a:picLocks noChangeAspect="1"/>
+          </p:cNvPicPr>
+          <p:nvPr/>
+        </p:nvPicPr>
+        <p:blipFill>
+          <a:blip r:embed="rId7"/>
+          <a:stretch>
+            <a:fillRect/>
+          </a:stretch>
+        </p:blipFill>
+        <p:spPr>
+          <a:xfrm>
             <a:off x="4773168" y="2788920"/>
             <a:ext cx="283464" cy="283464"/>
           </a:xfrm>
@@ -9456,7 +9532,7 @@
           <a:bodyPr wrap="square" lIns="0" tIns="0" rIns="0" bIns="0" rtlCol="0" anchor="ctr"/>
           <a:lstStyle/>
           <a:p>
-            <a:pPr algn="l" indent="0" marL="0">
+            <a:pPr marL="0" indent="0" algn="l">
               <a:buNone/>
             </a:pPr>
             <a:r>
@@ -9495,9 +9571,20 @@
           <a:bodyPr wrap="square" lIns="0" tIns="0" rIns="0" bIns="0" rtlCol="0" anchor="ctr"/>
           <a:lstStyle/>
           <a:p>
-            <a:pPr algn="l" indent="0" marL="0">
-              <a:buNone/>
-            </a:pPr>
+            <a:pPr marL="0" indent="0" algn="l">
+              <a:buNone/>
+            </a:pPr>
+            <a:r>
+              <a:rPr lang="en-US" sz="1050" dirty="0" err="1">
+                <a:solidFill>
+                  <a:srgbClr val="6B7A86"/>
+                </a:solidFill>
+                <a:latin typeface="Arial" pitchFamily="34" charset="0"/>
+                <a:ea typeface="Arial" pitchFamily="34" charset="-122"/>
+                <a:cs typeface="Arial" pitchFamily="34" charset="-120"/>
+              </a:rPr>
+              <a:t>jacktol’s</a:t>
+            </a:r>
             <a:r>
               <a:rPr lang="en-US" sz="1050" dirty="0">
                 <a:solidFill>
@@ -9507,7 +9594,51 @@
                 <a:ea typeface="Arial" pitchFamily="34" charset="-122"/>
                 <a:cs typeface="Arial" pitchFamily="34" charset="-120"/>
               </a:rPr>
-              <a:t>jacktol’s real-audio numbers carry an unverified train/test-overlap risk, flagged explicitly rather than presented as a clean win.</a:t>
+              <a:t> fine-tuned </a:t>
+            </a:r>
+            <a:r>
+              <a:rPr lang="en-US" sz="1050" dirty="0" err="1">
+                <a:solidFill>
+                  <a:srgbClr val="6B7A86"/>
+                </a:solidFill>
+                <a:latin typeface="Arial" pitchFamily="34" charset="0"/>
+                <a:ea typeface="Arial" pitchFamily="34" charset="-122"/>
+                <a:cs typeface="Arial" pitchFamily="34" charset="-120"/>
+              </a:rPr>
+              <a:t>medium.en</a:t>
+            </a:r>
+            <a:r>
+              <a:rPr lang="en-US" sz="1050" dirty="0">
+                <a:solidFill>
+                  <a:srgbClr val="6B7A86"/>
+                </a:solidFill>
+                <a:latin typeface="Arial" pitchFamily="34" charset="0"/>
+                <a:ea typeface="Arial" pitchFamily="34" charset="-122"/>
+                <a:cs typeface="Arial" pitchFamily="34" charset="-120"/>
+              </a:rPr>
+              <a:t> model shows promising numbers on real audio data (ATC-ASR-Dataset) but there is an unverified train/test leakage risk that the custom data ingest pipeline prevents for the custom fine-tuned </a:t>
+            </a:r>
+            <a:r>
+              <a:rPr lang="en-US" sz="1050" dirty="0" err="1">
+                <a:solidFill>
+                  <a:srgbClr val="6B7A86"/>
+                </a:solidFill>
+                <a:latin typeface="Arial" pitchFamily="34" charset="0"/>
+                <a:ea typeface="Arial" pitchFamily="34" charset="-122"/>
+                <a:cs typeface="Arial" pitchFamily="34" charset="-120"/>
+              </a:rPr>
+              <a:t>small.en</a:t>
+            </a:r>
+            <a:r>
+              <a:rPr lang="en-US" sz="1050" dirty="0">
+                <a:solidFill>
+                  <a:srgbClr val="6B7A86"/>
+                </a:solidFill>
+                <a:latin typeface="Arial" pitchFamily="34" charset="0"/>
+                <a:ea typeface="Arial" pitchFamily="34" charset="-122"/>
+                <a:cs typeface="Arial" pitchFamily="34" charset="-120"/>
+              </a:rPr>
+              <a:t> model.</a:t>
             </a:r>
             <a:endParaRPr lang="en-US" sz="1050" dirty="0"/>
           </a:p>
@@ -9534,7 +9665,7 @@
           <a:bodyPr wrap="square" lIns="0" tIns="0" rIns="0" bIns="0" rtlCol="0" anchor="ctr"/>
           <a:lstStyle/>
           <a:p>
-            <a:pPr algn="l" indent="0" marL="0">
+            <a:pPr marL="0" indent="0" algn="l">
               <a:buNone/>
             </a:pPr>
             <a:r>
@@ -9573,7 +9704,7 @@
           <a:bodyPr wrap="square" lIns="0" tIns="0" rIns="0" bIns="0" rtlCol="0" anchor="ctr"/>
           <a:lstStyle/>
           <a:p>
-            <a:pPr algn="r" indent="0" marL="0">
+            <a:pPr marL="0" indent="0" algn="r">
               <a:buNone/>
             </a:pPr>
             <a:r>
@@ -9892,4 +10023,319 @@
     </a:ext>
   </a:extLst>
 </a:theme>
+</file>
+
+<file path=ppt/theme/theme2.xml><?xml version="1.0" encoding="utf-8"?>
+<a:theme xmlns:a="http://schemas.openxmlformats.org/drawingml/2006/main" name="Office Theme">
+  <a:themeElements>
+    <a:clrScheme name="Office">
+      <a:dk1>
+        <a:sysClr val="windowText" lastClr="000000"/>
+      </a:dk1>
+      <a:lt1>
+        <a:sysClr val="window" lastClr="FFFFFF"/>
+      </a:lt1>
+      <a:dk2>
+        <a:srgbClr val="0E2841"/>
+      </a:dk2>
+      <a:lt2>
+        <a:srgbClr val="E8E8E8"/>
+      </a:lt2>
+      <a:accent1>
+        <a:srgbClr val="156082"/>
+      </a:accent1>
+      <a:accent2>
+        <a:srgbClr val="E97132"/>
+      </a:accent2>
+      <a:accent3>
+        <a:srgbClr val="196B24"/>
+      </a:accent3>
+      <a:accent4>
+        <a:srgbClr val="0F9ED5"/>
+      </a:accent4>
+      <a:accent5>
+        <a:srgbClr val="A02B93"/>
+      </a:accent5>
+      <a:accent6>
+        <a:srgbClr val="4EA72E"/>
+      </a:accent6>
+      <a:hlink>
+        <a:srgbClr val="467886"/>
+      </a:hlink>
+      <a:folHlink>
+        <a:srgbClr val="96607D"/>
+      </a:folHlink>
+    </a:clrScheme>
+    <a:fontScheme name="Office">
+      <a:majorFont>
+        <a:latin typeface="Aptos Display" panose="02110004020202020204"/>
+        <a:ea typeface=""/>
+        <a:cs typeface=""/>
+        <a:font script="Jpan" typeface="游ゴシック Light"/>
+        <a:font script="Hang" typeface="맑은 고딕"/>
+        <a:font script="Hans" typeface="等线 Light"/>
+        <a:font script="Hant" typeface="新細明體"/>
+        <a:font script="Arab" typeface="Times New Roman"/>
+        <a:font script="Hebr" typeface="Times New Roman"/>
+        <a:font script="Thai" typeface="Angsana New"/>
+        <a:font script="Ethi" typeface="Nyala"/>
+        <a:font script="Beng" typeface="Vrinda"/>
+        <a:font script="Gujr" typeface="Shruti"/>
+        <a:font script="Khmr" typeface="MoolBoran"/>
+        <a:font script="Knda" typeface="Tunga"/>
+        <a:font script="Guru" typeface="Raavi"/>
+        <a:font script="Cans" typeface="Euphemia"/>
+        <a:font script="Cher" typeface="Plantagenet Cherokee"/>
+        <a:font script="Yiii" typeface="Microsoft Yi Baiti"/>
+        <a:font script="Tibt" typeface="Microsoft Himalaya"/>
+        <a:font script="Thaa" typeface="MV Boli"/>
+        <a:font script="Deva" typeface="Mangal"/>
+        <a:font script="Telu" typeface="Gautami"/>
+        <a:font script="Taml" typeface="Latha"/>
+        <a:font script="Syrc" typeface="Estrangelo Edessa"/>
+        <a:font script="Orya" typeface="Kalinga"/>
+        <a:font script="Mlym" typeface="Kartika"/>
+        <a:font script="Laoo" typeface="DokChampa"/>
+        <a:font script="Sinh" typeface="Iskoola Pota"/>
+        <a:font script="Mong" typeface="Mongolian Baiti"/>
+        <a:font script="Viet" typeface="Times New Roman"/>
+        <a:font script="Uigh" typeface="Microsoft Uighur"/>
+        <a:font script="Geor" typeface="Sylfaen"/>
+        <a:font script="Armn" typeface="Arial"/>
+        <a:font script="Bugi" typeface="Leelawadee UI"/>
+        <a:font script="Bopo" typeface="Microsoft JhengHei"/>
+        <a:font script="Java" typeface="Javanese Text"/>
+        <a:font script="Lisu" typeface="Segoe UI"/>
+        <a:font script="Mymr" typeface="Myanmar Text"/>
+        <a:font script="Nkoo" typeface="Ebrima"/>
+        <a:font script="Olck" typeface="Nirmala UI"/>
+        <a:font script="Osma" typeface="Ebrima"/>
+        <a:font script="Phag" typeface="Phagspa"/>
+        <a:font script="Syrn" typeface="Estrangelo Edessa"/>
+        <a:font script="Syrj" typeface="Estrangelo Edessa"/>
+        <a:font script="Syre" typeface="Estrangelo Edessa"/>
+        <a:font script="Sora" typeface="Nirmala UI"/>
+        <a:font script="Tale" typeface="Microsoft Tai Le"/>
+        <a:font script="Talu" typeface="Microsoft New Tai Lue"/>
+        <a:font script="Tfng" typeface="Ebrima"/>
+      </a:majorFont>
+      <a:minorFont>
+        <a:latin typeface="Aptos" panose="02110004020202020204"/>
+        <a:ea typeface=""/>
+        <a:cs typeface=""/>
+        <a:font script="Jpan" typeface="游ゴシック"/>
+        <a:font script="Hang" typeface="맑은 고딕"/>
+        <a:font script="Hans" typeface="等线"/>
+        <a:font script="Hant" typeface="新細明體"/>
+        <a:font script="Arab" typeface="Arial"/>
+        <a:font script="Hebr" typeface="Arial"/>
+        <a:font script="Thai" typeface="Cordia New"/>
+        <a:font script="Ethi" typeface="Nyala"/>
+        <a:font script="Beng" typeface="Vrinda"/>
+        <a:font script="Gujr" typeface="Shruti"/>
+        <a:font script="Khmr" typeface="DaunPenh"/>
+        <a:font script="Knda" typeface="Tunga"/>
+        <a:font script="Guru" typeface="Raavi"/>
+        <a:font script="Cans" typeface="Euphemia"/>
+        <a:font script="Cher" typeface="Plantagenet Cherokee"/>
+        <a:font script="Yiii" typeface="Microsoft Yi Baiti"/>
+        <a:font script="Tibt" typeface="Microsoft Himalaya"/>
+        <a:font script="Thaa" typeface="MV Boli"/>
+        <a:font script="Deva" typeface="Mangal"/>
+        <a:font script="Telu" typeface="Gautami"/>
+        <a:font script="Taml" typeface="Latha"/>
+        <a:font script="Syrc" typeface="Estrangelo Edessa"/>
+        <a:font script="Orya" typeface="Kalinga"/>
+        <a:font script="Mlym" typeface="Kartika"/>
+        <a:font script="Laoo" typeface="DokChampa"/>
+        <a:font script="Sinh" typeface="Iskoola Pota"/>
+        <a:font script="Mong" typeface="Mongolian Baiti"/>
+        <a:font script="Viet" typeface="Arial"/>
+        <a:font script="Uigh" typeface="Microsoft Uighur"/>
+        <a:font script="Geor" typeface="Sylfaen"/>
+        <a:font script="Armn" typeface="Arial"/>
+        <a:font script="Bugi" typeface="Leelawadee UI"/>
+        <a:font script="Bopo" typeface="Microsoft JhengHei"/>
+        <a:font script="Java" typeface="Javanese Text"/>
+        <a:font script="Lisu" typeface="Segoe UI"/>
+        <a:font script="Mymr" typeface="Myanmar Text"/>
+        <a:font script="Nkoo" typeface="Ebrima"/>
+        <a:font script="Olck" typeface="Nirmala UI"/>
+        <a:font script="Osma" typeface="Ebrima"/>
+        <a:font script="Phag" typeface="Phagspa"/>
+        <a:font script="Syrn" typeface="Estrangelo Edessa"/>
+        <a:font script="Syrj" typeface="Estrangelo Edessa"/>
+        <a:font script="Syre" typeface="Estrangelo Edessa"/>
+        <a:font script="Sora" typeface="Nirmala UI"/>
+        <a:font script="Tale" typeface="Microsoft Tai Le"/>
+        <a:font script="Talu" typeface="Microsoft New Tai Lue"/>
+        <a:font script="Tfng" typeface="Ebrima"/>
+      </a:minorFont>
+    </a:fontScheme>
+    <a:fmtScheme name="Office">
+      <a:fillStyleLst>
+        <a:solidFill>
+          <a:schemeClr val="phClr"/>
+        </a:solidFill>
+        <a:gradFill rotWithShape="1">
+          <a:gsLst>
+            <a:gs pos="0">
+              <a:schemeClr val="phClr">
+                <a:lumMod val="110000"/>
+                <a:satMod val="105000"/>
+                <a:tint val="67000"/>
+              </a:schemeClr>
+            </a:gs>
+            <a:gs pos="50000">
+              <a:schemeClr val="phClr">
+                <a:lumMod val="105000"/>
+                <a:satMod val="103000"/>
+                <a:tint val="73000"/>
+              </a:schemeClr>
+            </a:gs>
+            <a:gs pos="100000">
+              <a:schemeClr val="phClr">
+                <a:lumMod val="105000"/>
+                <a:satMod val="109000"/>
+                <a:tint val="81000"/>
+              </a:schemeClr>
+            </a:gs>
+          </a:gsLst>
+          <a:lin ang="5400000" scaled="0"/>
+        </a:gradFill>
+        <a:gradFill rotWithShape="1">
+          <a:gsLst>
+            <a:gs pos="0">
+              <a:schemeClr val="phClr">
+                <a:satMod val="103000"/>
+                <a:lumMod val="102000"/>
+                <a:tint val="94000"/>
+              </a:schemeClr>
+            </a:gs>
+            <a:gs pos="50000">
+              <a:schemeClr val="phClr">
+                <a:satMod val="110000"/>
+                <a:lumMod val="100000"/>
+                <a:shade val="100000"/>
+              </a:schemeClr>
+            </a:gs>
+            <a:gs pos="100000">
+              <a:schemeClr val="phClr">
+                <a:lumMod val="99000"/>
+                <a:satMod val="120000"/>
+                <a:shade val="78000"/>
+              </a:schemeClr>
+            </a:gs>
+          </a:gsLst>
+          <a:lin ang="5400000" scaled="0"/>
+        </a:gradFill>
+      </a:fillStyleLst>
+      <a:lnStyleLst>
+        <a:ln w="12700" cap="flat" cmpd="sng" algn="ctr">
+          <a:solidFill>
+            <a:schemeClr val="phClr"/>
+          </a:solidFill>
+          <a:prstDash val="solid"/>
+          <a:miter lim="800000"/>
+        </a:ln>
+        <a:ln w="19050" cap="flat" cmpd="sng" algn="ctr">
+          <a:solidFill>
+            <a:schemeClr val="phClr"/>
+          </a:solidFill>
+          <a:prstDash val="solid"/>
+          <a:miter lim="800000"/>
+        </a:ln>
+        <a:ln w="25400" cap="flat" cmpd="sng" algn="ctr">
+          <a:solidFill>
+            <a:schemeClr val="phClr"/>
+          </a:solidFill>
+          <a:prstDash val="solid"/>
+          <a:miter lim="800000"/>
+        </a:ln>
+      </a:lnStyleLst>
+      <a:effectStyleLst>
+        <a:effectStyle>
+          <a:effectLst/>
+        </a:effectStyle>
+        <a:effectStyle>
+          <a:effectLst/>
+        </a:effectStyle>
+        <a:effectStyle>
+          <a:effectLst>
+            <a:outerShdw blurRad="57150" dist="19050" dir="5400000" algn="ctr" rotWithShape="0">
+              <a:srgbClr val="000000">
+                <a:alpha val="63000"/>
+              </a:srgbClr>
+            </a:outerShdw>
+          </a:effectLst>
+        </a:effectStyle>
+      </a:effectStyleLst>
+      <a:bgFillStyleLst>
+        <a:solidFill>
+          <a:schemeClr val="phClr"/>
+        </a:solidFill>
+        <a:solidFill>
+          <a:schemeClr val="phClr">
+            <a:tint val="95000"/>
+            <a:satMod val="170000"/>
+          </a:schemeClr>
+        </a:solidFill>
+        <a:gradFill rotWithShape="1">
+          <a:gsLst>
+            <a:gs pos="0">
+              <a:schemeClr val="phClr">
+                <a:tint val="93000"/>
+                <a:satMod val="150000"/>
+                <a:shade val="98000"/>
+                <a:lumMod val="102000"/>
+              </a:schemeClr>
+            </a:gs>
+            <a:gs pos="50000">
+              <a:schemeClr val="phClr">
+                <a:tint val="98000"/>
+                <a:satMod val="130000"/>
+                <a:shade val="90000"/>
+                <a:lumMod val="103000"/>
+              </a:schemeClr>
+            </a:gs>
+            <a:gs pos="100000">
+              <a:schemeClr val="phClr">
+                <a:shade val="63000"/>
+                <a:satMod val="120000"/>
+              </a:schemeClr>
+            </a:gs>
+          </a:gsLst>
+          <a:lin ang="5400000" scaled="0"/>
+        </a:gradFill>
+      </a:bgFillStyleLst>
+    </a:fmtScheme>
+  </a:themeElements>
+  <a:objectDefaults>
+    <a:lnDef>
+      <a:spPr/>
+      <a:bodyPr/>
+      <a:lstStyle/>
+      <a:style>
+        <a:lnRef idx="2">
+          <a:schemeClr val="accent1"/>
+        </a:lnRef>
+        <a:fillRef idx="0">
+          <a:schemeClr val="accent1"/>
+        </a:fillRef>
+        <a:effectRef idx="1">
+          <a:schemeClr val="accent1"/>
+        </a:effectRef>
+        <a:fontRef idx="minor">
+          <a:schemeClr val="tx1"/>
+        </a:fontRef>
+      </a:style>
+    </a:lnDef>
+  </a:objectDefaults>
+  <a:extraClrSchemeLst/>
+  <a:extLst>
+    <a:ext uri="{05A4C25C-085E-4340-85A3-A5531E510DB2}">
+      <thm15:themeFamily xmlns:thm15="http://schemas.microsoft.com/office/thememl/2012/main" name="Office Theme" id="{2E142A2C-CD16-42D6-873A-C26D2A0506FA}" vid="{1BDDFF52-6CD6-40A5-AB3C-68EB2F1E4D0A}"/>
+    </a:ext>
+  </a:extLst>
+</a:theme>
 </file>
--- a/docs/Allen_DATA_606_Capstone_Progress_Update.pptx
+++ b/docs/Allen_DATA_606_Capstone_Progress_Update.pptx
@@ -285,7 +285,7 @@
 (medium.en-FT)</c:v>
                 </c:pt>
                 <c:pt idx="2">
-                  <c:v>Our Fine-Tune†
+                  <c:v>Fine-tuned†
 (small.en)</c:v>
                 </c:pt>
               </c:strCache>
@@ -638,7 +638,7 @@
 (medium.en-FT)</c:v>
                 </c:pt>
                 <c:pt idx="2">
-                  <c:v>Our Fine-Tune†
+                  <c:v>Fine-tuned†
 (small.en)</c:v>
                 </c:pt>
               </c:strCache>
@@ -8737,7 +8737,7 @@
                 <a:ea typeface="Arial" pitchFamily="34" charset="-122"/>
                 <a:cs typeface="Arial" pitchFamily="34" charset="-120"/>
               </a:rPr>
-              <a:t>Three conditions on the same 100-utterance sample test set: openai/whisper-medium.en (baseline) model, jacktol’s fine-tuned medium.en (comparison) model, and a custom fine-tuned whisper-</a:t>
+              <a:t>Three conditions on the same 100-utterance sample test set: openai/whisper-medium.en (baseline) model, jacktol’s fine-tuned medium.en (comparison) model, and a fine-tuned whisper-</a:t>
             </a:r>
             <a:r>
               <a:rPr lang="en-US" sz="1100" dirty="0" err="1">
@@ -9109,7 +9109,7 @@
                 <a:ea typeface="Arial" pitchFamily="34" charset="-122"/>
                 <a:cs typeface="Arial" pitchFamily="34" charset="-120"/>
               </a:rPr>
-              <a:t>Custom fine-tuned </a:t>
+              <a:t>Fine-tuned whisper-</a:t>
             </a:r>
             <a:r>
               <a:rPr lang="en-US" sz="1050" dirty="0" err="1">
@@ -9616,7 +9616,7 @@
                 <a:ea typeface="Arial" pitchFamily="34" charset="-122"/>
                 <a:cs typeface="Arial" pitchFamily="34" charset="-120"/>
               </a:rPr>
-              <a:t> model shows promising numbers on real audio data (ATC-ASR-Dataset) but there is an unverified train/test leakage risk that the custom data ingest pipeline prevents for the custom fine-tuned </a:t>
+              <a:t> model shows promising numbers on real audio data (ATC-ASR-Dataset) but there is an unverified train/test leakage risk that the custom data ingest pipeline prevents for the fine-tuned whisper-</a:t>
             </a:r>
             <a:r>
               <a:rPr lang="en-US" sz="1050" dirty="0" err="1">
